--- a/tutorials/week_4/4.merge_sort.pptx
+++ b/tutorials/week_4/4.merge_sort.pptx
@@ -2,22 +2,133 @@
 <file path=ppt/presentation.xml><?xml version="1.0" encoding="utf-8"?>
 <p:presentation xmlns:a="http://schemas.openxmlformats.org/drawingml/2006/main" xmlns:r="http://schemas.openxmlformats.org/officeDocument/2006/relationships" xmlns:p="http://schemas.openxmlformats.org/presentationml/2006/main" saveSubsetFonts="1">
   <p:sldMasterIdLst>
-    <p:sldMasterId r:id="rId1" id="2147483648"/>
+    <p:sldMasterId id="2147483648" r:id="rId1"/>
   </p:sldMasterIdLst>
   <p:sldIdLst>
-    <p:sldId r:id="rId2" id="256"/>
-    <p:sldId r:id="rId7" id="257"/>
-    <p:sldId r:id="rId8" id="258"/>
-    <p:sldId r:id="rId9" id="259"/>
-    <p:sldId r:id="rId10" id="260"/>
-    <p:sldId r:id="rId11" id="261"/>
-    <p:sldId r:id="rId12" id="262"/>
-    <p:sldId r:id="rId13" id="263"/>
-    <p:sldId r:id="rId14" id="264"/>
-    <p:sldId r:id="rId15" id="265"/>
+    <p:sldId id="256" r:id="rId2"/>
+    <p:sldId id="257" r:id="rId3"/>
+    <p:sldId id="258" r:id="rId4"/>
+    <p:sldId id="259" r:id="rId5"/>
+    <p:sldId id="260" r:id="rId6"/>
+    <p:sldId id="261" r:id="rId7"/>
+    <p:sldId id="262" r:id="rId8"/>
+    <p:sldId id="263" r:id="rId9"/>
+    <p:sldId id="264" r:id="rId10"/>
+    <p:sldId id="265" r:id="rId11"/>
   </p:sldIdLst>
   <p:sldSz cx="12192000" cy="6858000"/>
   <p:notesSz cx="6858000" cy="9144000"/>
+  <p:defaultTextStyle>
+    <a:defPPr>
+      <a:defRPr lang="en-US"/>
+    </a:defPPr>
+    <a:lvl1pPr marL="0" algn="l" defTabSz="914400" rtl="0" eaLnBrk="1" latinLnBrk="0" hangingPunct="1">
+      <a:defRPr sz="1800" kern="1200">
+        <a:solidFill>
+          <a:schemeClr val="tx1"/>
+        </a:solidFill>
+        <a:latin typeface="+mn-lt"/>
+        <a:ea typeface="+mn-ea"/>
+        <a:cs typeface="+mn-cs"/>
+      </a:defRPr>
+    </a:lvl1pPr>
+    <a:lvl2pPr marL="457200" algn="l" defTabSz="914400" rtl="0" eaLnBrk="1" latinLnBrk="0" hangingPunct="1">
+      <a:defRPr sz="1800" kern="1200">
+        <a:solidFill>
+          <a:schemeClr val="tx1"/>
+        </a:solidFill>
+        <a:latin typeface="+mn-lt"/>
+        <a:ea typeface="+mn-ea"/>
+        <a:cs typeface="+mn-cs"/>
+      </a:defRPr>
+    </a:lvl2pPr>
+    <a:lvl3pPr marL="914400" algn="l" defTabSz="914400" rtl="0" eaLnBrk="1" latinLnBrk="0" hangingPunct="1">
+      <a:defRPr sz="1800" kern="1200">
+        <a:solidFill>
+          <a:schemeClr val="tx1"/>
+        </a:solidFill>
+        <a:latin typeface="+mn-lt"/>
+        <a:ea typeface="+mn-ea"/>
+        <a:cs typeface="+mn-cs"/>
+      </a:defRPr>
+    </a:lvl3pPr>
+    <a:lvl4pPr marL="1371600" algn="l" defTabSz="914400" rtl="0" eaLnBrk="1" latinLnBrk="0" hangingPunct="1">
+      <a:defRPr sz="1800" kern="1200">
+        <a:solidFill>
+          <a:schemeClr val="tx1"/>
+        </a:solidFill>
+        <a:latin typeface="+mn-lt"/>
+        <a:ea typeface="+mn-ea"/>
+        <a:cs typeface="+mn-cs"/>
+      </a:defRPr>
+    </a:lvl4pPr>
+    <a:lvl5pPr marL="1828800" algn="l" defTabSz="914400" rtl="0" eaLnBrk="1" latinLnBrk="0" hangingPunct="1">
+      <a:defRPr sz="1800" kern="1200">
+        <a:solidFill>
+          <a:schemeClr val="tx1"/>
+        </a:solidFill>
+        <a:latin typeface="+mn-lt"/>
+        <a:ea typeface="+mn-ea"/>
+        <a:cs typeface="+mn-cs"/>
+      </a:defRPr>
+    </a:lvl5pPr>
+    <a:lvl6pPr marL="2286000" algn="l" defTabSz="914400" rtl="0" eaLnBrk="1" latinLnBrk="0" hangingPunct="1">
+      <a:defRPr sz="1800" kern="1200">
+        <a:solidFill>
+          <a:schemeClr val="tx1"/>
+        </a:solidFill>
+        <a:latin typeface="+mn-lt"/>
+        <a:ea typeface="+mn-ea"/>
+        <a:cs typeface="+mn-cs"/>
+      </a:defRPr>
+    </a:lvl6pPr>
+    <a:lvl7pPr marL="2743200" algn="l" defTabSz="914400" rtl="0" eaLnBrk="1" latinLnBrk="0" hangingPunct="1">
+      <a:defRPr sz="1800" kern="1200">
+        <a:solidFill>
+          <a:schemeClr val="tx1"/>
+        </a:solidFill>
+        <a:latin typeface="+mn-lt"/>
+        <a:ea typeface="+mn-ea"/>
+        <a:cs typeface="+mn-cs"/>
+      </a:defRPr>
+    </a:lvl7pPr>
+    <a:lvl8pPr marL="3200400" algn="l" defTabSz="914400" rtl="0" eaLnBrk="1" latinLnBrk="0" hangingPunct="1">
+      <a:defRPr sz="1800" kern="1200">
+        <a:solidFill>
+          <a:schemeClr val="tx1"/>
+        </a:solidFill>
+        <a:latin typeface="+mn-lt"/>
+        <a:ea typeface="+mn-ea"/>
+        <a:cs typeface="+mn-cs"/>
+      </a:defRPr>
+    </a:lvl8pPr>
+    <a:lvl9pPr marL="3657600" algn="l" defTabSz="914400" rtl="0" eaLnBrk="1" latinLnBrk="0" hangingPunct="1">
+      <a:defRPr sz="1800" kern="1200">
+        <a:solidFill>
+          <a:schemeClr val="tx1"/>
+        </a:solidFill>
+        <a:latin typeface="+mn-lt"/>
+        <a:ea typeface="+mn-ea"/>
+        <a:cs typeface="+mn-cs"/>
+      </a:defRPr>
+    </a:lvl9pPr>
+  </p:defaultTextStyle>
+  <p:extLst>
+    <p:ext uri="{EFAFB233-063F-42B5-8137-9DF3F51BA10A}">
+      <p15:sldGuideLst xmlns:p15="http://schemas.microsoft.com/office/powerpoint/2012/main">
+        <p15:guide id="1" orient="horz" pos="2160">
+          <p15:clr>
+            <a:srgbClr val="A4A3A4"/>
+          </p15:clr>
+        </p15:guide>
+        <p15:guide id="2" pos="2880">
+          <p15:clr>
+            <a:srgbClr val="A4A3A4"/>
+          </p15:clr>
+        </p15:guide>
+      </p15:sldGuideLst>
+    </p:ext>
+  </p:extLst>
 </p:presentation>
 </file>
 
@@ -41,7 +152,9 @@
       <p:sp>
         <p:nvSpPr>
           <p:cNvPr id="2" name="Title 1"/>
-          <p:cNvSpPr/>
+          <p:cNvSpPr>
+            <a:spLocks noGrp="1"/>
+          </p:cNvSpPr>
           <p:nvPr>
             <p:ph type="ctrTitle"/>
           </p:nvPr>
@@ -58,19 +171,19 @@
             <a:defPPr/>
           </a:lstStyle>
           <a:p>
-            <a:pPr/>
-            <a:r>
-              <a:rPr lang="en-US" dirty="1" smtClean="0"/>
+            <a:r>
+              <a:rPr lang="en-US"/>
               <a:t>Click to edit Master title style</a:t>
             </a:r>
-            <a:endParaRPr lang="en-US"/>
           </a:p>
         </p:txBody>
       </p:sp>
       <p:sp>
         <p:nvSpPr>
           <p:cNvPr id="3" name="Subtitle 2"/>
-          <p:cNvSpPr/>
+          <p:cNvSpPr>
+            <a:spLocks noGrp="1"/>
+          </p:cNvSpPr>
           <p:nvPr>
             <p:ph type="subTitle" idx="1"/>
           </p:nvPr>
@@ -96,19 +209,19 @@
             <a:lvl9pPr/>
           </a:lstStyle>
           <a:p>
-            <a:pPr/>
-            <a:r>
-              <a:rPr lang="en-US" dirty="1" smtClean="0"/>
+            <a:r>
+              <a:rPr lang="en-US"/>
               <a:t>Click to edit Master subtitle style</a:t>
             </a:r>
-            <a:endParaRPr lang="en-US"/>
           </a:p>
         </p:txBody>
       </p:sp>
       <p:sp>
         <p:nvSpPr>
           <p:cNvPr id="4" name="Date Placeholder 3"/>
-          <p:cNvSpPr/>
+          <p:cNvSpPr>
+            <a:spLocks noGrp="1"/>
+          </p:cNvSpPr>
           <p:nvPr>
             <p:ph type="dt" sz="half" idx="10"/>
           </p:nvPr>
@@ -120,10 +233,9 @@
             <a:defPPr/>
           </a:lstStyle>
           <a:p>
-            <a:pPr/>
             <a:fld id="{E8FD0B7A-F5DD-4F40-B4CB-3B2C354B893A}" type="datetimeFigureOut">
               <a:rPr lang="en-US" smtClean="0"/>
-              <a:t>3/4/2014</a:t>
+              <a:t>10/16/2025</a:t>
             </a:fld>
             <a:endParaRPr lang="en-US"/>
           </a:p>
@@ -132,7 +244,9 @@
       <p:sp>
         <p:nvSpPr>
           <p:cNvPr id="5" name="Footer Placeholder 4"/>
-          <p:cNvSpPr/>
+          <p:cNvSpPr>
+            <a:spLocks noGrp="1"/>
+          </p:cNvSpPr>
           <p:nvPr>
             <p:ph type="ftr" sz="quarter" idx="11"/>
           </p:nvPr>
@@ -144,7 +258,6 @@
             <a:defPPr/>
           </a:lstStyle>
           <a:p>
-            <a:pPr/>
             <a:endParaRPr lang="en-US"/>
           </a:p>
         </p:txBody>
@@ -152,7 +265,9 @@
       <p:sp>
         <p:nvSpPr>
           <p:cNvPr id="6" name="Slide Number Placeholder 5"/>
-          <p:cNvSpPr/>
+          <p:cNvSpPr>
+            <a:spLocks noGrp="1"/>
+          </p:cNvSpPr>
           <p:nvPr>
             <p:ph type="sldNum" sz="quarter" idx="12"/>
           </p:nvPr>
@@ -164,7 +279,6 @@
             <a:defPPr/>
           </a:lstStyle>
           <a:p>
-            <a:pPr/>
             <a:fld id="{93AE1883-0942-4AA3-9DB2-9C7C3A0314B1}" type="slidenum">
               <a:rPr lang="en-US" smtClean="0"/>
               <a:t>‹#›</a:t>
@@ -201,7 +315,9 @@
       <p:sp>
         <p:nvSpPr>
           <p:cNvPr id="2" name="Title 1"/>
-          <p:cNvSpPr/>
+          <p:cNvSpPr>
+            <a:spLocks noGrp="1"/>
+          </p:cNvSpPr>
           <p:nvPr>
             <p:ph type="title"/>
           </p:nvPr>
@@ -213,19 +329,19 @@
             <a:defPPr/>
           </a:lstStyle>
           <a:p>
-            <a:pPr/>
-            <a:r>
-              <a:rPr lang="en-US" dirty="1" smtClean="0"/>
+            <a:r>
+              <a:rPr lang="en-US"/>
               <a:t>Click to edit Master title style</a:t>
             </a:r>
-            <a:endParaRPr lang="en-US"/>
           </a:p>
         </p:txBody>
       </p:sp>
       <p:sp>
         <p:nvSpPr>
           <p:cNvPr id="3" name="Vertical Text Placeholder 2"/>
-          <p:cNvSpPr/>
+          <p:cNvSpPr>
+            <a:spLocks noGrp="1"/>
+          </p:cNvSpPr>
           <p:nvPr>
             <p:ph type="body" orient="vert" idx="1"/>
           </p:nvPr>
@@ -239,45 +355,46 @@
           <a:p>
             <a:pPr lvl="0"/>
             <a:r>
-              <a:rPr lang="en-US" dirty="1" smtClean="0"/>
+              <a:rPr lang="en-US"/>
               <a:t>Click to edit Master text styles</a:t>
             </a:r>
           </a:p>
           <a:p>
             <a:pPr lvl="1"/>
             <a:r>
-              <a:rPr lang="en-US" dirty="1" smtClean="0"/>
+              <a:rPr lang="en-US"/>
               <a:t>Second level</a:t>
             </a:r>
           </a:p>
           <a:p>
             <a:pPr lvl="2"/>
             <a:r>
-              <a:rPr lang="en-US" dirty="1" smtClean="0"/>
+              <a:rPr lang="en-US"/>
               <a:t>Third level</a:t>
             </a:r>
           </a:p>
           <a:p>
             <a:pPr lvl="3"/>
             <a:r>
-              <a:rPr lang="en-US" dirty="1" smtClean="0"/>
+              <a:rPr lang="en-US"/>
               <a:t>Fourth level</a:t>
             </a:r>
           </a:p>
           <a:p>
             <a:pPr lvl="4"/>
             <a:r>
-              <a:rPr lang="en-US" dirty="1" smtClean="0"/>
+              <a:rPr lang="en-US"/>
               <a:t>Fifth level</a:t>
             </a:r>
-            <a:endParaRPr lang="en-US"/>
           </a:p>
         </p:txBody>
       </p:sp>
       <p:sp>
         <p:nvSpPr>
           <p:cNvPr id="4" name="Date Placeholder 3"/>
-          <p:cNvSpPr/>
+          <p:cNvSpPr>
+            <a:spLocks noGrp="1"/>
+          </p:cNvSpPr>
           <p:nvPr>
             <p:ph type="dt" sz="half" idx="10"/>
           </p:nvPr>
@@ -289,10 +406,9 @@
             <a:defPPr/>
           </a:lstStyle>
           <a:p>
-            <a:pPr/>
             <a:fld id="{E8FD0B7A-F5DD-4F40-B4CB-3B2C354B893A}" type="datetimeFigureOut">
               <a:rPr lang="en-US" smtClean="0"/>
-              <a:t>3/4/2014</a:t>
+              <a:t>10/16/2025</a:t>
             </a:fld>
             <a:endParaRPr lang="en-US"/>
           </a:p>
@@ -301,7 +417,9 @@
       <p:sp>
         <p:nvSpPr>
           <p:cNvPr id="5" name="Footer Placeholder 4"/>
-          <p:cNvSpPr/>
+          <p:cNvSpPr>
+            <a:spLocks noGrp="1"/>
+          </p:cNvSpPr>
           <p:nvPr>
             <p:ph type="ftr" sz="quarter" idx="11"/>
           </p:nvPr>
@@ -313,7 +431,6 @@
             <a:defPPr/>
           </a:lstStyle>
           <a:p>
-            <a:pPr/>
             <a:endParaRPr lang="en-US"/>
           </a:p>
         </p:txBody>
@@ -321,7 +438,9 @@
       <p:sp>
         <p:nvSpPr>
           <p:cNvPr id="6" name="Slide Number Placeholder 5"/>
-          <p:cNvSpPr/>
+          <p:cNvSpPr>
+            <a:spLocks noGrp="1"/>
+          </p:cNvSpPr>
           <p:nvPr>
             <p:ph type="sldNum" sz="quarter" idx="12"/>
           </p:nvPr>
@@ -333,7 +452,6 @@
             <a:defPPr/>
           </a:lstStyle>
           <a:p>
-            <a:pPr/>
             <a:fld id="{93AE1883-0942-4AA3-9DB2-9C7C3A0314B1}" type="slidenum">
               <a:rPr lang="en-US" smtClean="0"/>
               <a:t>‹#›</a:t>
@@ -370,7 +488,9 @@
       <p:sp>
         <p:nvSpPr>
           <p:cNvPr id="2" name="Vertical Title 1"/>
-          <p:cNvSpPr/>
+          <p:cNvSpPr>
+            <a:spLocks noGrp="1"/>
+          </p:cNvSpPr>
           <p:nvPr>
             <p:ph type="title" orient="vert"/>
           </p:nvPr>
@@ -387,19 +507,19 @@
             <a:defPPr/>
           </a:lstStyle>
           <a:p>
-            <a:pPr/>
-            <a:r>
-              <a:rPr lang="en-US" dirty="1" smtClean="0"/>
+            <a:r>
+              <a:rPr lang="en-US"/>
               <a:t>Click to edit Master title style</a:t>
             </a:r>
-            <a:endParaRPr lang="en-US"/>
           </a:p>
         </p:txBody>
       </p:sp>
       <p:sp>
         <p:nvSpPr>
           <p:cNvPr id="3" name="Vertical Text Placeholder 2"/>
-          <p:cNvSpPr/>
+          <p:cNvSpPr>
+            <a:spLocks noGrp="1"/>
+          </p:cNvSpPr>
           <p:nvPr>
             <p:ph type="body" orient="vert" idx="1"/>
           </p:nvPr>
@@ -418,45 +538,46 @@
           <a:p>
             <a:pPr lvl="0"/>
             <a:r>
-              <a:rPr lang="en-US" dirty="1" smtClean="0"/>
+              <a:rPr lang="en-US"/>
               <a:t>Click to edit Master text styles</a:t>
             </a:r>
           </a:p>
           <a:p>
             <a:pPr lvl="1"/>
             <a:r>
-              <a:rPr lang="en-US" dirty="1" smtClean="0"/>
+              <a:rPr lang="en-US"/>
               <a:t>Second level</a:t>
             </a:r>
           </a:p>
           <a:p>
             <a:pPr lvl="2"/>
             <a:r>
-              <a:rPr lang="en-US" dirty="1" smtClean="0"/>
+              <a:rPr lang="en-US"/>
               <a:t>Third level</a:t>
             </a:r>
           </a:p>
           <a:p>
             <a:pPr lvl="3"/>
             <a:r>
-              <a:rPr lang="en-US" dirty="1" smtClean="0"/>
+              <a:rPr lang="en-US"/>
               <a:t>Fourth level</a:t>
             </a:r>
           </a:p>
           <a:p>
             <a:pPr lvl="4"/>
             <a:r>
-              <a:rPr lang="en-US" dirty="1" smtClean="0"/>
+              <a:rPr lang="en-US"/>
               <a:t>Fifth level</a:t>
             </a:r>
-            <a:endParaRPr lang="en-US"/>
           </a:p>
         </p:txBody>
       </p:sp>
       <p:sp>
         <p:nvSpPr>
           <p:cNvPr id="4" name="Date Placeholder 3"/>
-          <p:cNvSpPr/>
+          <p:cNvSpPr>
+            <a:spLocks noGrp="1"/>
+          </p:cNvSpPr>
           <p:nvPr>
             <p:ph type="dt" sz="half" idx="10"/>
           </p:nvPr>
@@ -468,10 +589,9 @@
             <a:defPPr/>
           </a:lstStyle>
           <a:p>
-            <a:pPr/>
             <a:fld id="{E8FD0B7A-F5DD-4F40-B4CB-3B2C354B893A}" type="datetimeFigureOut">
               <a:rPr lang="en-US" smtClean="0"/>
-              <a:t>3/4/2014</a:t>
+              <a:t>10/16/2025</a:t>
             </a:fld>
             <a:endParaRPr lang="en-US"/>
           </a:p>
@@ -480,7 +600,9 @@
       <p:sp>
         <p:nvSpPr>
           <p:cNvPr id="5" name="Footer Placeholder 4"/>
-          <p:cNvSpPr/>
+          <p:cNvSpPr>
+            <a:spLocks noGrp="1"/>
+          </p:cNvSpPr>
           <p:nvPr>
             <p:ph type="ftr" sz="quarter" idx="11"/>
           </p:nvPr>
@@ -492,7 +614,6 @@
             <a:defPPr/>
           </a:lstStyle>
           <a:p>
-            <a:pPr/>
             <a:endParaRPr lang="en-US"/>
           </a:p>
         </p:txBody>
@@ -500,7 +621,9 @@
       <p:sp>
         <p:nvSpPr>
           <p:cNvPr id="6" name="Slide Number Placeholder 5"/>
-          <p:cNvSpPr/>
+          <p:cNvSpPr>
+            <a:spLocks noGrp="1"/>
+          </p:cNvSpPr>
           <p:nvPr>
             <p:ph type="sldNum" sz="quarter" idx="12"/>
           </p:nvPr>
@@ -512,7 +635,6 @@
             <a:defPPr/>
           </a:lstStyle>
           <a:p>
-            <a:pPr/>
             <a:fld id="{93AE1883-0942-4AA3-9DB2-9C7C3A0314B1}" type="slidenum">
               <a:rPr lang="en-US" smtClean="0"/>
               <a:t>‹#›</a:t>
@@ -549,7 +671,9 @@
       <p:sp>
         <p:nvSpPr>
           <p:cNvPr id="2" name="Title 1"/>
-          <p:cNvSpPr/>
+          <p:cNvSpPr>
+            <a:spLocks noGrp="1"/>
+          </p:cNvSpPr>
           <p:nvPr>
             <p:ph type="title"/>
           </p:nvPr>
@@ -561,21 +685,21 @@
             <a:defPPr/>
           </a:lstStyle>
           <a:p>
-            <a:pPr/>
-            <a:r>
-              <a:rPr lang="en-US" dirty="1" smtClean="0"/>
+            <a:r>
+              <a:rPr lang="en-US"/>
               <a:t>Click to edit Master title style</a:t>
             </a:r>
-            <a:endParaRPr lang="en-US"/>
           </a:p>
         </p:txBody>
       </p:sp>
       <p:sp>
         <p:nvSpPr>
           <p:cNvPr id="3" name="Content Placeholder 2"/>
-          <p:cNvSpPr/>
+          <p:cNvSpPr>
+            <a:spLocks noGrp="1"/>
+          </p:cNvSpPr>
           <p:nvPr>
-            <p:ph type="obj" idx="1"/>
+            <p:ph idx="1"/>
           </p:nvPr>
         </p:nvSpPr>
         <p:spPr/>
@@ -587,45 +711,46 @@
           <a:p>
             <a:pPr lvl="0"/>
             <a:r>
-              <a:rPr lang="en-US" dirty="1" smtClean="0"/>
+              <a:rPr lang="en-US"/>
               <a:t>Click to edit Master text styles</a:t>
             </a:r>
           </a:p>
           <a:p>
             <a:pPr lvl="1"/>
             <a:r>
-              <a:rPr lang="en-US" dirty="1" smtClean="0"/>
+              <a:rPr lang="en-US"/>
               <a:t>Second level</a:t>
             </a:r>
           </a:p>
           <a:p>
             <a:pPr lvl="2"/>
             <a:r>
-              <a:rPr lang="en-US" dirty="1" smtClean="0"/>
+              <a:rPr lang="en-US"/>
               <a:t>Third level</a:t>
             </a:r>
           </a:p>
           <a:p>
             <a:pPr lvl="3"/>
             <a:r>
-              <a:rPr lang="en-US" dirty="1" smtClean="0"/>
+              <a:rPr lang="en-US"/>
               <a:t>Fourth level</a:t>
             </a:r>
           </a:p>
           <a:p>
             <a:pPr lvl="4"/>
             <a:r>
-              <a:rPr lang="en-US" dirty="1" smtClean="0"/>
+              <a:rPr lang="en-US"/>
               <a:t>Fifth level</a:t>
             </a:r>
-            <a:endParaRPr lang="en-US"/>
           </a:p>
         </p:txBody>
       </p:sp>
       <p:sp>
         <p:nvSpPr>
           <p:cNvPr id="4" name="Date Placeholder 3"/>
-          <p:cNvSpPr/>
+          <p:cNvSpPr>
+            <a:spLocks noGrp="1"/>
+          </p:cNvSpPr>
           <p:nvPr>
             <p:ph type="dt" sz="half" idx="10"/>
           </p:nvPr>
@@ -637,10 +762,9 @@
             <a:defPPr/>
           </a:lstStyle>
           <a:p>
-            <a:pPr/>
             <a:fld id="{E8FD0B7A-F5DD-4F40-B4CB-3B2C354B893A}" type="datetimeFigureOut">
               <a:rPr lang="en-US" smtClean="0"/>
-              <a:t>3/4/2014</a:t>
+              <a:t>10/16/2025</a:t>
             </a:fld>
             <a:endParaRPr lang="en-US"/>
           </a:p>
@@ -649,7 +773,9 @@
       <p:sp>
         <p:nvSpPr>
           <p:cNvPr id="5" name="Footer Placeholder 4"/>
-          <p:cNvSpPr/>
+          <p:cNvSpPr>
+            <a:spLocks noGrp="1"/>
+          </p:cNvSpPr>
           <p:nvPr>
             <p:ph type="ftr" sz="quarter" idx="11"/>
           </p:nvPr>
@@ -661,7 +787,6 @@
             <a:defPPr/>
           </a:lstStyle>
           <a:p>
-            <a:pPr/>
             <a:endParaRPr lang="en-US"/>
           </a:p>
         </p:txBody>
@@ -669,7 +794,9 @@
       <p:sp>
         <p:nvSpPr>
           <p:cNvPr id="6" name="Slide Number Placeholder 5"/>
-          <p:cNvSpPr/>
+          <p:cNvSpPr>
+            <a:spLocks noGrp="1"/>
+          </p:cNvSpPr>
           <p:nvPr>
             <p:ph type="sldNum" sz="quarter" idx="12"/>
           </p:nvPr>
@@ -681,7 +808,6 @@
             <a:defPPr/>
           </a:lstStyle>
           <a:p>
-            <a:pPr/>
             <a:fld id="{93AE1883-0942-4AA3-9DB2-9C7C3A0314B1}" type="slidenum">
               <a:rPr lang="en-US" smtClean="0"/>
               <a:t>‹#›</a:t>
@@ -718,7 +844,9 @@
       <p:sp>
         <p:nvSpPr>
           <p:cNvPr id="2" name="Title 1"/>
-          <p:cNvSpPr/>
+          <p:cNvSpPr>
+            <a:spLocks noGrp="1"/>
+          </p:cNvSpPr>
           <p:nvPr>
             <p:ph type="title"/>
           </p:nvPr>
@@ -736,19 +864,19 @@
             <a:lvl1pPr/>
           </a:lstStyle>
           <a:p>
-            <a:pPr/>
-            <a:r>
-              <a:rPr lang="en-US" dirty="1" smtClean="0"/>
+            <a:r>
+              <a:rPr lang="en-US"/>
               <a:t>Click to edit Master title style</a:t>
             </a:r>
-            <a:endParaRPr lang="en-US"/>
           </a:p>
         </p:txBody>
       </p:sp>
       <p:sp>
         <p:nvSpPr>
           <p:cNvPr id="3" name="Text Placeholder 2"/>
-          <p:cNvSpPr/>
+          <p:cNvSpPr>
+            <a:spLocks noGrp="1"/>
+          </p:cNvSpPr>
           <p:nvPr>
             <p:ph type="body" idx="1"/>
           </p:nvPr>
@@ -776,7 +904,7 @@
           <a:p>
             <a:pPr lvl="0"/>
             <a:r>
-              <a:rPr lang="en-US" dirty="1" smtClean="0"/>
+              <a:rPr lang="en-US"/>
               <a:t>Click to edit Master text styles</a:t>
             </a:r>
           </a:p>
@@ -785,7 +913,9 @@
       <p:sp>
         <p:nvSpPr>
           <p:cNvPr id="4" name="Date Placeholder 3"/>
-          <p:cNvSpPr/>
+          <p:cNvSpPr>
+            <a:spLocks noGrp="1"/>
+          </p:cNvSpPr>
           <p:nvPr>
             <p:ph type="dt" sz="half" idx="10"/>
           </p:nvPr>
@@ -797,10 +927,9 @@
             <a:defPPr/>
           </a:lstStyle>
           <a:p>
-            <a:pPr/>
             <a:fld id="{E8FD0B7A-F5DD-4F40-B4CB-3B2C354B893A}" type="datetimeFigureOut">
               <a:rPr lang="en-US" smtClean="0"/>
-              <a:t>3/4/2014</a:t>
+              <a:t>10/16/2025</a:t>
             </a:fld>
             <a:endParaRPr lang="en-US"/>
           </a:p>
@@ -809,7 +938,9 @@
       <p:sp>
         <p:nvSpPr>
           <p:cNvPr id="5" name="Footer Placeholder 4"/>
-          <p:cNvSpPr/>
+          <p:cNvSpPr>
+            <a:spLocks noGrp="1"/>
+          </p:cNvSpPr>
           <p:nvPr>
             <p:ph type="ftr" sz="quarter" idx="11"/>
           </p:nvPr>
@@ -821,7 +952,6 @@
             <a:defPPr/>
           </a:lstStyle>
           <a:p>
-            <a:pPr/>
             <a:endParaRPr lang="en-US"/>
           </a:p>
         </p:txBody>
@@ -829,7 +959,9 @@
       <p:sp>
         <p:nvSpPr>
           <p:cNvPr id="6" name="Slide Number Placeholder 5"/>
-          <p:cNvSpPr/>
+          <p:cNvSpPr>
+            <a:spLocks noGrp="1"/>
+          </p:cNvSpPr>
           <p:nvPr>
             <p:ph type="sldNum" sz="quarter" idx="12"/>
           </p:nvPr>
@@ -841,7 +973,6 @@
             <a:defPPr/>
           </a:lstStyle>
           <a:p>
-            <a:pPr/>
             <a:fld id="{93AE1883-0942-4AA3-9DB2-9C7C3A0314B1}" type="slidenum">
               <a:rPr lang="en-US" smtClean="0"/>
               <a:t>‹#›</a:t>
@@ -878,7 +1009,9 @@
       <p:sp>
         <p:nvSpPr>
           <p:cNvPr id="2" name="Title 1"/>
-          <p:cNvSpPr/>
+          <p:cNvSpPr>
+            <a:spLocks noGrp="1"/>
+          </p:cNvSpPr>
           <p:nvPr>
             <p:ph type="title"/>
           </p:nvPr>
@@ -890,21 +1023,21 @@
             <a:defPPr/>
           </a:lstStyle>
           <a:p>
-            <a:pPr/>
-            <a:r>
-              <a:rPr lang="en-US" dirty="1" smtClean="0"/>
+            <a:r>
+              <a:rPr lang="en-US"/>
               <a:t>Click to edit Master title style</a:t>
             </a:r>
-            <a:endParaRPr lang="en-US"/>
           </a:p>
         </p:txBody>
       </p:sp>
       <p:sp>
         <p:nvSpPr>
           <p:cNvPr id="3" name="Content Placeholder 2"/>
-          <p:cNvSpPr/>
+          <p:cNvSpPr>
+            <a:spLocks noGrp="1"/>
+          </p:cNvSpPr>
           <p:nvPr>
-            <p:ph type="obj" sz="half" idx="1"/>
+            <p:ph sz="half" idx="1"/>
           </p:nvPr>
         </p:nvSpPr>
         <p:spPr>
@@ -930,47 +1063,48 @@
           <a:p>
             <a:pPr lvl="0"/>
             <a:r>
-              <a:rPr lang="en-US" dirty="1" smtClean="0"/>
+              <a:rPr lang="en-US"/>
               <a:t>Click to edit Master text styles</a:t>
             </a:r>
           </a:p>
           <a:p>
             <a:pPr lvl="1"/>
             <a:r>
-              <a:rPr lang="en-US" dirty="1" smtClean="0"/>
+              <a:rPr lang="en-US"/>
               <a:t>Second level</a:t>
             </a:r>
           </a:p>
           <a:p>
             <a:pPr lvl="2"/>
             <a:r>
-              <a:rPr lang="en-US" dirty="1" smtClean="0"/>
+              <a:rPr lang="en-US"/>
               <a:t>Third level</a:t>
             </a:r>
           </a:p>
           <a:p>
             <a:pPr lvl="3"/>
             <a:r>
-              <a:rPr lang="en-US" dirty="1" smtClean="0"/>
+              <a:rPr lang="en-US"/>
               <a:t>Fourth level</a:t>
             </a:r>
           </a:p>
           <a:p>
             <a:pPr lvl="4"/>
             <a:r>
-              <a:rPr lang="en-US" dirty="1" smtClean="0"/>
+              <a:rPr lang="en-US"/>
               <a:t>Fifth level</a:t>
             </a:r>
-            <a:endParaRPr lang="en-US"/>
           </a:p>
         </p:txBody>
       </p:sp>
       <p:sp>
         <p:nvSpPr>
           <p:cNvPr id="4" name="Content Placeholder 3"/>
-          <p:cNvSpPr/>
+          <p:cNvSpPr>
+            <a:spLocks noGrp="1"/>
+          </p:cNvSpPr>
           <p:nvPr>
-            <p:ph type="obj" sz="half" idx="2"/>
+            <p:ph sz="half" idx="2"/>
           </p:nvPr>
         </p:nvSpPr>
         <p:spPr>
@@ -996,45 +1130,46 @@
           <a:p>
             <a:pPr lvl="0"/>
             <a:r>
-              <a:rPr lang="en-US" dirty="1" smtClean="0"/>
+              <a:rPr lang="en-US"/>
               <a:t>Click to edit Master text styles</a:t>
             </a:r>
           </a:p>
           <a:p>
             <a:pPr lvl="1"/>
             <a:r>
-              <a:rPr lang="en-US" dirty="1" smtClean="0"/>
+              <a:rPr lang="en-US"/>
               <a:t>Second level</a:t>
             </a:r>
           </a:p>
           <a:p>
             <a:pPr lvl="2"/>
             <a:r>
-              <a:rPr lang="en-US" dirty="1" smtClean="0"/>
+              <a:rPr lang="en-US"/>
               <a:t>Third level</a:t>
             </a:r>
           </a:p>
           <a:p>
             <a:pPr lvl="3"/>
             <a:r>
-              <a:rPr lang="en-US" dirty="1" smtClean="0"/>
+              <a:rPr lang="en-US"/>
               <a:t>Fourth level</a:t>
             </a:r>
           </a:p>
           <a:p>
             <a:pPr lvl="4"/>
             <a:r>
-              <a:rPr lang="en-US" dirty="1" smtClean="0"/>
+              <a:rPr lang="en-US"/>
               <a:t>Fifth level</a:t>
             </a:r>
-            <a:endParaRPr lang="en-US"/>
           </a:p>
         </p:txBody>
       </p:sp>
       <p:sp>
         <p:nvSpPr>
           <p:cNvPr id="5" name="Date Placeholder 4"/>
-          <p:cNvSpPr/>
+          <p:cNvSpPr>
+            <a:spLocks noGrp="1"/>
+          </p:cNvSpPr>
           <p:nvPr>
             <p:ph type="dt" sz="half" idx="10"/>
           </p:nvPr>
@@ -1046,10 +1181,9 @@
             <a:defPPr/>
           </a:lstStyle>
           <a:p>
-            <a:pPr/>
             <a:fld id="{E8FD0B7A-F5DD-4F40-B4CB-3B2C354B893A}" type="datetimeFigureOut">
               <a:rPr lang="en-US" smtClean="0"/>
-              <a:t>3/4/2014</a:t>
+              <a:t>10/16/2025</a:t>
             </a:fld>
             <a:endParaRPr lang="en-US"/>
           </a:p>
@@ -1058,7 +1192,9 @@
       <p:sp>
         <p:nvSpPr>
           <p:cNvPr id="6" name="Footer Placeholder 5"/>
-          <p:cNvSpPr/>
+          <p:cNvSpPr>
+            <a:spLocks noGrp="1"/>
+          </p:cNvSpPr>
           <p:nvPr>
             <p:ph type="ftr" sz="quarter" idx="11"/>
           </p:nvPr>
@@ -1070,7 +1206,6 @@
             <a:defPPr/>
           </a:lstStyle>
           <a:p>
-            <a:pPr/>
             <a:endParaRPr lang="en-US"/>
           </a:p>
         </p:txBody>
@@ -1078,7 +1213,9 @@
       <p:sp>
         <p:nvSpPr>
           <p:cNvPr id="7" name="Slide Number Placeholder 6"/>
-          <p:cNvSpPr/>
+          <p:cNvSpPr>
+            <a:spLocks noGrp="1"/>
+          </p:cNvSpPr>
           <p:nvPr>
             <p:ph type="sldNum" sz="quarter" idx="12"/>
           </p:nvPr>
@@ -1090,7 +1227,6 @@
             <a:defPPr/>
           </a:lstStyle>
           <a:p>
-            <a:pPr/>
             <a:fld id="{93AE1883-0942-4AA3-9DB2-9C7C3A0314B1}" type="slidenum">
               <a:rPr lang="en-US" smtClean="0"/>
               <a:t>‹#›</a:t>
@@ -1127,7 +1263,9 @@
       <p:sp>
         <p:nvSpPr>
           <p:cNvPr id="2" name="Title 1"/>
-          <p:cNvSpPr/>
+          <p:cNvSpPr>
+            <a:spLocks noGrp="1"/>
+          </p:cNvSpPr>
           <p:nvPr>
             <p:ph type="title"/>
           </p:nvPr>
@@ -1140,19 +1278,19 @@
             <a:lvl1pPr/>
           </a:lstStyle>
           <a:p>
-            <a:pPr/>
-            <a:r>
-              <a:rPr lang="en-US" dirty="1" smtClean="0"/>
+            <a:r>
+              <a:rPr lang="en-US"/>
               <a:t>Click to edit Master title style</a:t>
             </a:r>
-            <a:endParaRPr lang="en-US"/>
           </a:p>
         </p:txBody>
       </p:sp>
       <p:sp>
         <p:nvSpPr>
           <p:cNvPr id="3" name="Text Placeholder 2"/>
-          <p:cNvSpPr/>
+          <p:cNvSpPr>
+            <a:spLocks noGrp="1"/>
+          </p:cNvSpPr>
           <p:nvPr>
             <p:ph type="body" idx="1"/>
           </p:nvPr>
@@ -1180,7 +1318,7 @@
           <a:p>
             <a:pPr lvl="0"/>
             <a:r>
-              <a:rPr lang="en-US" dirty="1" smtClean="0"/>
+              <a:rPr lang="en-US"/>
               <a:t>Click to edit Master text styles</a:t>
             </a:r>
           </a:p>
@@ -1189,9 +1327,11 @@
       <p:sp>
         <p:nvSpPr>
           <p:cNvPr id="4" name="Content Placeholder 3"/>
-          <p:cNvSpPr/>
+          <p:cNvSpPr>
+            <a:spLocks noGrp="1"/>
+          </p:cNvSpPr>
           <p:nvPr>
-            <p:ph type="obj" sz="half" idx="2"/>
+            <p:ph sz="half" idx="2"/>
           </p:nvPr>
         </p:nvSpPr>
         <p:spPr>
@@ -1217,45 +1357,46 @@
           <a:p>
             <a:pPr lvl="0"/>
             <a:r>
-              <a:rPr lang="en-US" dirty="1" smtClean="0"/>
+              <a:rPr lang="en-US"/>
               <a:t>Click to edit Master text styles</a:t>
             </a:r>
           </a:p>
           <a:p>
             <a:pPr lvl="1"/>
             <a:r>
-              <a:rPr lang="en-US" dirty="1" smtClean="0"/>
+              <a:rPr lang="en-US"/>
               <a:t>Second level</a:t>
             </a:r>
           </a:p>
           <a:p>
             <a:pPr lvl="2"/>
             <a:r>
-              <a:rPr lang="en-US" dirty="1" smtClean="0"/>
+              <a:rPr lang="en-US"/>
               <a:t>Third level</a:t>
             </a:r>
           </a:p>
           <a:p>
             <a:pPr lvl="3"/>
             <a:r>
-              <a:rPr lang="en-US" dirty="1" smtClean="0"/>
+              <a:rPr lang="en-US"/>
               <a:t>Fourth level</a:t>
             </a:r>
           </a:p>
           <a:p>
             <a:pPr lvl="4"/>
             <a:r>
-              <a:rPr lang="en-US" dirty="1" smtClean="0"/>
+              <a:rPr lang="en-US"/>
               <a:t>Fifth level</a:t>
             </a:r>
-            <a:endParaRPr lang="en-US"/>
           </a:p>
         </p:txBody>
       </p:sp>
       <p:sp>
         <p:nvSpPr>
           <p:cNvPr id="5" name="Text Placeholder 4"/>
-          <p:cNvSpPr/>
+          <p:cNvSpPr>
+            <a:spLocks noGrp="1"/>
+          </p:cNvSpPr>
           <p:nvPr>
             <p:ph type="body" sz="quarter" idx="3"/>
           </p:nvPr>
@@ -1283,7 +1424,7 @@
           <a:p>
             <a:pPr lvl="0"/>
             <a:r>
-              <a:rPr lang="en-US" dirty="1" smtClean="0"/>
+              <a:rPr lang="en-US"/>
               <a:t>Click to edit Master text styles</a:t>
             </a:r>
           </a:p>
@@ -1292,9 +1433,11 @@
       <p:sp>
         <p:nvSpPr>
           <p:cNvPr id="6" name="Content Placeholder 5"/>
-          <p:cNvSpPr/>
+          <p:cNvSpPr>
+            <a:spLocks noGrp="1"/>
+          </p:cNvSpPr>
           <p:nvPr>
-            <p:ph type="obj" sz="quarter" idx="4"/>
+            <p:ph sz="quarter" idx="4"/>
           </p:nvPr>
         </p:nvSpPr>
         <p:spPr>
@@ -1320,45 +1463,46 @@
           <a:p>
             <a:pPr lvl="0"/>
             <a:r>
-              <a:rPr lang="en-US" dirty="1" smtClean="0"/>
+              <a:rPr lang="en-US"/>
               <a:t>Click to edit Master text styles</a:t>
             </a:r>
           </a:p>
           <a:p>
             <a:pPr lvl="1"/>
             <a:r>
-              <a:rPr lang="en-US" dirty="1" smtClean="0"/>
+              <a:rPr lang="en-US"/>
               <a:t>Second level</a:t>
             </a:r>
           </a:p>
           <a:p>
             <a:pPr lvl="2"/>
             <a:r>
-              <a:rPr lang="en-US" dirty="1" smtClean="0"/>
+              <a:rPr lang="en-US"/>
               <a:t>Third level</a:t>
             </a:r>
           </a:p>
           <a:p>
             <a:pPr lvl="3"/>
             <a:r>
-              <a:rPr lang="en-US" dirty="1" smtClean="0"/>
+              <a:rPr lang="en-US"/>
               <a:t>Fourth level</a:t>
             </a:r>
           </a:p>
           <a:p>
             <a:pPr lvl="4"/>
             <a:r>
-              <a:rPr lang="en-US" dirty="1" smtClean="0"/>
+              <a:rPr lang="en-US"/>
               <a:t>Fifth level</a:t>
             </a:r>
-            <a:endParaRPr lang="en-US"/>
           </a:p>
         </p:txBody>
       </p:sp>
       <p:sp>
         <p:nvSpPr>
           <p:cNvPr id="7" name="Date Placeholder 6"/>
-          <p:cNvSpPr/>
+          <p:cNvSpPr>
+            <a:spLocks noGrp="1"/>
+          </p:cNvSpPr>
           <p:nvPr>
             <p:ph type="dt" sz="half" idx="10"/>
           </p:nvPr>
@@ -1370,10 +1514,9 @@
             <a:defPPr/>
           </a:lstStyle>
           <a:p>
-            <a:pPr/>
             <a:fld id="{E8FD0B7A-F5DD-4F40-B4CB-3B2C354B893A}" type="datetimeFigureOut">
               <a:rPr lang="en-US" smtClean="0"/>
-              <a:t>3/4/2014</a:t>
+              <a:t>10/16/2025</a:t>
             </a:fld>
             <a:endParaRPr lang="en-US"/>
           </a:p>
@@ -1382,7 +1525,9 @@
       <p:sp>
         <p:nvSpPr>
           <p:cNvPr id="8" name="Footer Placeholder 7"/>
-          <p:cNvSpPr/>
+          <p:cNvSpPr>
+            <a:spLocks noGrp="1"/>
+          </p:cNvSpPr>
           <p:nvPr>
             <p:ph type="ftr" sz="quarter" idx="11"/>
           </p:nvPr>
@@ -1394,7 +1539,6 @@
             <a:defPPr/>
           </a:lstStyle>
           <a:p>
-            <a:pPr/>
             <a:endParaRPr lang="en-US"/>
           </a:p>
         </p:txBody>
@@ -1402,7 +1546,9 @@
       <p:sp>
         <p:nvSpPr>
           <p:cNvPr id="9" name="Slide Number Placeholder 8"/>
-          <p:cNvSpPr/>
+          <p:cNvSpPr>
+            <a:spLocks noGrp="1"/>
+          </p:cNvSpPr>
           <p:nvPr>
             <p:ph type="sldNum" sz="quarter" idx="12"/>
           </p:nvPr>
@@ -1414,7 +1560,6 @@
             <a:defPPr/>
           </a:lstStyle>
           <a:p>
-            <a:pPr/>
             <a:fld id="{93AE1883-0942-4AA3-9DB2-9C7C3A0314B1}" type="slidenum">
               <a:rPr lang="en-US" smtClean="0"/>
               <a:t>‹#›</a:t>
@@ -1451,7 +1596,9 @@
       <p:sp>
         <p:nvSpPr>
           <p:cNvPr id="2" name="Title 1"/>
-          <p:cNvSpPr/>
+          <p:cNvSpPr>
+            <a:spLocks noGrp="1"/>
+          </p:cNvSpPr>
           <p:nvPr>
             <p:ph type="title"/>
           </p:nvPr>
@@ -1463,19 +1610,19 @@
             <a:defPPr/>
           </a:lstStyle>
           <a:p>
-            <a:pPr/>
-            <a:r>
-              <a:rPr lang="en-US" dirty="1" smtClean="0"/>
+            <a:r>
+              <a:rPr lang="en-US"/>
               <a:t>Click to edit Master title style</a:t>
             </a:r>
-            <a:endParaRPr lang="en-US"/>
           </a:p>
         </p:txBody>
       </p:sp>
       <p:sp>
         <p:nvSpPr>
           <p:cNvPr id="3" name="Date Placeholder 2"/>
-          <p:cNvSpPr/>
+          <p:cNvSpPr>
+            <a:spLocks noGrp="1"/>
+          </p:cNvSpPr>
           <p:nvPr>
             <p:ph type="dt" sz="half" idx="10"/>
           </p:nvPr>
@@ -1487,10 +1634,9 @@
             <a:defPPr/>
           </a:lstStyle>
           <a:p>
-            <a:pPr/>
             <a:fld id="{E8FD0B7A-F5DD-4F40-B4CB-3B2C354B893A}" type="datetimeFigureOut">
               <a:rPr lang="en-US" smtClean="0"/>
-              <a:t>3/4/2014</a:t>
+              <a:t>10/16/2025</a:t>
             </a:fld>
             <a:endParaRPr lang="en-US"/>
           </a:p>
@@ -1499,7 +1645,9 @@
       <p:sp>
         <p:nvSpPr>
           <p:cNvPr id="4" name="Footer Placeholder 3"/>
-          <p:cNvSpPr/>
+          <p:cNvSpPr>
+            <a:spLocks noGrp="1"/>
+          </p:cNvSpPr>
           <p:nvPr>
             <p:ph type="ftr" sz="quarter" idx="11"/>
           </p:nvPr>
@@ -1511,7 +1659,6 @@
             <a:defPPr/>
           </a:lstStyle>
           <a:p>
-            <a:pPr/>
             <a:endParaRPr lang="en-US"/>
           </a:p>
         </p:txBody>
@@ -1519,7 +1666,9 @@
       <p:sp>
         <p:nvSpPr>
           <p:cNvPr id="5" name="Slide Number Placeholder 4"/>
-          <p:cNvSpPr/>
+          <p:cNvSpPr>
+            <a:spLocks noGrp="1"/>
+          </p:cNvSpPr>
           <p:nvPr>
             <p:ph type="sldNum" sz="quarter" idx="12"/>
           </p:nvPr>
@@ -1531,7 +1680,6 @@
             <a:defPPr/>
           </a:lstStyle>
           <a:p>
-            <a:pPr/>
             <a:fld id="{93AE1883-0942-4AA3-9DB2-9C7C3A0314B1}" type="slidenum">
               <a:rPr lang="en-US" smtClean="0"/>
               <a:t>‹#›</a:t>
@@ -1568,7 +1716,9 @@
       <p:sp>
         <p:nvSpPr>
           <p:cNvPr id="2" name="Date Placeholder 1"/>
-          <p:cNvSpPr/>
+          <p:cNvSpPr>
+            <a:spLocks noGrp="1"/>
+          </p:cNvSpPr>
           <p:nvPr>
             <p:ph type="dt" sz="half" idx="10"/>
           </p:nvPr>
@@ -1580,10 +1730,9 @@
             <a:defPPr/>
           </a:lstStyle>
           <a:p>
-            <a:pPr/>
             <a:fld id="{E8FD0B7A-F5DD-4F40-B4CB-3B2C354B893A}" type="datetimeFigureOut">
               <a:rPr lang="en-US" smtClean="0"/>
-              <a:t>3/4/2014</a:t>
+              <a:t>10/16/2025</a:t>
             </a:fld>
             <a:endParaRPr lang="en-US"/>
           </a:p>
@@ -1592,7 +1741,9 @@
       <p:sp>
         <p:nvSpPr>
           <p:cNvPr id="3" name="Footer Placeholder 2"/>
-          <p:cNvSpPr/>
+          <p:cNvSpPr>
+            <a:spLocks noGrp="1"/>
+          </p:cNvSpPr>
           <p:nvPr>
             <p:ph type="ftr" sz="quarter" idx="11"/>
           </p:nvPr>
@@ -1604,7 +1755,6 @@
             <a:defPPr/>
           </a:lstStyle>
           <a:p>
-            <a:pPr/>
             <a:endParaRPr lang="en-US"/>
           </a:p>
         </p:txBody>
@@ -1612,7 +1762,9 @@
       <p:sp>
         <p:nvSpPr>
           <p:cNvPr id="4" name="Slide Number Placeholder 3"/>
-          <p:cNvSpPr/>
+          <p:cNvSpPr>
+            <a:spLocks noGrp="1"/>
+          </p:cNvSpPr>
           <p:nvPr>
             <p:ph type="sldNum" sz="quarter" idx="12"/>
           </p:nvPr>
@@ -1624,7 +1776,6 @@
             <a:defPPr/>
           </a:lstStyle>
           <a:p>
-            <a:pPr/>
             <a:fld id="{93AE1883-0942-4AA3-9DB2-9C7C3A0314B1}" type="slidenum">
               <a:rPr lang="en-US" smtClean="0"/>
               <a:t>‹#›</a:t>
@@ -1661,7 +1812,9 @@
       <p:sp>
         <p:nvSpPr>
           <p:cNvPr id="2" name="Title 1"/>
-          <p:cNvSpPr/>
+          <p:cNvSpPr>
+            <a:spLocks noGrp="1"/>
+          </p:cNvSpPr>
           <p:nvPr>
             <p:ph type="title"/>
           </p:nvPr>
@@ -1679,21 +1832,21 @@
             <a:lvl1pPr/>
           </a:lstStyle>
           <a:p>
-            <a:pPr/>
-            <a:r>
-              <a:rPr lang="en-US" dirty="1" smtClean="0"/>
+            <a:r>
+              <a:rPr lang="en-US"/>
               <a:t>Click to edit Master title style</a:t>
             </a:r>
-            <a:endParaRPr lang="en-US"/>
           </a:p>
         </p:txBody>
       </p:sp>
       <p:sp>
         <p:nvSpPr>
           <p:cNvPr id="3" name="Content Placeholder 2"/>
-          <p:cNvSpPr/>
+          <p:cNvSpPr>
+            <a:spLocks noGrp="1"/>
+          </p:cNvSpPr>
           <p:nvPr>
-            <p:ph type="obj" idx="1"/>
+            <p:ph idx="1"/>
           </p:nvPr>
         </p:nvSpPr>
         <p:spPr>
@@ -1719,45 +1872,46 @@
           <a:p>
             <a:pPr lvl="0"/>
             <a:r>
-              <a:rPr lang="en-US" dirty="1" smtClean="0"/>
+              <a:rPr lang="en-US"/>
               <a:t>Click to edit Master text styles</a:t>
             </a:r>
           </a:p>
           <a:p>
             <a:pPr lvl="1"/>
             <a:r>
-              <a:rPr lang="en-US" dirty="1" smtClean="0"/>
+              <a:rPr lang="en-US"/>
               <a:t>Second level</a:t>
             </a:r>
           </a:p>
           <a:p>
             <a:pPr lvl="2"/>
             <a:r>
-              <a:rPr lang="en-US" dirty="1" smtClean="0"/>
+              <a:rPr lang="en-US"/>
               <a:t>Third level</a:t>
             </a:r>
           </a:p>
           <a:p>
             <a:pPr lvl="3"/>
             <a:r>
-              <a:rPr lang="en-US" dirty="1" smtClean="0"/>
+              <a:rPr lang="en-US"/>
               <a:t>Fourth level</a:t>
             </a:r>
           </a:p>
           <a:p>
             <a:pPr lvl="4"/>
             <a:r>
-              <a:rPr lang="en-US" dirty="1" smtClean="0"/>
+              <a:rPr lang="en-US"/>
               <a:t>Fifth level</a:t>
             </a:r>
-            <a:endParaRPr lang="en-US"/>
           </a:p>
         </p:txBody>
       </p:sp>
       <p:sp>
         <p:nvSpPr>
           <p:cNvPr id="4" name="Text Placeholder 3"/>
-          <p:cNvSpPr/>
+          <p:cNvSpPr>
+            <a:spLocks noGrp="1"/>
+          </p:cNvSpPr>
           <p:nvPr>
             <p:ph type="body" sz="half" idx="2"/>
           </p:nvPr>
@@ -1785,7 +1939,7 @@
           <a:p>
             <a:pPr lvl="0"/>
             <a:r>
-              <a:rPr lang="en-US" dirty="1" smtClean="0"/>
+              <a:rPr lang="en-US"/>
               <a:t>Click to edit Master text styles</a:t>
             </a:r>
           </a:p>
@@ -1794,7 +1948,9 @@
       <p:sp>
         <p:nvSpPr>
           <p:cNvPr id="5" name="Date Placeholder 4"/>
-          <p:cNvSpPr/>
+          <p:cNvSpPr>
+            <a:spLocks noGrp="1"/>
+          </p:cNvSpPr>
           <p:nvPr>
             <p:ph type="dt" sz="half" idx="10"/>
           </p:nvPr>
@@ -1806,10 +1962,9 @@
             <a:defPPr/>
           </a:lstStyle>
           <a:p>
-            <a:pPr/>
             <a:fld id="{E8FD0B7A-F5DD-4F40-B4CB-3B2C354B893A}" type="datetimeFigureOut">
               <a:rPr lang="en-US" smtClean="0"/>
-              <a:t>3/4/2014</a:t>
+              <a:t>10/16/2025</a:t>
             </a:fld>
             <a:endParaRPr lang="en-US"/>
           </a:p>
@@ -1818,7 +1973,9 @@
       <p:sp>
         <p:nvSpPr>
           <p:cNvPr id="6" name="Footer Placeholder 5"/>
-          <p:cNvSpPr/>
+          <p:cNvSpPr>
+            <a:spLocks noGrp="1"/>
+          </p:cNvSpPr>
           <p:nvPr>
             <p:ph type="ftr" sz="quarter" idx="11"/>
           </p:nvPr>
@@ -1830,7 +1987,6 @@
             <a:defPPr/>
           </a:lstStyle>
           <a:p>
-            <a:pPr/>
             <a:endParaRPr lang="en-US"/>
           </a:p>
         </p:txBody>
@@ -1838,7 +1994,9 @@
       <p:sp>
         <p:nvSpPr>
           <p:cNvPr id="7" name="Slide Number Placeholder 6"/>
-          <p:cNvSpPr/>
+          <p:cNvSpPr>
+            <a:spLocks noGrp="1"/>
+          </p:cNvSpPr>
           <p:nvPr>
             <p:ph type="sldNum" sz="quarter" idx="12"/>
           </p:nvPr>
@@ -1850,7 +2008,6 @@
             <a:defPPr/>
           </a:lstStyle>
           <a:p>
-            <a:pPr/>
             <a:fld id="{93AE1883-0942-4AA3-9DB2-9C7C3A0314B1}" type="slidenum">
               <a:rPr lang="en-US" smtClean="0"/>
               <a:t>‹#›</a:t>
@@ -1887,7 +2044,9 @@
       <p:sp>
         <p:nvSpPr>
           <p:cNvPr id="2" name="Title 1"/>
-          <p:cNvSpPr/>
+          <p:cNvSpPr>
+            <a:spLocks noGrp="1"/>
+          </p:cNvSpPr>
           <p:nvPr>
             <p:ph type="title"/>
           </p:nvPr>
@@ -1905,19 +2064,19 @@
             <a:lvl1pPr/>
           </a:lstStyle>
           <a:p>
-            <a:pPr/>
-            <a:r>
-              <a:rPr lang="en-US" dirty="1" smtClean="0"/>
+            <a:r>
+              <a:rPr lang="en-US"/>
               <a:t>Click to edit Master title style</a:t>
             </a:r>
-            <a:endParaRPr lang="en-US"/>
           </a:p>
         </p:txBody>
       </p:sp>
       <p:sp>
         <p:nvSpPr>
           <p:cNvPr id="3" name="Picture Placeholder 2"/>
-          <p:cNvSpPr/>
+          <p:cNvSpPr>
+            <a:spLocks noGrp="1"/>
+          </p:cNvSpPr>
           <p:nvPr>
             <p:ph type="pic" idx="1"/>
           </p:nvPr>
@@ -1943,7 +2102,6 @@
             <a:lvl9pPr/>
           </a:lstStyle>
           <a:p>
-            <a:pPr/>
             <a:endParaRPr lang="en-US"/>
           </a:p>
         </p:txBody>
@@ -1951,7 +2109,9 @@
       <p:sp>
         <p:nvSpPr>
           <p:cNvPr id="4" name="Text Placeholder 3"/>
-          <p:cNvSpPr/>
+          <p:cNvSpPr>
+            <a:spLocks noGrp="1"/>
+          </p:cNvSpPr>
           <p:nvPr>
             <p:ph type="body" sz="half" idx="2"/>
           </p:nvPr>
@@ -1979,7 +2139,7 @@
           <a:p>
             <a:pPr lvl="0"/>
             <a:r>
-              <a:rPr lang="en-US" dirty="1" smtClean="0"/>
+              <a:rPr lang="en-US"/>
               <a:t>Click to edit Master text styles</a:t>
             </a:r>
           </a:p>
@@ -1988,7 +2148,9 @@
       <p:sp>
         <p:nvSpPr>
           <p:cNvPr id="5" name="Date Placeholder 4"/>
-          <p:cNvSpPr/>
+          <p:cNvSpPr>
+            <a:spLocks noGrp="1"/>
+          </p:cNvSpPr>
           <p:nvPr>
             <p:ph type="dt" sz="half" idx="10"/>
           </p:nvPr>
@@ -2000,10 +2162,9 @@
             <a:defPPr/>
           </a:lstStyle>
           <a:p>
-            <a:pPr/>
             <a:fld id="{E8FD0B7A-F5DD-4F40-B4CB-3B2C354B893A}" type="datetimeFigureOut">
               <a:rPr lang="en-US" smtClean="0"/>
-              <a:t>3/4/2014</a:t>
+              <a:t>10/16/2025</a:t>
             </a:fld>
             <a:endParaRPr lang="en-US"/>
           </a:p>
@@ -2012,7 +2173,9 @@
       <p:sp>
         <p:nvSpPr>
           <p:cNvPr id="6" name="Footer Placeholder 5"/>
-          <p:cNvSpPr/>
+          <p:cNvSpPr>
+            <a:spLocks noGrp="1"/>
+          </p:cNvSpPr>
           <p:nvPr>
             <p:ph type="ftr" sz="quarter" idx="11"/>
           </p:nvPr>
@@ -2024,7 +2187,6 @@
             <a:defPPr/>
           </a:lstStyle>
           <a:p>
-            <a:pPr/>
             <a:endParaRPr lang="en-US"/>
           </a:p>
         </p:txBody>
@@ -2032,7 +2194,9 @@
       <p:sp>
         <p:nvSpPr>
           <p:cNvPr id="7" name="Slide Number Placeholder 6"/>
-          <p:cNvSpPr/>
+          <p:cNvSpPr>
+            <a:spLocks noGrp="1"/>
+          </p:cNvSpPr>
           <p:nvPr>
             <p:ph type="sldNum" sz="quarter" idx="12"/>
           </p:nvPr>
@@ -2044,7 +2208,6 @@
             <a:defPPr/>
           </a:lstStyle>
           <a:p>
-            <a:pPr/>
             <a:fld id="{93AE1883-0942-4AA3-9DB2-9C7C3A0314B1}" type="slidenum">
               <a:rPr lang="en-US" smtClean="0"/>
               <a:t>‹#›</a:t>
@@ -2063,7 +2226,12 @@
 
 <file path=ppt/slideMasters/slideMaster1.xml><?xml version="1.0" encoding="utf-8"?>
 <p:sldMaster xmlns:a="http://schemas.openxmlformats.org/drawingml/2006/main" xmlns:r="http://schemas.openxmlformats.org/officeDocument/2006/relationships" xmlns:p="http://schemas.openxmlformats.org/presentationml/2006/main">
-  <p:cSld name="">
+  <p:cSld>
+    <p:bg>
+      <p:bgRef idx="1001">
+        <a:schemeClr val="bg1"/>
+      </p:bgRef>
+    </p:bg>
     <p:spTree>
       <p:nvGrpSpPr>
         <p:cNvPr id="1" name=""/>
@@ -2081,7 +2249,9 @@
       <p:sp>
         <p:nvSpPr>
           <p:cNvPr id="2" name="Title Placeholder 1"/>
-          <p:cNvSpPr/>
+          <p:cNvSpPr>
+            <a:spLocks noGrp="1"/>
+          </p:cNvSpPr>
           <p:nvPr>
             <p:ph type="title"/>
           </p:nvPr>
@@ -2091,7 +2261,9 @@
             <a:off x="457200" y="274638"/>
             <a:ext cx="8229600" cy="1143000"/>
           </a:xfrm>
-          <a:prstGeom prst="rect"/>
+          <a:prstGeom prst="rect">
+            <a:avLst/>
+          </a:prstGeom>
         </p:spPr>
         <p:txBody>
           <a:bodyPr lIns="91440" tIns="45720" rIns="91440" bIns="45720" rtlCol="0" anchor="ctr">
@@ -2101,19 +2273,19 @@
             <a:defPPr/>
           </a:lstStyle>
           <a:p>
-            <a:pPr/>
-            <a:r>
-              <a:rPr lang="en-US" dirty="1" smtClean="0"/>
+            <a:r>
+              <a:rPr lang="en-US"/>
               <a:t>Click to edit Master title style</a:t>
             </a:r>
-            <a:endParaRPr lang="en-US"/>
           </a:p>
         </p:txBody>
       </p:sp>
       <p:sp>
         <p:nvSpPr>
           <p:cNvPr id="3" name="Text Placeholder 2"/>
-          <p:cNvSpPr/>
+          <p:cNvSpPr>
+            <a:spLocks noGrp="1"/>
+          </p:cNvSpPr>
           <p:nvPr>
             <p:ph type="body" idx="1"/>
           </p:nvPr>
@@ -2123,7 +2295,9 @@
             <a:off x="457200" y="1600200"/>
             <a:ext cx="8229600" cy="4525963"/>
           </a:xfrm>
-          <a:prstGeom prst="rect"/>
+          <a:prstGeom prst="rect">
+            <a:avLst/>
+          </a:prstGeom>
         </p:spPr>
         <p:txBody>
           <a:bodyPr lIns="91440" tIns="45720" rIns="91440" bIns="45720" rtlCol="0">
@@ -2135,45 +2309,46 @@
           <a:p>
             <a:pPr lvl="0"/>
             <a:r>
-              <a:rPr lang="en-US" dirty="1" smtClean="0"/>
+              <a:rPr lang="en-US"/>
               <a:t>Click to edit Master text styles</a:t>
             </a:r>
           </a:p>
           <a:p>
             <a:pPr lvl="1"/>
             <a:r>
-              <a:rPr lang="en-US" dirty="1" smtClean="0"/>
+              <a:rPr lang="en-US"/>
               <a:t>Second level</a:t>
             </a:r>
           </a:p>
           <a:p>
             <a:pPr lvl="2"/>
             <a:r>
-              <a:rPr lang="en-US" dirty="1" smtClean="0"/>
+              <a:rPr lang="en-US"/>
               <a:t>Third level</a:t>
             </a:r>
           </a:p>
           <a:p>
             <a:pPr lvl="3"/>
             <a:r>
-              <a:rPr lang="en-US" dirty="1" smtClean="0"/>
+              <a:rPr lang="en-US"/>
               <a:t>Fourth level</a:t>
             </a:r>
           </a:p>
           <a:p>
             <a:pPr lvl="4"/>
             <a:r>
-              <a:rPr lang="en-US" dirty="1" smtClean="0"/>
+              <a:rPr lang="en-US"/>
               <a:t>Fifth level</a:t>
             </a:r>
-            <a:endParaRPr lang="en-US"/>
           </a:p>
         </p:txBody>
       </p:sp>
       <p:sp>
         <p:nvSpPr>
           <p:cNvPr id="4" name="Date Placeholder 3"/>
-          <p:cNvSpPr/>
+          <p:cNvSpPr>
+            <a:spLocks noGrp="1"/>
+          </p:cNvSpPr>
           <p:nvPr>
             <p:ph type="dt" sz="half" idx="2"/>
           </p:nvPr>
@@ -2183,7 +2358,9 @@
             <a:off x="457200" y="6356350"/>
             <a:ext cx="2133600" cy="365125"/>
           </a:xfrm>
-          <a:prstGeom prst="rect"/>
+          <a:prstGeom prst="rect">
+            <a:avLst/>
+          </a:prstGeom>
         </p:spPr>
         <p:txBody>
           <a:bodyPr lIns="91440" tIns="45720" rIns="91440" bIns="45720" rtlCol="0" anchor="ctr"/>
@@ -2192,10 +2369,9 @@
             <a:lvl1pPr/>
           </a:lstStyle>
           <a:p>
-            <a:pPr/>
             <a:fld id="{E8FD0B7A-F5DD-4F40-B4CB-3B2C354B893A}" type="datetimeFigureOut">
               <a:rPr lang="en-US" smtClean="0"/>
-              <a:t>3/4/2014</a:t>
+              <a:t>10/16/2025</a:t>
             </a:fld>
             <a:endParaRPr lang="en-US"/>
           </a:p>
@@ -2204,7 +2380,9 @@
       <p:sp>
         <p:nvSpPr>
           <p:cNvPr id="5" name="Footer Placeholder 4"/>
-          <p:cNvSpPr/>
+          <p:cNvSpPr>
+            <a:spLocks noGrp="1"/>
+          </p:cNvSpPr>
           <p:nvPr>
             <p:ph type="ftr" sz="quarter" idx="3"/>
           </p:nvPr>
@@ -2214,7 +2392,9 @@
             <a:off x="3124200" y="6356350"/>
             <a:ext cx="2895600" cy="365125"/>
           </a:xfrm>
-          <a:prstGeom prst="rect"/>
+          <a:prstGeom prst="rect">
+            <a:avLst/>
+          </a:prstGeom>
         </p:spPr>
         <p:txBody>
           <a:bodyPr lIns="91440" tIns="45720" rIns="91440" bIns="45720" rtlCol="0" anchor="ctr"/>
@@ -2223,7 +2403,6 @@
             <a:lvl1pPr/>
           </a:lstStyle>
           <a:p>
-            <a:pPr/>
             <a:endParaRPr lang="en-US"/>
           </a:p>
         </p:txBody>
@@ -2231,7 +2410,9 @@
       <p:sp>
         <p:nvSpPr>
           <p:cNvPr id="6" name="Slide Number Placeholder 5"/>
-          <p:cNvSpPr/>
+          <p:cNvSpPr>
+            <a:spLocks noGrp="1"/>
+          </p:cNvSpPr>
           <p:nvPr>
             <p:ph type="sldNum" sz="quarter" idx="4"/>
           </p:nvPr>
@@ -2241,7 +2422,9 @@
             <a:off x="6553200" y="6356350"/>
             <a:ext cx="2133600" cy="365125"/>
           </a:xfrm>
-          <a:prstGeom prst="rect"/>
+          <a:prstGeom prst="rect">
+            <a:avLst/>
+          </a:prstGeom>
         </p:spPr>
         <p:txBody>
           <a:bodyPr lIns="91440" tIns="45720" rIns="91440" bIns="45720" rtlCol="0" anchor="ctr"/>
@@ -2250,7 +2433,6 @@
             <a:lvl1pPr/>
           </a:lstStyle>
           <a:p>
-            <a:pPr/>
             <a:fld id="{93AE1883-0942-4AA3-9DB2-9C7C3A0314B1}" type="slidenum">
               <a:rPr lang="en-US" smtClean="0"/>
               <a:t>‹#›</a:t>
@@ -2275,12 +2457,292 @@
     <p:sldLayoutId id="2147483658" r:id="rId10"/>
     <p:sldLayoutId id="2147483659" r:id="rId11"/>
   </p:sldLayoutIdLst>
+  <p:txStyles>
+    <p:titleStyle>
+      <a:lvl1pPr algn="l" defTabSz="914400" rtl="0" eaLnBrk="1" latinLnBrk="0" hangingPunct="1">
+        <a:lnSpc>
+          <a:spcPct val="90000"/>
+        </a:lnSpc>
+        <a:spcBef>
+          <a:spcPct val="0"/>
+        </a:spcBef>
+        <a:buNone/>
+        <a:defRPr sz="4400" kern="1200">
+          <a:solidFill>
+            <a:schemeClr val="tx1"/>
+          </a:solidFill>
+          <a:latin typeface="+mj-lt"/>
+          <a:ea typeface="+mj-ea"/>
+          <a:cs typeface="+mj-cs"/>
+        </a:defRPr>
+      </a:lvl1pPr>
+    </p:titleStyle>
+    <p:bodyStyle>
+      <a:lvl1pPr marL="228600" indent="-228600" algn="l" defTabSz="914400" rtl="0" eaLnBrk="1" latinLnBrk="0" hangingPunct="1">
+        <a:lnSpc>
+          <a:spcPct val="90000"/>
+        </a:lnSpc>
+        <a:spcBef>
+          <a:spcPts val="1000"/>
+        </a:spcBef>
+        <a:buFont typeface="Arial" panose="020B0604020202020204" pitchFamily="34" charset="0"/>
+        <a:buChar char="•"/>
+        <a:defRPr sz="2800" kern="1200">
+          <a:solidFill>
+            <a:schemeClr val="tx1"/>
+          </a:solidFill>
+          <a:latin typeface="+mn-lt"/>
+          <a:ea typeface="+mn-ea"/>
+          <a:cs typeface="+mn-cs"/>
+        </a:defRPr>
+      </a:lvl1pPr>
+      <a:lvl2pPr marL="685800" indent="-228600" algn="l" defTabSz="914400" rtl="0" eaLnBrk="1" latinLnBrk="0" hangingPunct="1">
+        <a:lnSpc>
+          <a:spcPct val="90000"/>
+        </a:lnSpc>
+        <a:spcBef>
+          <a:spcPts val="500"/>
+        </a:spcBef>
+        <a:buFont typeface="Arial" panose="020B0604020202020204" pitchFamily="34" charset="0"/>
+        <a:buChar char="•"/>
+        <a:defRPr sz="2400" kern="1200">
+          <a:solidFill>
+            <a:schemeClr val="tx1"/>
+          </a:solidFill>
+          <a:latin typeface="+mn-lt"/>
+          <a:ea typeface="+mn-ea"/>
+          <a:cs typeface="+mn-cs"/>
+        </a:defRPr>
+      </a:lvl2pPr>
+      <a:lvl3pPr marL="1143000" indent="-228600" algn="l" defTabSz="914400" rtl="0" eaLnBrk="1" latinLnBrk="0" hangingPunct="1">
+        <a:lnSpc>
+          <a:spcPct val="90000"/>
+        </a:lnSpc>
+        <a:spcBef>
+          <a:spcPts val="500"/>
+        </a:spcBef>
+        <a:buFont typeface="Arial" panose="020B0604020202020204" pitchFamily="34" charset="0"/>
+        <a:buChar char="•"/>
+        <a:defRPr sz="2000" kern="1200">
+          <a:solidFill>
+            <a:schemeClr val="tx1"/>
+          </a:solidFill>
+          <a:latin typeface="+mn-lt"/>
+          <a:ea typeface="+mn-ea"/>
+          <a:cs typeface="+mn-cs"/>
+        </a:defRPr>
+      </a:lvl3pPr>
+      <a:lvl4pPr marL="1600200" indent="-228600" algn="l" defTabSz="914400" rtl="0" eaLnBrk="1" latinLnBrk="0" hangingPunct="1">
+        <a:lnSpc>
+          <a:spcPct val="90000"/>
+        </a:lnSpc>
+        <a:spcBef>
+          <a:spcPts val="500"/>
+        </a:spcBef>
+        <a:buFont typeface="Arial" panose="020B0604020202020204" pitchFamily="34" charset="0"/>
+        <a:buChar char="•"/>
+        <a:defRPr sz="1800" kern="1200">
+          <a:solidFill>
+            <a:schemeClr val="tx1"/>
+          </a:solidFill>
+          <a:latin typeface="+mn-lt"/>
+          <a:ea typeface="+mn-ea"/>
+          <a:cs typeface="+mn-cs"/>
+        </a:defRPr>
+      </a:lvl4pPr>
+      <a:lvl5pPr marL="2057400" indent="-228600" algn="l" defTabSz="914400" rtl="0" eaLnBrk="1" latinLnBrk="0" hangingPunct="1">
+        <a:lnSpc>
+          <a:spcPct val="90000"/>
+        </a:lnSpc>
+        <a:spcBef>
+          <a:spcPts val="500"/>
+        </a:spcBef>
+        <a:buFont typeface="Arial" panose="020B0604020202020204" pitchFamily="34" charset="0"/>
+        <a:buChar char="•"/>
+        <a:defRPr sz="1800" kern="1200">
+          <a:solidFill>
+            <a:schemeClr val="tx1"/>
+          </a:solidFill>
+          <a:latin typeface="+mn-lt"/>
+          <a:ea typeface="+mn-ea"/>
+          <a:cs typeface="+mn-cs"/>
+        </a:defRPr>
+      </a:lvl5pPr>
+      <a:lvl6pPr marL="2514600" indent="-228600" algn="l" defTabSz="914400" rtl="0" eaLnBrk="1" latinLnBrk="0" hangingPunct="1">
+        <a:lnSpc>
+          <a:spcPct val="90000"/>
+        </a:lnSpc>
+        <a:spcBef>
+          <a:spcPts val="500"/>
+        </a:spcBef>
+        <a:buFont typeface="Arial" panose="020B0604020202020204" pitchFamily="34" charset="0"/>
+        <a:buChar char="•"/>
+        <a:defRPr sz="1800" kern="1200">
+          <a:solidFill>
+            <a:schemeClr val="tx1"/>
+          </a:solidFill>
+          <a:latin typeface="+mn-lt"/>
+          <a:ea typeface="+mn-ea"/>
+          <a:cs typeface="+mn-cs"/>
+        </a:defRPr>
+      </a:lvl6pPr>
+      <a:lvl7pPr marL="2971800" indent="-228600" algn="l" defTabSz="914400" rtl="0" eaLnBrk="1" latinLnBrk="0" hangingPunct="1">
+        <a:lnSpc>
+          <a:spcPct val="90000"/>
+        </a:lnSpc>
+        <a:spcBef>
+          <a:spcPts val="500"/>
+        </a:spcBef>
+        <a:buFont typeface="Arial" panose="020B0604020202020204" pitchFamily="34" charset="0"/>
+        <a:buChar char="•"/>
+        <a:defRPr sz="1800" kern="1200">
+          <a:solidFill>
+            <a:schemeClr val="tx1"/>
+          </a:solidFill>
+          <a:latin typeface="+mn-lt"/>
+          <a:ea typeface="+mn-ea"/>
+          <a:cs typeface="+mn-cs"/>
+        </a:defRPr>
+      </a:lvl7pPr>
+      <a:lvl8pPr marL="3429000" indent="-228600" algn="l" defTabSz="914400" rtl="0" eaLnBrk="1" latinLnBrk="0" hangingPunct="1">
+        <a:lnSpc>
+          <a:spcPct val="90000"/>
+        </a:lnSpc>
+        <a:spcBef>
+          <a:spcPts val="500"/>
+        </a:spcBef>
+        <a:buFont typeface="Arial" panose="020B0604020202020204" pitchFamily="34" charset="0"/>
+        <a:buChar char="•"/>
+        <a:defRPr sz="1800" kern="1200">
+          <a:solidFill>
+            <a:schemeClr val="tx1"/>
+          </a:solidFill>
+          <a:latin typeface="+mn-lt"/>
+          <a:ea typeface="+mn-ea"/>
+          <a:cs typeface="+mn-cs"/>
+        </a:defRPr>
+      </a:lvl8pPr>
+      <a:lvl9pPr marL="3886200" indent="-228600" algn="l" defTabSz="914400" rtl="0" eaLnBrk="1" latinLnBrk="0" hangingPunct="1">
+        <a:lnSpc>
+          <a:spcPct val="90000"/>
+        </a:lnSpc>
+        <a:spcBef>
+          <a:spcPts val="500"/>
+        </a:spcBef>
+        <a:buFont typeface="Arial" panose="020B0604020202020204" pitchFamily="34" charset="0"/>
+        <a:buChar char="•"/>
+        <a:defRPr sz="1800" kern="1200">
+          <a:solidFill>
+            <a:schemeClr val="tx1"/>
+          </a:solidFill>
+          <a:latin typeface="+mn-lt"/>
+          <a:ea typeface="+mn-ea"/>
+          <a:cs typeface="+mn-cs"/>
+        </a:defRPr>
+      </a:lvl9pPr>
+    </p:bodyStyle>
+    <p:otherStyle>
+      <a:defPPr>
+        <a:defRPr lang="en-US"/>
+      </a:defPPr>
+      <a:lvl1pPr marL="0" algn="l" defTabSz="914400" rtl="0" eaLnBrk="1" latinLnBrk="0" hangingPunct="1">
+        <a:defRPr sz="1800" kern="1200">
+          <a:solidFill>
+            <a:schemeClr val="tx1"/>
+          </a:solidFill>
+          <a:latin typeface="+mn-lt"/>
+          <a:ea typeface="+mn-ea"/>
+          <a:cs typeface="+mn-cs"/>
+        </a:defRPr>
+      </a:lvl1pPr>
+      <a:lvl2pPr marL="457200" algn="l" defTabSz="914400" rtl="0" eaLnBrk="1" latinLnBrk="0" hangingPunct="1">
+        <a:defRPr sz="1800" kern="1200">
+          <a:solidFill>
+            <a:schemeClr val="tx1"/>
+          </a:solidFill>
+          <a:latin typeface="+mn-lt"/>
+          <a:ea typeface="+mn-ea"/>
+          <a:cs typeface="+mn-cs"/>
+        </a:defRPr>
+      </a:lvl2pPr>
+      <a:lvl3pPr marL="914400" algn="l" defTabSz="914400" rtl="0" eaLnBrk="1" latinLnBrk="0" hangingPunct="1">
+        <a:defRPr sz="1800" kern="1200">
+          <a:solidFill>
+            <a:schemeClr val="tx1"/>
+          </a:solidFill>
+          <a:latin typeface="+mn-lt"/>
+          <a:ea typeface="+mn-ea"/>
+          <a:cs typeface="+mn-cs"/>
+        </a:defRPr>
+      </a:lvl3pPr>
+      <a:lvl4pPr marL="1371600" algn="l" defTabSz="914400" rtl="0" eaLnBrk="1" latinLnBrk="0" hangingPunct="1">
+        <a:defRPr sz="1800" kern="1200">
+          <a:solidFill>
+            <a:schemeClr val="tx1"/>
+          </a:solidFill>
+          <a:latin typeface="+mn-lt"/>
+          <a:ea typeface="+mn-ea"/>
+          <a:cs typeface="+mn-cs"/>
+        </a:defRPr>
+      </a:lvl4pPr>
+      <a:lvl5pPr marL="1828800" algn="l" defTabSz="914400" rtl="0" eaLnBrk="1" latinLnBrk="0" hangingPunct="1">
+        <a:defRPr sz="1800" kern="1200">
+          <a:solidFill>
+            <a:schemeClr val="tx1"/>
+          </a:solidFill>
+          <a:latin typeface="+mn-lt"/>
+          <a:ea typeface="+mn-ea"/>
+          <a:cs typeface="+mn-cs"/>
+        </a:defRPr>
+      </a:lvl5pPr>
+      <a:lvl6pPr marL="2286000" algn="l" defTabSz="914400" rtl="0" eaLnBrk="1" latinLnBrk="0" hangingPunct="1">
+        <a:defRPr sz="1800" kern="1200">
+          <a:solidFill>
+            <a:schemeClr val="tx1"/>
+          </a:solidFill>
+          <a:latin typeface="+mn-lt"/>
+          <a:ea typeface="+mn-ea"/>
+          <a:cs typeface="+mn-cs"/>
+        </a:defRPr>
+      </a:lvl6pPr>
+      <a:lvl7pPr marL="2743200" algn="l" defTabSz="914400" rtl="0" eaLnBrk="1" latinLnBrk="0" hangingPunct="1">
+        <a:defRPr sz="1800" kern="1200">
+          <a:solidFill>
+            <a:schemeClr val="tx1"/>
+          </a:solidFill>
+          <a:latin typeface="+mn-lt"/>
+          <a:ea typeface="+mn-ea"/>
+          <a:cs typeface="+mn-cs"/>
+        </a:defRPr>
+      </a:lvl7pPr>
+      <a:lvl8pPr marL="3200400" algn="l" defTabSz="914400" rtl="0" eaLnBrk="1" latinLnBrk="0" hangingPunct="1">
+        <a:defRPr sz="1800" kern="1200">
+          <a:solidFill>
+            <a:schemeClr val="tx1"/>
+          </a:solidFill>
+          <a:latin typeface="+mn-lt"/>
+          <a:ea typeface="+mn-ea"/>
+          <a:cs typeface="+mn-cs"/>
+        </a:defRPr>
+      </a:lvl8pPr>
+      <a:lvl9pPr marL="3657600" algn="l" defTabSz="914400" rtl="0" eaLnBrk="1" latinLnBrk="0" hangingPunct="1">
+        <a:defRPr sz="1800" kern="1200">
+          <a:solidFill>
+            <a:schemeClr val="tx1"/>
+          </a:solidFill>
+          <a:latin typeface="+mn-lt"/>
+          <a:ea typeface="+mn-ea"/>
+          <a:cs typeface="+mn-cs"/>
+        </a:defRPr>
+      </a:lvl9pPr>
+    </p:otherStyle>
+  </p:txStyles>
 </p:sldMaster>
 </file>
 
 <file path=ppt/slides/slide1.xml><?xml version="1.0" encoding="utf-8"?>
 <p:sld xmlns:a="http://schemas.openxmlformats.org/drawingml/2006/main" xmlns:r="http://schemas.openxmlformats.org/officeDocument/2006/relationships" xmlns:p="http://schemas.openxmlformats.org/presentationml/2006/main">
-  <p:cSld name="">
+  <p:cSld>
     <p:spTree>
       <p:nvGrpSpPr>
         <p:cNvPr id="1" name=""/>
@@ -2306,7 +2768,9 @@
             <a:off x="0" y="-1"/>
             <a:ext cx="12192000" cy="6857999"/>
           </a:xfrm>
-          <a:prstGeom prst="rect"/>
+          <a:prstGeom prst="rect">
+            <a:avLst/>
+          </a:prstGeom>
           <a:solidFill>
             <a:srgbClr val="FFFFFF"/>
           </a:solidFill>
@@ -2336,7 +2800,6 @@
             <a:defPPr/>
           </a:lstStyle>
           <a:p>
-            <a:pPr/>
             <a:endParaRPr lang="en-US"/>
           </a:p>
         </p:txBody>
@@ -2352,7 +2815,9 @@
             <a:off x="929640" y="703804"/>
             <a:ext cx="2528368" cy="683121"/>
           </a:xfrm>
-          <a:prstGeom prst="rect"/>
+          <a:prstGeom prst="rect">
+            <a:avLst/>
+          </a:prstGeom>
           <a:noFill/>
         </p:spPr>
         <p:style>
@@ -2379,9 +2844,8 @@
             <a:defPPr/>
           </a:lstStyle>
           <a:p>
-            <a:pPr/>
-            <a:r>
-              <a:rPr lang="en-US" sz="4406" dirty="1">
+            <a:r>
+              <a:rPr lang="en-US" sz="4406">
                 <a:solidFill>
                   <a:srgbClr val="00AFEF"/>
                 </a:solidFill>
@@ -2394,12 +2858,15 @@
       </p:sp>
     </p:spTree>
   </p:cSld>
+  <p:clrMapOvr>
+    <a:masterClrMapping/>
+  </p:clrMapOvr>
 </p:sld>
 </file>
 
 <file path=ppt/slides/slide10.xml><?xml version="1.0" encoding="utf-8"?>
 <p:sld xmlns:a="http://schemas.openxmlformats.org/drawingml/2006/main" xmlns:r="http://schemas.openxmlformats.org/officeDocument/2006/relationships" xmlns:p="http://schemas.openxmlformats.org/presentationml/2006/main">
-  <p:cSld name="">
+  <p:cSld>
     <p:spTree>
       <p:nvGrpSpPr>
         <p:cNvPr id="1" name=""/>
@@ -2425,7 +2892,9 @@
             <a:off x="0" y="-1"/>
             <a:ext cx="12192000" cy="6857999"/>
           </a:xfrm>
-          <a:prstGeom prst="rect"/>
+          <a:prstGeom prst="rect">
+            <a:avLst/>
+          </a:prstGeom>
           <a:solidFill>
             <a:srgbClr val="FFFFFF"/>
           </a:solidFill>
@@ -2455,7 +2924,6 @@
             <a:defPPr/>
           </a:lstStyle>
           <a:p>
-            <a:pPr/>
             <a:endParaRPr lang="en-US"/>
           </a:p>
         </p:txBody>
@@ -2471,7 +2939,9 @@
             <a:off x="838200" y="1601216"/>
             <a:ext cx="1752600" cy="579120"/>
           </a:xfrm>
-          <a:prstGeom prst="rect"/>
+          <a:prstGeom prst="rect">
+            <a:avLst/>
+          </a:prstGeom>
           <a:solidFill>
             <a:srgbClr val="7E7E7E"/>
           </a:solidFill>
@@ -2501,7 +2971,6 @@
             <a:defPPr/>
           </a:lstStyle>
           <a:p>
-            <a:pPr/>
             <a:endParaRPr lang="en-US"/>
           </a:p>
         </p:txBody>
@@ -2517,7 +2986,9 @@
             <a:off x="2590800" y="1601216"/>
             <a:ext cx="1752600" cy="579120"/>
           </a:xfrm>
-          <a:prstGeom prst="rect"/>
+          <a:prstGeom prst="rect">
+            <a:avLst/>
+          </a:prstGeom>
           <a:solidFill>
             <a:srgbClr val="7E7E7E"/>
           </a:solidFill>
@@ -2547,7 +3018,6 @@
             <a:defPPr/>
           </a:lstStyle>
           <a:p>
-            <a:pPr/>
             <a:endParaRPr lang="en-US"/>
           </a:p>
         </p:txBody>
@@ -2563,7 +3033,9 @@
             <a:off x="4343400" y="1601216"/>
             <a:ext cx="1752600" cy="579120"/>
           </a:xfrm>
-          <a:prstGeom prst="rect"/>
+          <a:prstGeom prst="rect">
+            <a:avLst/>
+          </a:prstGeom>
           <a:solidFill>
             <a:srgbClr val="FFC000">
               <a:alpha val="24706"/>
@@ -2595,7 +3067,6 @@
             <a:defPPr/>
           </a:lstStyle>
           <a:p>
-            <a:pPr/>
             <a:endParaRPr lang="en-US"/>
           </a:p>
         </p:txBody>
@@ -2611,7 +3082,9 @@
             <a:off x="6096000" y="1601216"/>
             <a:ext cx="1752600" cy="579120"/>
           </a:xfrm>
-          <a:prstGeom prst="rect"/>
+          <a:prstGeom prst="rect">
+            <a:avLst/>
+          </a:prstGeom>
           <a:solidFill>
             <a:srgbClr val="FF0000">
               <a:alpha val="24706"/>
@@ -2643,7 +3116,6 @@
             <a:defPPr/>
           </a:lstStyle>
           <a:p>
-            <a:pPr/>
             <a:endParaRPr lang="en-US"/>
           </a:p>
         </p:txBody>
@@ -2659,7 +3131,9 @@
             <a:off x="7848600" y="1601216"/>
             <a:ext cx="1752600" cy="579120"/>
           </a:xfrm>
-          <a:prstGeom prst="rect"/>
+          <a:prstGeom prst="rect">
+            <a:avLst/>
+          </a:prstGeom>
           <a:solidFill>
             <a:srgbClr val="FF0000">
               <a:alpha val="24706"/>
@@ -2691,7 +3165,6 @@
             <a:defPPr/>
           </a:lstStyle>
           <a:p>
-            <a:pPr/>
             <a:endParaRPr lang="en-US"/>
           </a:p>
         </p:txBody>
@@ -2707,7 +3180,9 @@
             <a:off x="9601200" y="1601216"/>
             <a:ext cx="1752600" cy="579120"/>
           </a:xfrm>
-          <a:prstGeom prst="rect"/>
+          <a:prstGeom prst="rect">
+            <a:avLst/>
+          </a:prstGeom>
           <a:solidFill>
             <a:srgbClr val="FF0000">
               <a:alpha val="24706"/>
@@ -2739,7 +3214,6 @@
             <a:defPPr/>
           </a:lstStyle>
           <a:p>
-            <a:pPr/>
             <a:endParaRPr lang="en-US"/>
           </a:p>
         </p:txBody>
@@ -2755,7 +3229,9 @@
             <a:off x="838200" y="2180336"/>
             <a:ext cx="1752600" cy="579120"/>
           </a:xfrm>
-          <a:prstGeom prst="rect"/>
+          <a:prstGeom prst="rect">
+            <a:avLst/>
+          </a:prstGeom>
           <a:solidFill>
             <a:srgbClr val="FFFFFF"/>
           </a:solidFill>
@@ -2785,7 +3261,6 @@
             <a:defPPr/>
           </a:lstStyle>
           <a:p>
-            <a:pPr/>
             <a:endParaRPr lang="en-US"/>
           </a:p>
         </p:txBody>
@@ -2801,7 +3276,9 @@
             <a:off x="2590800" y="2180336"/>
             <a:ext cx="1752600" cy="579120"/>
           </a:xfrm>
-          <a:prstGeom prst="rect"/>
+          <a:prstGeom prst="rect">
+            <a:avLst/>
+          </a:prstGeom>
           <a:solidFill>
             <a:srgbClr val="92D050"/>
           </a:solidFill>
@@ -2831,7 +3308,6 @@
             <a:defPPr/>
           </a:lstStyle>
           <a:p>
-            <a:pPr/>
             <a:endParaRPr lang="en-US"/>
           </a:p>
         </p:txBody>
@@ -2847,7 +3323,9 @@
             <a:off x="4343400" y="2180336"/>
             <a:ext cx="1752600" cy="579120"/>
           </a:xfrm>
-          <a:prstGeom prst="rect"/>
+          <a:prstGeom prst="rect">
+            <a:avLst/>
+          </a:prstGeom>
           <a:solidFill>
             <a:srgbClr val="FFFFFF"/>
           </a:solidFill>
@@ -2877,7 +3355,6 @@
             <a:defPPr/>
           </a:lstStyle>
           <a:p>
-            <a:pPr/>
             <a:endParaRPr lang="en-US"/>
           </a:p>
         </p:txBody>
@@ -2893,7 +3370,9 @@
             <a:off x="6096000" y="2180336"/>
             <a:ext cx="1752600" cy="579120"/>
           </a:xfrm>
-          <a:prstGeom prst="rect"/>
+          <a:prstGeom prst="rect">
+            <a:avLst/>
+          </a:prstGeom>
           <a:solidFill>
             <a:srgbClr val="FFFFFF"/>
           </a:solidFill>
@@ -2923,7 +3402,6 @@
             <a:defPPr/>
           </a:lstStyle>
           <a:p>
-            <a:pPr/>
             <a:endParaRPr lang="en-US"/>
           </a:p>
         </p:txBody>
@@ -2939,7 +3417,9 @@
             <a:off x="7848600" y="2180336"/>
             <a:ext cx="1752600" cy="579120"/>
           </a:xfrm>
-          <a:prstGeom prst="rect"/>
+          <a:prstGeom prst="rect">
+            <a:avLst/>
+          </a:prstGeom>
           <a:solidFill>
             <a:srgbClr val="FFFFFF"/>
           </a:solidFill>
@@ -2969,7 +3449,6 @@
             <a:defPPr/>
           </a:lstStyle>
           <a:p>
-            <a:pPr/>
             <a:endParaRPr lang="en-US"/>
           </a:p>
         </p:txBody>
@@ -2985,7 +3464,9 @@
             <a:off x="9601200" y="2180336"/>
             <a:ext cx="1752600" cy="579120"/>
           </a:xfrm>
-          <a:prstGeom prst="rect"/>
+          <a:prstGeom prst="rect">
+            <a:avLst/>
+          </a:prstGeom>
           <a:solidFill>
             <a:srgbClr val="FFFFFF"/>
           </a:solidFill>
@@ -3015,7 +3496,6 @@
             <a:defPPr/>
           </a:lstStyle>
           <a:p>
-            <a:pPr/>
             <a:endParaRPr lang="en-US"/>
           </a:p>
         </p:txBody>
@@ -3031,7 +3511,9 @@
             <a:off x="838200" y="2759456"/>
             <a:ext cx="1752600" cy="579120"/>
           </a:xfrm>
-          <a:prstGeom prst="rect"/>
+          <a:prstGeom prst="rect">
+            <a:avLst/>
+          </a:prstGeom>
           <a:solidFill>
             <a:srgbClr val="00AF50">
               <a:alpha val="24706"/>
@@ -3063,7 +3545,6 @@
             <a:defPPr/>
           </a:lstStyle>
           <a:p>
-            <a:pPr/>
             <a:endParaRPr lang="en-US"/>
           </a:p>
         </p:txBody>
@@ -3079,7 +3560,9 @@
             <a:off x="2590800" y="2759456"/>
             <a:ext cx="1752600" cy="579120"/>
           </a:xfrm>
-          <a:prstGeom prst="rect"/>
+          <a:prstGeom prst="rect">
+            <a:avLst/>
+          </a:prstGeom>
           <a:solidFill>
             <a:srgbClr val="FFFFFF">
               <a:alpha val="24706"/>
@@ -3111,7 +3594,6 @@
             <a:defPPr/>
           </a:lstStyle>
           <a:p>
-            <a:pPr/>
             <a:endParaRPr lang="en-US"/>
           </a:p>
         </p:txBody>
@@ -3127,7 +3609,9 @@
             <a:off x="4343400" y="2759456"/>
             <a:ext cx="1752600" cy="579120"/>
           </a:xfrm>
-          <a:prstGeom prst="rect"/>
+          <a:prstGeom prst="rect">
+            <a:avLst/>
+          </a:prstGeom>
           <a:solidFill>
             <a:srgbClr val="FFFFFF">
               <a:alpha val="24706"/>
@@ -3159,7 +3643,6 @@
             <a:defPPr/>
           </a:lstStyle>
           <a:p>
-            <a:pPr/>
             <a:endParaRPr lang="en-US"/>
           </a:p>
         </p:txBody>
@@ -3175,7 +3658,9 @@
             <a:off x="6096000" y="2759456"/>
             <a:ext cx="1752600" cy="579120"/>
           </a:xfrm>
-          <a:prstGeom prst="rect"/>
+          <a:prstGeom prst="rect">
+            <a:avLst/>
+          </a:prstGeom>
           <a:solidFill>
             <a:srgbClr val="FFFFFF">
               <a:alpha val="24706"/>
@@ -3207,7 +3692,6 @@
             <a:defPPr/>
           </a:lstStyle>
           <a:p>
-            <a:pPr/>
             <a:endParaRPr lang="en-US"/>
           </a:p>
         </p:txBody>
@@ -3223,7 +3707,9 @@
             <a:off x="7848600" y="2759456"/>
             <a:ext cx="1752600" cy="579120"/>
           </a:xfrm>
-          <a:prstGeom prst="rect"/>
+          <a:prstGeom prst="rect">
+            <a:avLst/>
+          </a:prstGeom>
           <a:solidFill>
             <a:srgbClr val="FFFFFF">
               <a:alpha val="24706"/>
@@ -3255,7 +3741,6 @@
             <a:defPPr/>
           </a:lstStyle>
           <a:p>
-            <a:pPr/>
             <a:endParaRPr lang="en-US"/>
           </a:p>
         </p:txBody>
@@ -3271,7 +3756,9 @@
             <a:off x="9601200" y="2759456"/>
             <a:ext cx="1752600" cy="579120"/>
           </a:xfrm>
-          <a:prstGeom prst="rect"/>
+          <a:prstGeom prst="rect">
+            <a:avLst/>
+          </a:prstGeom>
           <a:solidFill>
             <a:srgbClr val="FFFFFF">
               <a:alpha val="24706"/>
@@ -3303,7 +3790,6 @@
             <a:defPPr/>
           </a:lstStyle>
           <a:p>
-            <a:pPr/>
             <a:endParaRPr lang="en-US"/>
           </a:p>
         </p:txBody>
@@ -3319,7 +3805,9 @@
             <a:off x="2590800" y="1594866"/>
             <a:ext cx="0" cy="1750060"/>
           </a:xfrm>
-          <a:prstGeom prst="line"/>
+          <a:prstGeom prst="line">
+            <a:avLst/>
+          </a:prstGeom>
           <a:ln w="12700">
             <a:solidFill>
               <a:srgbClr val="FFFFFF"/>
@@ -3346,7 +3834,6 @@
             <a:defPPr/>
           </a:lstStyle>
           <a:p>
-            <a:pPr/>
             <a:endParaRPr lang="en-US"/>
           </a:p>
         </p:txBody>
@@ -3362,7 +3849,9 @@
             <a:off x="4343400" y="1594866"/>
             <a:ext cx="0" cy="1750060"/>
           </a:xfrm>
-          <a:prstGeom prst="line"/>
+          <a:prstGeom prst="line">
+            <a:avLst/>
+          </a:prstGeom>
           <a:ln w="12700">
             <a:solidFill>
               <a:srgbClr val="FFFFFF"/>
@@ -3389,7 +3878,6 @@
             <a:defPPr/>
           </a:lstStyle>
           <a:p>
-            <a:pPr/>
             <a:endParaRPr lang="en-US"/>
           </a:p>
         </p:txBody>
@@ -3405,7 +3893,9 @@
             <a:off x="6096000" y="1594866"/>
             <a:ext cx="0" cy="1750060"/>
           </a:xfrm>
-          <a:prstGeom prst="line"/>
+          <a:prstGeom prst="line">
+            <a:avLst/>
+          </a:prstGeom>
           <a:ln w="12700">
             <a:solidFill>
               <a:srgbClr val="FFFFFF"/>
@@ -3432,7 +3922,6 @@
             <a:defPPr/>
           </a:lstStyle>
           <a:p>
-            <a:pPr/>
             <a:endParaRPr lang="en-US"/>
           </a:p>
         </p:txBody>
@@ -3448,7 +3937,9 @@
             <a:off x="7848600" y="1594866"/>
             <a:ext cx="0" cy="1750060"/>
           </a:xfrm>
-          <a:prstGeom prst="line"/>
+          <a:prstGeom prst="line">
+            <a:avLst/>
+          </a:prstGeom>
           <a:ln w="12700">
             <a:solidFill>
               <a:srgbClr val="FFFFFF"/>
@@ -3475,7 +3966,6 @@
             <a:defPPr/>
           </a:lstStyle>
           <a:p>
-            <a:pPr/>
             <a:endParaRPr lang="en-US"/>
           </a:p>
         </p:txBody>
@@ -3491,7 +3981,9 @@
             <a:off x="9601200" y="1594866"/>
             <a:ext cx="0" cy="1750060"/>
           </a:xfrm>
-          <a:prstGeom prst="line"/>
+          <a:prstGeom prst="line">
+            <a:avLst/>
+          </a:prstGeom>
           <a:ln w="12700">
             <a:solidFill>
               <a:srgbClr val="FFFFFF"/>
@@ -3518,7 +4010,6 @@
             <a:defPPr/>
           </a:lstStyle>
           <a:p>
-            <a:pPr/>
             <a:endParaRPr lang="en-US"/>
           </a:p>
         </p:txBody>
@@ -3534,7 +4025,9 @@
             <a:off x="831850" y="2180336"/>
             <a:ext cx="10528300" cy="0"/>
           </a:xfrm>
-          <a:prstGeom prst="line"/>
+          <a:prstGeom prst="line">
+            <a:avLst/>
+          </a:prstGeom>
           <a:ln w="38100">
             <a:solidFill>
               <a:srgbClr val="FFFFFF"/>
@@ -3561,7 +4054,6 @@
             <a:defPPr/>
           </a:lstStyle>
           <a:p>
-            <a:pPr/>
             <a:endParaRPr lang="en-US"/>
           </a:p>
         </p:txBody>
@@ -3577,7 +4069,9 @@
             <a:off x="831850" y="2759456"/>
             <a:ext cx="10528300" cy="0"/>
           </a:xfrm>
-          <a:prstGeom prst="line"/>
+          <a:prstGeom prst="line">
+            <a:avLst/>
+          </a:prstGeom>
           <a:ln w="12700">
             <a:solidFill>
               <a:srgbClr val="FFFFFF"/>
@@ -3604,7 +4098,6 @@
             <a:defPPr/>
           </a:lstStyle>
           <a:p>
-            <a:pPr/>
             <a:endParaRPr lang="en-US"/>
           </a:p>
         </p:txBody>
@@ -3620,7 +4113,9 @@
             <a:off x="838200" y="1594866"/>
             <a:ext cx="0" cy="1750060"/>
           </a:xfrm>
-          <a:prstGeom prst="line"/>
+          <a:prstGeom prst="line">
+            <a:avLst/>
+          </a:prstGeom>
           <a:ln w="12700">
             <a:solidFill>
               <a:srgbClr val="FFFFFF"/>
@@ -3647,7 +4142,6 @@
             <a:defPPr/>
           </a:lstStyle>
           <a:p>
-            <a:pPr/>
             <a:endParaRPr lang="en-US"/>
           </a:p>
         </p:txBody>
@@ -3663,7 +4157,9 @@
             <a:off x="11353800" y="1594866"/>
             <a:ext cx="0" cy="1750060"/>
           </a:xfrm>
-          <a:prstGeom prst="line"/>
+          <a:prstGeom prst="line">
+            <a:avLst/>
+          </a:prstGeom>
           <a:ln w="12700">
             <a:solidFill>
               <a:srgbClr val="FFFFFF"/>
@@ -3690,7 +4186,6 @@
             <a:defPPr/>
           </a:lstStyle>
           <a:p>
-            <a:pPr/>
             <a:endParaRPr lang="en-US"/>
           </a:p>
         </p:txBody>
@@ -3706,7 +4201,9 @@
             <a:off x="831850" y="1601216"/>
             <a:ext cx="10528300" cy="0"/>
           </a:xfrm>
-          <a:prstGeom prst="line"/>
+          <a:prstGeom prst="line">
+            <a:avLst/>
+          </a:prstGeom>
           <a:ln w="12700">
             <a:solidFill>
               <a:srgbClr val="FFFFFF"/>
@@ -3733,7 +4230,6 @@
             <a:defPPr/>
           </a:lstStyle>
           <a:p>
-            <a:pPr/>
             <a:endParaRPr lang="en-US"/>
           </a:p>
         </p:txBody>
@@ -3749,7 +4245,9 @@
             <a:off x="831850" y="3338576"/>
             <a:ext cx="10528300" cy="0"/>
           </a:xfrm>
-          <a:prstGeom prst="line"/>
+          <a:prstGeom prst="line">
+            <a:avLst/>
+          </a:prstGeom>
           <a:ln w="12700">
             <a:solidFill>
               <a:srgbClr val="FFFFFF"/>
@@ -3776,7 +4274,6 @@
             <a:defPPr/>
           </a:lstStyle>
           <a:p>
-            <a:pPr/>
             <a:endParaRPr lang="en-US"/>
           </a:p>
         </p:txBody>
@@ -3792,7 +4289,9 @@
             <a:off x="281940" y="5212715"/>
             <a:ext cx="2532888" cy="25908"/>
           </a:xfrm>
-          <a:prstGeom prst="rect"/>
+          <a:prstGeom prst="rect">
+            <a:avLst/>
+          </a:prstGeom>
           <a:solidFill>
             <a:srgbClr val="000000"/>
           </a:solidFill>
@@ -3822,7 +4321,6 @@
             <a:defPPr/>
           </a:lstStyle>
           <a:p>
-            <a:pPr/>
             <a:endParaRPr lang="en-US"/>
           </a:p>
         </p:txBody>
@@ -3838,7 +4336,9 @@
             <a:off x="929640" y="703804"/>
             <a:ext cx="2528368" cy="683121"/>
           </a:xfrm>
-          <a:prstGeom prst="rect"/>
+          <a:prstGeom prst="rect">
+            <a:avLst/>
+          </a:prstGeom>
           <a:noFill/>
         </p:spPr>
         <p:style>
@@ -3865,9 +4365,8 @@
             <a:defPPr/>
           </a:lstStyle>
           <a:p>
-            <a:pPr/>
-            <a:r>
-              <a:rPr lang="en-US" sz="4406" dirty="1">
+            <a:r>
+              <a:rPr lang="en-US" sz="4406">
                 <a:solidFill>
                   <a:srgbClr val="00AFEF"/>
                 </a:solidFill>
@@ -3889,7 +4388,9 @@
             <a:off x="5117338" y="1680744"/>
             <a:ext cx="206236" cy="496714"/>
           </a:xfrm>
-          <a:prstGeom prst="rect"/>
+          <a:prstGeom prst="rect">
+            <a:avLst/>
+          </a:prstGeom>
           <a:noFill/>
         </p:spPr>
         <p:style>
@@ -3916,9 +4417,8 @@
             <a:defPPr/>
           </a:lstStyle>
           <a:p>
-            <a:pPr/>
-            <a:r>
-              <a:rPr lang="en-US" sz="3204" b="1" dirty="1">
+            <a:r>
+              <a:rPr lang="en-US" sz="3204" b="1">
                 <a:solidFill>
                   <a:srgbClr val="FFFFFF"/>
                 </a:solidFill>
@@ -3940,7 +4440,9 @@
             <a:off x="6870192" y="1680744"/>
             <a:ext cx="206236" cy="496714"/>
           </a:xfrm>
-          <a:prstGeom prst="rect"/>
+          <a:prstGeom prst="rect">
+            <a:avLst/>
+          </a:prstGeom>
           <a:noFill/>
         </p:spPr>
         <p:style>
@@ -3967,9 +4469,8 @@
             <a:defPPr/>
           </a:lstStyle>
           <a:p>
-            <a:pPr/>
-            <a:r>
-              <a:rPr lang="en-US" sz="3204" b="1" dirty="1">
+            <a:r>
+              <a:rPr lang="en-US" sz="3204" b="1">
                 <a:solidFill>
                   <a:srgbClr val="FFFFFF"/>
                 </a:solidFill>
@@ -3991,7 +4492,9 @@
             <a:off x="8623046" y="1680744"/>
             <a:ext cx="206236" cy="496714"/>
           </a:xfrm>
-          <a:prstGeom prst="rect"/>
+          <a:prstGeom prst="rect">
+            <a:avLst/>
+          </a:prstGeom>
           <a:noFill/>
         </p:spPr>
         <p:style>
@@ -4018,9 +4521,8 @@
             <a:defPPr/>
           </a:lstStyle>
           <a:p>
-            <a:pPr/>
-            <a:r>
-              <a:rPr lang="en-US" sz="3204" b="1" dirty="1">
+            <a:r>
+              <a:rPr lang="en-US" sz="3204" b="1">
                 <a:solidFill>
                   <a:srgbClr val="FFFFFF"/>
                 </a:solidFill>
@@ -4042,7 +4544,9 @@
             <a:off x="10376027" y="1680744"/>
             <a:ext cx="206236" cy="496714"/>
           </a:xfrm>
-          <a:prstGeom prst="rect"/>
+          <a:prstGeom prst="rect">
+            <a:avLst/>
+          </a:prstGeom>
           <a:noFill/>
         </p:spPr>
         <p:style>
@@ -4069,9 +4573,8 @@
             <a:defPPr/>
           </a:lstStyle>
           <a:p>
-            <a:pPr/>
-            <a:r>
-              <a:rPr lang="en-US" sz="3204" b="1" dirty="1">
+            <a:r>
+              <a:rPr lang="en-US" sz="3204" b="1">
                 <a:solidFill>
                   <a:srgbClr val="FFFFFF"/>
                 </a:solidFill>
@@ -4093,7 +4596,9 @@
             <a:off x="3364738" y="2259864"/>
             <a:ext cx="206236" cy="496714"/>
           </a:xfrm>
-          <a:prstGeom prst="rect"/>
+          <a:prstGeom prst="rect">
+            <a:avLst/>
+          </a:prstGeom>
           <a:noFill/>
         </p:spPr>
         <p:style>
@@ -4120,9 +4625,8 @@
             <a:defPPr/>
           </a:lstStyle>
           <a:p>
-            <a:pPr/>
-            <a:r>
-              <a:rPr lang="en-US" sz="3204" b="1" dirty="1">
+            <a:r>
+              <a:rPr lang="en-US" sz="3204" b="1">
                 <a:solidFill>
                   <a:srgbClr val="FFFFFF"/>
                 </a:solidFill>
@@ -4144,7 +4648,9 @@
             <a:off x="1611757" y="2839238"/>
             <a:ext cx="206236" cy="496714"/>
           </a:xfrm>
-          <a:prstGeom prst="rect"/>
+          <a:prstGeom prst="rect">
+            <a:avLst/>
+          </a:prstGeom>
           <a:noFill/>
         </p:spPr>
         <p:style>
@@ -4171,9 +4677,8 @@
             <a:defPPr/>
           </a:lstStyle>
           <a:p>
-            <a:pPr/>
-            <a:r>
-              <a:rPr lang="en-US" sz="3204" b="1" dirty="1">
+            <a:r>
+              <a:rPr lang="en-US" sz="3204" b="1">
                 <a:solidFill>
                   <a:srgbClr val="FFFFFF"/>
                 </a:solidFill>
@@ -4195,7 +4700,9 @@
             <a:off x="281940" y="4820438"/>
             <a:ext cx="2535824" cy="496714"/>
           </a:xfrm>
-          <a:prstGeom prst="rect"/>
+          <a:prstGeom prst="rect">
+            <a:avLst/>
+          </a:prstGeom>
           <a:noFill/>
         </p:spPr>
         <p:style>
@@ -4222,9 +4729,8 @@
             <a:defPPr/>
           </a:lstStyle>
           <a:p>
-            <a:pPr/>
-            <a:r>
-              <a:rPr lang="en-US" sz="3204" dirty="1">
+            <a:r>
+              <a:rPr lang="en-US" sz="3204">
                 <a:solidFill>
                   <a:srgbClr val="000000"/>
                 </a:solidFill>
@@ -4246,7 +4752,9 @@
             <a:off x="739140" y="5303417"/>
             <a:ext cx="5737715" cy="433834"/>
           </a:xfrm>
-          <a:prstGeom prst="rect"/>
+          <a:prstGeom prst="rect">
+            <a:avLst/>
+          </a:prstGeom>
           <a:noFill/>
         </p:spPr>
         <p:style>
@@ -4273,9 +4781,8 @@
             <a:defPPr/>
           </a:lstStyle>
           <a:p>
-            <a:pPr/>
-            <a:r>
-              <a:rPr lang="en-US" sz="2798" dirty="1">
+            <a:r>
+              <a:rPr lang="en-US" sz="2798">
                 <a:solidFill>
                   <a:srgbClr val="000000"/>
                 </a:solidFill>
@@ -4297,7 +4804,9 @@
             <a:off x="6467221" y="5303417"/>
             <a:ext cx="182557" cy="433834"/>
           </a:xfrm>
-          <a:prstGeom prst="rect"/>
+          <a:prstGeom prst="rect">
+            <a:avLst/>
+          </a:prstGeom>
           <a:noFill/>
         </p:spPr>
         <p:style>
@@ -4324,9 +4833,8 @@
             <a:defPPr/>
           </a:lstStyle>
           <a:p>
-            <a:pPr/>
-            <a:r>
-              <a:rPr lang="en-US" sz="2798" i="1" dirty="1">
+            <a:r>
+              <a:rPr lang="en-US" sz="2798" i="1">
                 <a:solidFill>
                   <a:srgbClr val="000000"/>
                 </a:solidFill>
@@ -4348,7 +4856,9 @@
             <a:off x="6730873" y="5303417"/>
             <a:ext cx="544722" cy="433834"/>
           </a:xfrm>
-          <a:prstGeom prst="rect"/>
+          <a:prstGeom prst="rect">
+            <a:avLst/>
+          </a:prstGeom>
           <a:noFill/>
         </p:spPr>
         <p:style>
@@ -4375,9 +4885,8 @@
             <a:defPPr/>
           </a:lstStyle>
           <a:p>
-            <a:pPr/>
-            <a:r>
-              <a:rPr lang="en-US" sz="2798" dirty="1">
+            <a:r>
+              <a:rPr lang="en-US" sz="2798">
                 <a:solidFill>
                   <a:srgbClr val="000000"/>
                 </a:solidFill>
@@ -4399,7 +4908,9 @@
             <a:off x="739140" y="5730702"/>
             <a:ext cx="5925251" cy="433462"/>
           </a:xfrm>
-          <a:prstGeom prst="rect"/>
+          <a:prstGeom prst="rect">
+            <a:avLst/>
+          </a:prstGeom>
           <a:noFill/>
         </p:spPr>
         <p:style>
@@ -4426,9 +4937,8 @@
             <a:defPPr/>
           </a:lstStyle>
           <a:p>
-            <a:pPr/>
-            <a:r>
-              <a:rPr lang="en-US" sz="2796" dirty="1">
+            <a:r>
+              <a:rPr lang="en-US" sz="2796">
                 <a:solidFill>
                   <a:srgbClr val="000000"/>
                 </a:solidFill>
@@ -4450,7 +4960,9 @@
             <a:off x="6660769" y="5730702"/>
             <a:ext cx="182401" cy="433462"/>
           </a:xfrm>
-          <a:prstGeom prst="rect"/>
+          <a:prstGeom prst="rect">
+            <a:avLst/>
+          </a:prstGeom>
           <a:noFill/>
         </p:spPr>
         <p:style>
@@ -4477,9 +4989,8 @@
             <a:defPPr/>
           </a:lstStyle>
           <a:p>
-            <a:pPr/>
-            <a:r>
-              <a:rPr lang="en-US" sz="2796" i="1" dirty="1">
+            <a:r>
+              <a:rPr lang="en-US" sz="2796" i="1">
                 <a:solidFill>
                   <a:srgbClr val="000000"/>
                 </a:solidFill>
@@ -4501,7 +5012,9 @@
             <a:off x="6922897" y="5730702"/>
             <a:ext cx="544255" cy="433462"/>
           </a:xfrm>
-          <a:prstGeom prst="rect"/>
+          <a:prstGeom prst="rect">
+            <a:avLst/>
+          </a:prstGeom>
           <a:noFill/>
         </p:spPr>
         <p:style>
@@ -4528,9 +5041,8 @@
             <a:defPPr/>
           </a:lstStyle>
           <a:p>
-            <a:pPr/>
-            <a:r>
-              <a:rPr lang="en-US" sz="2796" dirty="1">
+            <a:r>
+              <a:rPr lang="en-US" sz="2796">
                 <a:solidFill>
                   <a:srgbClr val="000000"/>
                 </a:solidFill>
@@ -4552,7 +5064,9 @@
             <a:off x="739140" y="6157422"/>
             <a:ext cx="4479568" cy="433462"/>
           </a:xfrm>
-          <a:prstGeom prst="rect"/>
+          <a:prstGeom prst="rect">
+            <a:avLst/>
+          </a:prstGeom>
           <a:noFill/>
         </p:spPr>
         <p:style>
@@ -4579,9 +5093,8 @@
             <a:defPPr/>
           </a:lstStyle>
           <a:p>
-            <a:pPr/>
-            <a:r>
-              <a:rPr lang="en-US" sz="2796" dirty="1">
+            <a:r>
+              <a:rPr lang="en-US" sz="2796">
                 <a:solidFill>
                   <a:srgbClr val="000000"/>
                 </a:solidFill>
@@ -4594,12 +5107,15 @@
       </p:sp>
     </p:spTree>
   </p:cSld>
+  <p:clrMapOvr>
+    <a:masterClrMapping/>
+  </p:clrMapOvr>
 </p:sld>
 </file>
 
 <file path=ppt/slides/slide2.xml><?xml version="1.0" encoding="utf-8"?>
 <p:sld xmlns:a="http://schemas.openxmlformats.org/drawingml/2006/main" xmlns:r="http://schemas.openxmlformats.org/officeDocument/2006/relationships" xmlns:p="http://schemas.openxmlformats.org/presentationml/2006/main">
-  <p:cSld name="">
+  <p:cSld>
     <p:spTree>
       <p:nvGrpSpPr>
         <p:cNvPr id="1" name=""/>
@@ -4625,7 +5141,9 @@
             <a:off x="0" y="-1"/>
             <a:ext cx="12192000" cy="6857999"/>
           </a:xfrm>
-          <a:prstGeom prst="rect"/>
+          <a:prstGeom prst="rect">
+            <a:avLst/>
+          </a:prstGeom>
           <a:solidFill>
             <a:srgbClr val="FFFFFF"/>
           </a:solidFill>
@@ -4655,7 +5173,6 @@
             <a:defPPr/>
           </a:lstStyle>
           <a:p>
-            <a:pPr/>
             <a:endParaRPr lang="en-US"/>
           </a:p>
         </p:txBody>
@@ -4671,7 +5188,9 @@
             <a:off x="929640" y="4763897"/>
             <a:ext cx="2368296" cy="24384"/>
           </a:xfrm>
-          <a:prstGeom prst="rect"/>
+          <a:prstGeom prst="rect">
+            <a:avLst/>
+          </a:prstGeom>
           <a:solidFill>
             <a:srgbClr val="000000"/>
           </a:solidFill>
@@ -4701,7 +5220,6 @@
             <a:defPPr/>
           </a:lstStyle>
           <a:p>
-            <a:pPr/>
             <a:endParaRPr lang="en-US"/>
           </a:p>
         </p:txBody>
@@ -4717,7 +5235,9 @@
             <a:off x="929640" y="703804"/>
             <a:ext cx="2528368" cy="683121"/>
           </a:xfrm>
-          <a:prstGeom prst="rect"/>
+          <a:prstGeom prst="rect">
+            <a:avLst/>
+          </a:prstGeom>
           <a:noFill/>
         </p:spPr>
         <p:style>
@@ -4744,9 +5264,8 @@
             <a:defPPr/>
           </a:lstStyle>
           <a:p>
-            <a:pPr/>
-            <a:r>
-              <a:rPr lang="en-US" sz="4406" dirty="1">
+            <a:r>
+              <a:rPr lang="en-US" sz="4406">
                 <a:solidFill>
                   <a:srgbClr val="00AFEF"/>
                 </a:solidFill>
@@ -4768,7 +5287,9 @@
             <a:off x="929640" y="1848092"/>
             <a:ext cx="133201" cy="425648"/>
           </a:xfrm>
-          <a:prstGeom prst="rect"/>
+          <a:prstGeom prst="rect">
+            <a:avLst/>
+          </a:prstGeom>
           <a:noFill/>
         </p:spPr>
         <p:style>
@@ -4795,9 +5316,8 @@
             <a:defPPr/>
           </a:lstStyle>
           <a:p>
-            <a:pPr/>
-            <a:r>
-              <a:rPr lang="en-US" sz="3000" dirty="1">
+            <a:r>
+              <a:rPr lang="en-US" sz="3000">
                 <a:solidFill>
                   <a:srgbClr val="000000"/>
                 </a:solidFill>
@@ -4816,10 +5336,12 @@
         </p:nvSpPr>
         <p:spPr>
           <a:xfrm>
-            <a:off x="1158545" y="1820485"/>
-            <a:ext cx="9800889" cy="465088"/>
-          </a:xfrm>
-          <a:prstGeom prst="rect"/>
+            <a:off x="1158545" y="1799114"/>
+            <a:ext cx="10042365" cy="507831"/>
+          </a:xfrm>
+          <a:prstGeom prst="rect">
+            <a:avLst/>
+          </a:prstGeom>
           <a:noFill/>
         </p:spPr>
         <p:style>
@@ -4846,15 +5368,14 @@
             <a:defPPr/>
           </a:lstStyle>
           <a:p>
-            <a:pPr/>
-            <a:r>
-              <a:rPr lang="en-US" sz="3000" dirty="1">
+            <a:r>
+              <a:rPr lang="en-US" sz="3000" dirty="0">
                 <a:solidFill>
                   <a:srgbClr val="000000"/>
                 </a:solidFill>
                 <a:latin typeface="Calibri"/>
               </a:rPr>
-              <a:t>In merge sort, the idea of thealgorithm is to sort smaller arrays </a:t>
+              <a:t>In merge sort, the idea of the algorithm is to sort smaller arrays </a:t>
             </a:r>
           </a:p>
         </p:txBody>
@@ -4870,7 +5391,9 @@
             <a:off x="1158545" y="2185984"/>
             <a:ext cx="9924910" cy="465460"/>
           </a:xfrm>
-          <a:prstGeom prst="rect"/>
+          <a:prstGeom prst="rect">
+            <a:avLst/>
+          </a:prstGeom>
           <a:noFill/>
         </p:spPr>
         <p:style>
@@ -4897,9 +5420,8 @@
             <a:defPPr/>
           </a:lstStyle>
           <a:p>
-            <a:pPr/>
-            <a:r>
-              <a:rPr lang="en-US" sz="3002" dirty="1">
+            <a:r>
+              <a:rPr lang="en-US" sz="3002">
                 <a:solidFill>
                   <a:srgbClr val="000000"/>
                 </a:solidFill>
@@ -4921,7 +5443,9 @@
             <a:off x="1158545" y="2552385"/>
             <a:ext cx="951942" cy="465088"/>
           </a:xfrm>
-          <a:prstGeom prst="rect"/>
+          <a:prstGeom prst="rect">
+            <a:avLst/>
+          </a:prstGeom>
           <a:noFill/>
         </p:spPr>
         <p:style>
@@ -4948,9 +5472,8 @@
             <a:defPPr/>
           </a:lstStyle>
           <a:p>
-            <a:pPr/>
-            <a:r>
-              <a:rPr lang="en-US" sz="3000" dirty="1">
+            <a:r>
+              <a:rPr lang="en-US" sz="3000">
                 <a:solidFill>
                   <a:srgbClr val="000000"/>
                 </a:solidFill>
@@ -4972,7 +5495,9 @@
             <a:off x="929640" y="3072245"/>
             <a:ext cx="133201" cy="425648"/>
           </a:xfrm>
-          <a:prstGeom prst="rect"/>
+          <a:prstGeom prst="rect">
+            <a:avLst/>
+          </a:prstGeom>
           <a:noFill/>
         </p:spPr>
         <p:style>
@@ -4999,9 +5524,8 @@
             <a:defPPr/>
           </a:lstStyle>
           <a:p>
-            <a:pPr/>
-            <a:r>
-              <a:rPr lang="en-US" sz="3000" dirty="1">
+            <a:r>
+              <a:rPr lang="en-US" sz="3000">
                 <a:solidFill>
                   <a:srgbClr val="000000"/>
                 </a:solidFill>
@@ -5023,7 +5547,9 @@
             <a:off x="1158545" y="3044637"/>
             <a:ext cx="5988843" cy="465088"/>
           </a:xfrm>
-          <a:prstGeom prst="rect"/>
+          <a:prstGeom prst="rect">
+            <a:avLst/>
+          </a:prstGeom>
           <a:noFill/>
         </p:spPr>
         <p:style>
@@ -5050,9 +5576,8 @@
             <a:defPPr/>
           </a:lstStyle>
           <a:p>
-            <a:pPr/>
-            <a:r>
-              <a:rPr lang="en-US" sz="3000" dirty="1">
+            <a:r>
+              <a:rPr lang="en-US" sz="3000">
                 <a:solidFill>
                   <a:srgbClr val="000000"/>
                 </a:solidFill>
@@ -5074,7 +5599,9 @@
             <a:off x="7200265" y="3044637"/>
             <a:ext cx="1480654" cy="465088"/>
           </a:xfrm>
-          <a:prstGeom prst="rect"/>
+          <a:prstGeom prst="rect">
+            <a:avLst/>
+          </a:prstGeom>
           <a:noFill/>
         </p:spPr>
         <p:style>
@@ -5101,9 +5628,8 @@
             <a:defPPr/>
           </a:lstStyle>
           <a:p>
-            <a:pPr/>
-            <a:r>
-              <a:rPr lang="en-US" sz="3000" b="1" dirty="1">
+            <a:r>
+              <a:rPr lang="en-US" sz="3000" b="1">
                 <a:solidFill>
                   <a:srgbClr val="000000"/>
                 </a:solidFill>
@@ -5125,7 +5651,9 @@
             <a:off x="8672830" y="3044637"/>
             <a:ext cx="1920627" cy="465088"/>
           </a:xfrm>
-          <a:prstGeom prst="rect"/>
+          <a:prstGeom prst="rect">
+            <a:avLst/>
+          </a:prstGeom>
           <a:noFill/>
         </p:spPr>
         <p:style>
@@ -5152,9 +5680,8 @@
             <a:defPPr/>
           </a:lstStyle>
           <a:p>
-            <a:pPr/>
-            <a:r>
-              <a:rPr lang="en-US" sz="3000" dirty="1">
+            <a:r>
+              <a:rPr lang="en-US" sz="3000">
                 <a:solidFill>
                   <a:srgbClr val="000000"/>
                 </a:solidFill>
@@ -5176,7 +5703,9 @@
             <a:off x="1158545" y="3410137"/>
             <a:ext cx="6354645" cy="465460"/>
           </a:xfrm>
-          <a:prstGeom prst="rect"/>
+          <a:prstGeom prst="rect">
+            <a:avLst/>
+          </a:prstGeom>
           <a:noFill/>
         </p:spPr>
         <p:style>
@@ -5203,9 +5732,8 @@
             <a:defPPr/>
           </a:lstStyle>
           <a:p>
-            <a:pPr/>
-            <a:r>
-              <a:rPr lang="en-US" sz="3002" dirty="1">
+            <a:r>
+              <a:rPr lang="en-US" sz="3002">
                 <a:solidFill>
                   <a:srgbClr val="000000"/>
                 </a:solidFill>
@@ -5227,7 +5755,9 @@
             <a:off x="929640" y="4396680"/>
             <a:ext cx="2374367" cy="465088"/>
           </a:xfrm>
-          <a:prstGeom prst="rect"/>
+          <a:prstGeom prst="rect">
+            <a:avLst/>
+          </a:prstGeom>
           <a:noFill/>
         </p:spPr>
         <p:style>
@@ -5254,9 +5784,8 @@
             <a:defPPr/>
           </a:lstStyle>
           <a:p>
-            <a:pPr/>
-            <a:r>
-              <a:rPr lang="en-US" sz="3000" dirty="1">
+            <a:r>
+              <a:rPr lang="en-US" sz="3000">
                 <a:solidFill>
                   <a:srgbClr val="000000"/>
                 </a:solidFill>
@@ -5278,7 +5807,9 @@
             <a:off x="1387094" y="4856809"/>
             <a:ext cx="115619" cy="369463"/>
           </a:xfrm>
-          <a:prstGeom prst="rect"/>
+          <a:prstGeom prst="rect">
+            <a:avLst/>
+          </a:prstGeom>
           <a:noFill/>
         </p:spPr>
         <p:style>
@@ -5305,9 +5836,8 @@
             <a:defPPr/>
           </a:lstStyle>
           <a:p>
-            <a:pPr/>
-            <a:r>
-              <a:rPr lang="en-US" sz="2604" dirty="1">
+            <a:r>
+              <a:rPr lang="en-US" sz="2604">
                 <a:solidFill>
                   <a:srgbClr val="000000"/>
                 </a:solidFill>
@@ -5329,7 +5859,9 @@
             <a:off x="1615694" y="4832845"/>
             <a:ext cx="5339126" cy="403696"/>
           </a:xfrm>
-          <a:prstGeom prst="rect"/>
+          <a:prstGeom prst="rect">
+            <a:avLst/>
+          </a:prstGeom>
           <a:noFill/>
         </p:spPr>
         <p:style>
@@ -5356,9 +5888,8 @@
             <a:defPPr/>
           </a:lstStyle>
           <a:p>
-            <a:pPr/>
-            <a:r>
-              <a:rPr lang="en-US" sz="2604" dirty="1">
+            <a:r>
+              <a:rPr lang="en-US" sz="2604">
                 <a:solidFill>
                   <a:srgbClr val="000000"/>
                 </a:solidFill>
@@ -5380,7 +5911,9 @@
             <a:off x="6936613" y="4832845"/>
             <a:ext cx="169875" cy="403696"/>
           </a:xfrm>
-          <a:prstGeom prst="rect"/>
+          <a:prstGeom prst="rect">
+            <a:avLst/>
+          </a:prstGeom>
           <a:noFill/>
         </p:spPr>
         <p:style>
@@ -5407,9 +5940,8 @@
             <a:defPPr/>
           </a:lstStyle>
           <a:p>
-            <a:pPr/>
-            <a:r>
-              <a:rPr lang="en-US" sz="2604" i="1" dirty="1">
+            <a:r>
+              <a:rPr lang="en-US" sz="2604" i="1">
                 <a:solidFill>
                   <a:srgbClr val="000000"/>
                 </a:solidFill>
@@ -5431,7 +5963,9 @@
             <a:off x="7180453" y="4832845"/>
             <a:ext cx="506881" cy="403696"/>
           </a:xfrm>
-          <a:prstGeom prst="rect"/>
+          <a:prstGeom prst="rect">
+            <a:avLst/>
+          </a:prstGeom>
           <a:noFill/>
         </p:spPr>
         <p:style>
@@ -5458,9 +5992,8 @@
             <a:defPPr/>
           </a:lstStyle>
           <a:p>
-            <a:pPr/>
-            <a:r>
-              <a:rPr lang="en-US" sz="2604" dirty="1">
+            <a:r>
+              <a:rPr lang="en-US" sz="2604">
                 <a:solidFill>
                   <a:srgbClr val="000000"/>
                 </a:solidFill>
@@ -5482,7 +6015,9 @@
             <a:off x="1387094" y="5236046"/>
             <a:ext cx="115725" cy="369803"/>
           </a:xfrm>
-          <a:prstGeom prst="rect"/>
+          <a:prstGeom prst="rect">
+            <a:avLst/>
+          </a:prstGeom>
           <a:noFill/>
         </p:spPr>
         <p:style>
@@ -5509,9 +6044,8 @@
             <a:defPPr/>
           </a:lstStyle>
           <a:p>
-            <a:pPr/>
-            <a:r>
-              <a:rPr lang="en-US" sz="2606" dirty="1">
+            <a:r>
+              <a:rPr lang="en-US" sz="2606">
                 <a:solidFill>
                   <a:srgbClr val="000000"/>
                 </a:solidFill>
@@ -5533,7 +6067,9 @@
             <a:off x="1615694" y="5212061"/>
             <a:ext cx="5523453" cy="404068"/>
           </a:xfrm>
-          <a:prstGeom prst="rect"/>
+          <a:prstGeom prst="rect">
+            <a:avLst/>
+          </a:prstGeom>
           <a:noFill/>
         </p:spPr>
         <p:style>
@@ -5560,9 +6096,8 @@
             <a:defPPr/>
           </a:lstStyle>
           <a:p>
-            <a:pPr/>
-            <a:r>
-              <a:rPr lang="en-US" sz="2606" dirty="1">
+            <a:r>
+              <a:rPr lang="en-US" sz="2606">
                 <a:solidFill>
                   <a:srgbClr val="000000"/>
                 </a:solidFill>
@@ -5584,7 +6119,9 @@
             <a:off x="7116445" y="5212061"/>
             <a:ext cx="170032" cy="404068"/>
           </a:xfrm>
-          <a:prstGeom prst="rect"/>
+          <a:prstGeom prst="rect">
+            <a:avLst/>
+          </a:prstGeom>
           <a:noFill/>
         </p:spPr>
         <p:style>
@@ -5611,9 +6148,8 @@
             <a:defPPr/>
           </a:lstStyle>
           <a:p>
-            <a:pPr/>
-            <a:r>
-              <a:rPr lang="en-US" sz="2606" i="1" dirty="1">
+            <a:r>
+              <a:rPr lang="en-US" sz="2606" i="1">
                 <a:solidFill>
                   <a:srgbClr val="000000"/>
                 </a:solidFill>
@@ -5635,7 +6171,9 @@
             <a:off x="7361809" y="5212061"/>
             <a:ext cx="507348" cy="404068"/>
           </a:xfrm>
-          <a:prstGeom prst="rect"/>
+          <a:prstGeom prst="rect">
+            <a:avLst/>
+          </a:prstGeom>
           <a:noFill/>
         </p:spPr>
         <p:style>
@@ -5662,9 +6200,8 @@
             <a:defPPr/>
           </a:lstStyle>
           <a:p>
-            <a:pPr/>
-            <a:r>
-              <a:rPr lang="en-US" sz="2606" dirty="1">
+            <a:r>
+              <a:rPr lang="en-US" sz="2606">
                 <a:solidFill>
                   <a:srgbClr val="000000"/>
                 </a:solidFill>
@@ -5686,7 +6223,9 @@
             <a:off x="1387094" y="5617615"/>
             <a:ext cx="115619" cy="369463"/>
           </a:xfrm>
-          <a:prstGeom prst="rect"/>
+          <a:prstGeom prst="rect">
+            <a:avLst/>
+          </a:prstGeom>
           <a:noFill/>
         </p:spPr>
         <p:style>
@@ -5713,9 +6252,8 @@
             <a:defPPr/>
           </a:lstStyle>
           <a:p>
-            <a:pPr/>
-            <a:r>
-              <a:rPr lang="en-US" sz="2604" dirty="1">
+            <a:r>
+              <a:rPr lang="en-US" sz="2604">
                 <a:solidFill>
                   <a:srgbClr val="000000"/>
                 </a:solidFill>
@@ -5737,7 +6275,9 @@
             <a:off x="1615694" y="5593652"/>
             <a:ext cx="4171959" cy="403696"/>
           </a:xfrm>
-          <a:prstGeom prst="rect"/>
+          <a:prstGeom prst="rect">
+            <a:avLst/>
+          </a:prstGeom>
           <a:noFill/>
         </p:spPr>
         <p:style>
@@ -5764,9 +6304,8 @@
             <a:defPPr/>
           </a:lstStyle>
           <a:p>
-            <a:pPr/>
-            <a:r>
-              <a:rPr lang="en-US" sz="2604" dirty="1">
+            <a:r>
+              <a:rPr lang="en-US" sz="2604">
                 <a:solidFill>
                   <a:srgbClr val="000000"/>
                 </a:solidFill>
@@ -5779,12 +6318,15 @@
       </p:sp>
     </p:spTree>
   </p:cSld>
+  <p:clrMapOvr>
+    <a:masterClrMapping/>
+  </p:clrMapOvr>
 </p:sld>
 </file>
 
 <file path=ppt/slides/slide3.xml><?xml version="1.0" encoding="utf-8"?>
 <p:sld xmlns:a="http://schemas.openxmlformats.org/drawingml/2006/main" xmlns:r="http://schemas.openxmlformats.org/officeDocument/2006/relationships" xmlns:p="http://schemas.openxmlformats.org/presentationml/2006/main">
-  <p:cSld name="">
+  <p:cSld>
     <p:spTree>
       <p:nvGrpSpPr>
         <p:cNvPr id="1" name=""/>
@@ -5810,7 +6352,9 @@
             <a:off x="0" y="-1"/>
             <a:ext cx="12192000" cy="6857999"/>
           </a:xfrm>
-          <a:prstGeom prst="rect"/>
+          <a:prstGeom prst="rect">
+            <a:avLst/>
+          </a:prstGeom>
           <a:solidFill>
             <a:srgbClr val="FFFFFF"/>
           </a:solidFill>
@@ -5840,7 +6384,6 @@
             <a:defPPr/>
           </a:lstStyle>
           <a:p>
-            <a:pPr/>
             <a:endParaRPr lang="en-US"/>
           </a:p>
         </p:txBody>
@@ -5856,7 +6399,9 @@
             <a:off x="838200" y="1601216"/>
             <a:ext cx="1752600" cy="579120"/>
           </a:xfrm>
-          <a:prstGeom prst="rect"/>
+          <a:prstGeom prst="rect">
+            <a:avLst/>
+          </a:prstGeom>
           <a:solidFill>
             <a:srgbClr val="C00000"/>
           </a:solidFill>
@@ -5886,7 +6431,6 @@
             <a:defPPr/>
           </a:lstStyle>
           <a:p>
-            <a:pPr/>
             <a:endParaRPr lang="en-US"/>
           </a:p>
         </p:txBody>
@@ -5902,7 +6446,9 @@
             <a:off x="2590800" y="1601216"/>
             <a:ext cx="1752600" cy="579120"/>
           </a:xfrm>
-          <a:prstGeom prst="rect"/>
+          <a:prstGeom prst="rect">
+            <a:avLst/>
+          </a:prstGeom>
           <a:solidFill>
             <a:srgbClr val="C00000"/>
           </a:solidFill>
@@ -5932,7 +6478,6 @@
             <a:defPPr/>
           </a:lstStyle>
           <a:p>
-            <a:pPr/>
             <a:endParaRPr lang="en-US"/>
           </a:p>
         </p:txBody>
@@ -5948,7 +6493,9 @@
             <a:off x="4343400" y="1601216"/>
             <a:ext cx="1752600" cy="579120"/>
           </a:xfrm>
-          <a:prstGeom prst="rect"/>
+          <a:prstGeom prst="rect">
+            <a:avLst/>
+          </a:prstGeom>
           <a:solidFill>
             <a:srgbClr val="C00000"/>
           </a:solidFill>
@@ -5978,7 +6525,6 @@
             <a:defPPr/>
           </a:lstStyle>
           <a:p>
-            <a:pPr/>
             <a:endParaRPr lang="en-US"/>
           </a:p>
         </p:txBody>
@@ -5994,7 +6540,9 @@
             <a:off x="6096000" y="1601216"/>
             <a:ext cx="1752600" cy="579120"/>
           </a:xfrm>
-          <a:prstGeom prst="rect"/>
+          <a:prstGeom prst="rect">
+            <a:avLst/>
+          </a:prstGeom>
           <a:solidFill>
             <a:srgbClr val="C00000"/>
           </a:solidFill>
@@ -6024,7 +6572,6 @@
             <a:defPPr/>
           </a:lstStyle>
           <a:p>
-            <a:pPr/>
             <a:endParaRPr lang="en-US"/>
           </a:p>
         </p:txBody>
@@ -6040,7 +6587,9 @@
             <a:off x="7848600" y="1601216"/>
             <a:ext cx="1752600" cy="579120"/>
           </a:xfrm>
-          <a:prstGeom prst="rect"/>
+          <a:prstGeom prst="rect">
+            <a:avLst/>
+          </a:prstGeom>
           <a:solidFill>
             <a:srgbClr val="C00000"/>
           </a:solidFill>
@@ -6070,7 +6619,6 @@
             <a:defPPr/>
           </a:lstStyle>
           <a:p>
-            <a:pPr/>
             <a:endParaRPr lang="en-US"/>
           </a:p>
         </p:txBody>
@@ -6086,7 +6634,9 @@
             <a:off x="9601200" y="1601216"/>
             <a:ext cx="1752600" cy="579120"/>
           </a:xfrm>
-          <a:prstGeom prst="rect"/>
+          <a:prstGeom prst="rect">
+            <a:avLst/>
+          </a:prstGeom>
           <a:solidFill>
             <a:srgbClr val="C00000"/>
           </a:solidFill>
@@ -6116,7 +6666,6 @@
             <a:defPPr/>
           </a:lstStyle>
           <a:p>
-            <a:pPr/>
             <a:endParaRPr lang="en-US"/>
           </a:p>
         </p:txBody>
@@ -6132,7 +6681,9 @@
             <a:off x="2590800" y="1594866"/>
             <a:ext cx="0" cy="604520"/>
           </a:xfrm>
-          <a:prstGeom prst="line"/>
+          <a:prstGeom prst="line">
+            <a:avLst/>
+          </a:prstGeom>
           <a:ln w="12700">
             <a:solidFill>
               <a:srgbClr val="FFFFFF"/>
@@ -6159,7 +6710,6 @@
             <a:defPPr/>
           </a:lstStyle>
           <a:p>
-            <a:pPr/>
             <a:endParaRPr lang="en-US"/>
           </a:p>
         </p:txBody>
@@ -6175,7 +6725,9 @@
             <a:off x="4343400" y="1594866"/>
             <a:ext cx="0" cy="604520"/>
           </a:xfrm>
-          <a:prstGeom prst="line"/>
+          <a:prstGeom prst="line">
+            <a:avLst/>
+          </a:prstGeom>
           <a:ln w="12700">
             <a:solidFill>
               <a:srgbClr val="FFFFFF"/>
@@ -6202,7 +6754,6 @@
             <a:defPPr/>
           </a:lstStyle>
           <a:p>
-            <a:pPr/>
             <a:endParaRPr lang="en-US"/>
           </a:p>
         </p:txBody>
@@ -6218,7 +6769,9 @@
             <a:off x="6096000" y="1594866"/>
             <a:ext cx="0" cy="604520"/>
           </a:xfrm>
-          <a:prstGeom prst="line"/>
+          <a:prstGeom prst="line">
+            <a:avLst/>
+          </a:prstGeom>
           <a:ln w="12700">
             <a:solidFill>
               <a:srgbClr val="FFFFFF"/>
@@ -6245,7 +6798,6 @@
             <a:defPPr/>
           </a:lstStyle>
           <a:p>
-            <a:pPr/>
             <a:endParaRPr lang="en-US"/>
           </a:p>
         </p:txBody>
@@ -6261,7 +6813,9 @@
             <a:off x="7848600" y="1594866"/>
             <a:ext cx="0" cy="604520"/>
           </a:xfrm>
-          <a:prstGeom prst="line"/>
+          <a:prstGeom prst="line">
+            <a:avLst/>
+          </a:prstGeom>
           <a:ln w="12700">
             <a:solidFill>
               <a:srgbClr val="FFFFFF"/>
@@ -6288,7 +6842,6 @@
             <a:defPPr/>
           </a:lstStyle>
           <a:p>
-            <a:pPr/>
             <a:endParaRPr lang="en-US"/>
           </a:p>
         </p:txBody>
@@ -6304,7 +6857,9 @@
             <a:off x="9601200" y="1594866"/>
             <a:ext cx="0" cy="604520"/>
           </a:xfrm>
-          <a:prstGeom prst="line"/>
+          <a:prstGeom prst="line">
+            <a:avLst/>
+          </a:prstGeom>
           <a:ln w="12700">
             <a:solidFill>
               <a:srgbClr val="FFFFFF"/>
@@ -6331,7 +6886,6 @@
             <a:defPPr/>
           </a:lstStyle>
           <a:p>
-            <a:pPr/>
             <a:endParaRPr lang="en-US"/>
           </a:p>
         </p:txBody>
@@ -6347,7 +6901,9 @@
             <a:off x="838200" y="1594866"/>
             <a:ext cx="0" cy="604520"/>
           </a:xfrm>
-          <a:prstGeom prst="line"/>
+          <a:prstGeom prst="line">
+            <a:avLst/>
+          </a:prstGeom>
           <a:ln w="12700">
             <a:solidFill>
               <a:srgbClr val="FFFFFF"/>
@@ -6374,7 +6930,6 @@
             <a:defPPr/>
           </a:lstStyle>
           <a:p>
-            <a:pPr/>
             <a:endParaRPr lang="en-US"/>
           </a:p>
         </p:txBody>
@@ -6390,7 +6945,9 @@
             <a:off x="11353800" y="1594866"/>
             <a:ext cx="0" cy="604520"/>
           </a:xfrm>
-          <a:prstGeom prst="line"/>
+          <a:prstGeom prst="line">
+            <a:avLst/>
+          </a:prstGeom>
           <a:ln w="12700">
             <a:solidFill>
               <a:srgbClr val="FFFFFF"/>
@@ -6417,7 +6974,6 @@
             <a:defPPr/>
           </a:lstStyle>
           <a:p>
-            <a:pPr/>
             <a:endParaRPr lang="en-US"/>
           </a:p>
         </p:txBody>
@@ -6433,7 +6989,9 @@
             <a:off x="831850" y="1601216"/>
             <a:ext cx="10528300" cy="0"/>
           </a:xfrm>
-          <a:prstGeom prst="line"/>
+          <a:prstGeom prst="line">
+            <a:avLst/>
+          </a:prstGeom>
           <a:ln w="12700">
             <a:solidFill>
               <a:srgbClr val="FFFFFF"/>
@@ -6460,7 +7018,6 @@
             <a:defPPr/>
           </a:lstStyle>
           <a:p>
-            <a:pPr/>
             <a:endParaRPr lang="en-US"/>
           </a:p>
         </p:txBody>
@@ -6476,7 +7033,9 @@
             <a:off x="831850" y="2180336"/>
             <a:ext cx="10528300" cy="0"/>
           </a:xfrm>
-          <a:prstGeom prst="line"/>
+          <a:prstGeom prst="line">
+            <a:avLst/>
+          </a:prstGeom>
           <a:ln w="38100">
             <a:solidFill>
               <a:srgbClr val="FFFFFF"/>
@@ -6503,7 +7062,6 @@
             <a:defPPr/>
           </a:lstStyle>
           <a:p>
-            <a:pPr/>
             <a:endParaRPr lang="en-US"/>
           </a:p>
         </p:txBody>
@@ -6519,7 +7077,9 @@
             <a:off x="281940" y="5212715"/>
             <a:ext cx="2532888" cy="25908"/>
           </a:xfrm>
-          <a:prstGeom prst="rect"/>
+          <a:prstGeom prst="rect">
+            <a:avLst/>
+          </a:prstGeom>
           <a:solidFill>
             <a:srgbClr val="000000"/>
           </a:solidFill>
@@ -6549,7 +7109,6 @@
             <a:defPPr/>
           </a:lstStyle>
           <a:p>
-            <a:pPr/>
             <a:endParaRPr lang="en-US"/>
           </a:p>
         </p:txBody>
@@ -6565,7 +7124,9 @@
             <a:off x="929640" y="703804"/>
             <a:ext cx="2528368" cy="683121"/>
           </a:xfrm>
-          <a:prstGeom prst="rect"/>
+          <a:prstGeom prst="rect">
+            <a:avLst/>
+          </a:prstGeom>
           <a:noFill/>
         </p:spPr>
         <p:style>
@@ -6592,9 +7153,8 @@
             <a:defPPr/>
           </a:lstStyle>
           <a:p>
-            <a:pPr/>
-            <a:r>
-              <a:rPr lang="en-US" sz="4406" dirty="1">
+            <a:r>
+              <a:rPr lang="en-US" sz="4406">
                 <a:solidFill>
                   <a:srgbClr val="00AFEF"/>
                 </a:solidFill>
@@ -6616,7 +7176,9 @@
             <a:off x="1611757" y="1680744"/>
             <a:ext cx="206236" cy="496714"/>
           </a:xfrm>
-          <a:prstGeom prst="rect"/>
+          <a:prstGeom prst="rect">
+            <a:avLst/>
+          </a:prstGeom>
           <a:noFill/>
         </p:spPr>
         <p:style>
@@ -6643,9 +7205,8 @@
             <a:defPPr/>
           </a:lstStyle>
           <a:p>
-            <a:pPr/>
-            <a:r>
-              <a:rPr lang="en-US" sz="3204" b="1" dirty="1">
+            <a:r>
+              <a:rPr lang="en-US" sz="3204" b="1">
                 <a:solidFill>
                   <a:srgbClr val="FFFFFF"/>
                 </a:solidFill>
@@ -6667,7 +7228,9 @@
             <a:off x="3364738" y="1680744"/>
             <a:ext cx="206236" cy="496714"/>
           </a:xfrm>
-          <a:prstGeom prst="rect"/>
+          <a:prstGeom prst="rect">
+            <a:avLst/>
+          </a:prstGeom>
           <a:noFill/>
         </p:spPr>
         <p:style>
@@ -6694,9 +7257,8 @@
             <a:defPPr/>
           </a:lstStyle>
           <a:p>
-            <a:pPr/>
-            <a:r>
-              <a:rPr lang="en-US" sz="3204" b="1" dirty="1">
+            <a:r>
+              <a:rPr lang="en-US" sz="3204" b="1">
                 <a:solidFill>
                   <a:srgbClr val="FFFFFF"/>
                 </a:solidFill>
@@ -6718,7 +7280,9 @@
             <a:off x="5117338" y="1680744"/>
             <a:ext cx="206236" cy="496714"/>
           </a:xfrm>
-          <a:prstGeom prst="rect"/>
+          <a:prstGeom prst="rect">
+            <a:avLst/>
+          </a:prstGeom>
           <a:noFill/>
         </p:spPr>
         <p:style>
@@ -6745,9 +7309,8 @@
             <a:defPPr/>
           </a:lstStyle>
           <a:p>
-            <a:pPr/>
-            <a:r>
-              <a:rPr lang="en-US" sz="3204" b="1" dirty="1">
+            <a:r>
+              <a:rPr lang="en-US" sz="3204" b="1">
                 <a:solidFill>
                   <a:srgbClr val="FFFFFF"/>
                 </a:solidFill>
@@ -6769,7 +7332,9 @@
             <a:off x="6870192" y="1680744"/>
             <a:ext cx="206236" cy="496714"/>
           </a:xfrm>
-          <a:prstGeom prst="rect"/>
+          <a:prstGeom prst="rect">
+            <a:avLst/>
+          </a:prstGeom>
           <a:noFill/>
         </p:spPr>
         <p:style>
@@ -6796,9 +7361,8 @@
             <a:defPPr/>
           </a:lstStyle>
           <a:p>
-            <a:pPr/>
-            <a:r>
-              <a:rPr lang="en-US" sz="3204" b="1" dirty="1">
+            <a:r>
+              <a:rPr lang="en-US" sz="3204" b="1">
                 <a:solidFill>
                   <a:srgbClr val="FFFFFF"/>
                 </a:solidFill>
@@ -6820,7 +7384,9 @@
             <a:off x="8623046" y="1680744"/>
             <a:ext cx="206236" cy="496714"/>
           </a:xfrm>
-          <a:prstGeom prst="rect"/>
+          <a:prstGeom prst="rect">
+            <a:avLst/>
+          </a:prstGeom>
           <a:noFill/>
         </p:spPr>
         <p:style>
@@ -6847,9 +7413,8 @@
             <a:defPPr/>
           </a:lstStyle>
           <a:p>
-            <a:pPr/>
-            <a:r>
-              <a:rPr lang="en-US" sz="3204" b="1" dirty="1">
+            <a:r>
+              <a:rPr lang="en-US" sz="3204" b="1">
                 <a:solidFill>
                   <a:srgbClr val="FFFFFF"/>
                 </a:solidFill>
@@ -6871,7 +7436,9 @@
             <a:off x="10376027" y="1680744"/>
             <a:ext cx="206236" cy="496714"/>
           </a:xfrm>
-          <a:prstGeom prst="rect"/>
+          <a:prstGeom prst="rect">
+            <a:avLst/>
+          </a:prstGeom>
           <a:noFill/>
         </p:spPr>
         <p:style>
@@ -6898,9 +7465,8 @@
             <a:defPPr/>
           </a:lstStyle>
           <a:p>
-            <a:pPr/>
-            <a:r>
-              <a:rPr lang="en-US" sz="3204" b="1" dirty="1">
+            <a:r>
+              <a:rPr lang="en-US" sz="3204" b="1">
                 <a:solidFill>
                   <a:srgbClr val="FFFFFF"/>
                 </a:solidFill>
@@ -6922,7 +7488,9 @@
             <a:off x="281940" y="4820438"/>
             <a:ext cx="2535824" cy="496714"/>
           </a:xfrm>
-          <a:prstGeom prst="rect"/>
+          <a:prstGeom prst="rect">
+            <a:avLst/>
+          </a:prstGeom>
           <a:noFill/>
         </p:spPr>
         <p:style>
@@ -6949,9 +7517,8 @@
             <a:defPPr/>
           </a:lstStyle>
           <a:p>
-            <a:pPr/>
-            <a:r>
-              <a:rPr lang="en-US" sz="3204" dirty="1">
+            <a:r>
+              <a:rPr lang="en-US" sz="3204">
                 <a:solidFill>
                   <a:srgbClr val="000000"/>
                 </a:solidFill>
@@ -6973,7 +7540,9 @@
             <a:off x="739140" y="5303417"/>
             <a:ext cx="5737715" cy="433834"/>
           </a:xfrm>
-          <a:prstGeom prst="rect"/>
+          <a:prstGeom prst="rect">
+            <a:avLst/>
+          </a:prstGeom>
           <a:noFill/>
         </p:spPr>
         <p:style>
@@ -7000,9 +7569,8 @@
             <a:defPPr/>
           </a:lstStyle>
           <a:p>
-            <a:pPr/>
-            <a:r>
-              <a:rPr lang="en-US" sz="2798" dirty="1">
+            <a:r>
+              <a:rPr lang="en-US" sz="2798">
                 <a:solidFill>
                   <a:srgbClr val="000000"/>
                 </a:solidFill>
@@ -7024,7 +7592,9 @@
             <a:off x="6467221" y="5303417"/>
             <a:ext cx="182557" cy="433834"/>
           </a:xfrm>
-          <a:prstGeom prst="rect"/>
+          <a:prstGeom prst="rect">
+            <a:avLst/>
+          </a:prstGeom>
           <a:noFill/>
         </p:spPr>
         <p:style>
@@ -7051,9 +7621,8 @@
             <a:defPPr/>
           </a:lstStyle>
           <a:p>
-            <a:pPr/>
-            <a:r>
-              <a:rPr lang="en-US" sz="2798" i="1" dirty="1">
+            <a:r>
+              <a:rPr lang="en-US" sz="2798" i="1">
                 <a:solidFill>
                   <a:srgbClr val="000000"/>
                 </a:solidFill>
@@ -7075,7 +7644,9 @@
             <a:off x="6730873" y="5303417"/>
             <a:ext cx="544722" cy="433834"/>
           </a:xfrm>
-          <a:prstGeom prst="rect"/>
+          <a:prstGeom prst="rect">
+            <a:avLst/>
+          </a:prstGeom>
           <a:noFill/>
         </p:spPr>
         <p:style>
@@ -7102,9 +7673,8 @@
             <a:defPPr/>
           </a:lstStyle>
           <a:p>
-            <a:pPr/>
-            <a:r>
-              <a:rPr lang="en-US" sz="2798" dirty="1">
+            <a:r>
+              <a:rPr lang="en-US" sz="2798">
                 <a:solidFill>
                   <a:srgbClr val="000000"/>
                 </a:solidFill>
@@ -7126,7 +7696,9 @@
             <a:off x="739140" y="5730702"/>
             <a:ext cx="5925251" cy="433462"/>
           </a:xfrm>
-          <a:prstGeom prst="rect"/>
+          <a:prstGeom prst="rect">
+            <a:avLst/>
+          </a:prstGeom>
           <a:noFill/>
         </p:spPr>
         <p:style>
@@ -7153,9 +7725,8 @@
             <a:defPPr/>
           </a:lstStyle>
           <a:p>
-            <a:pPr/>
-            <a:r>
-              <a:rPr lang="en-US" sz="2796" dirty="1">
+            <a:r>
+              <a:rPr lang="en-US" sz="2796">
                 <a:solidFill>
                   <a:srgbClr val="000000"/>
                 </a:solidFill>
@@ -7177,7 +7748,9 @@
             <a:off x="6660769" y="5730702"/>
             <a:ext cx="182401" cy="433462"/>
           </a:xfrm>
-          <a:prstGeom prst="rect"/>
+          <a:prstGeom prst="rect">
+            <a:avLst/>
+          </a:prstGeom>
           <a:noFill/>
         </p:spPr>
         <p:style>
@@ -7204,9 +7777,8 @@
             <a:defPPr/>
           </a:lstStyle>
           <a:p>
-            <a:pPr/>
-            <a:r>
-              <a:rPr lang="en-US" sz="2796" i="1" dirty="1">
+            <a:r>
+              <a:rPr lang="en-US" sz="2796" i="1">
                 <a:solidFill>
                   <a:srgbClr val="000000"/>
                 </a:solidFill>
@@ -7228,7 +7800,9 @@
             <a:off x="6922897" y="5730702"/>
             <a:ext cx="544255" cy="433462"/>
           </a:xfrm>
-          <a:prstGeom prst="rect"/>
+          <a:prstGeom prst="rect">
+            <a:avLst/>
+          </a:prstGeom>
           <a:noFill/>
         </p:spPr>
         <p:style>
@@ -7255,9 +7829,8 @@
             <a:defPPr/>
           </a:lstStyle>
           <a:p>
-            <a:pPr/>
-            <a:r>
-              <a:rPr lang="en-US" sz="2796" dirty="1">
+            <a:r>
+              <a:rPr lang="en-US" sz="2796">
                 <a:solidFill>
                   <a:srgbClr val="000000"/>
                 </a:solidFill>
@@ -7279,7 +7852,9 @@
             <a:off x="739140" y="6157422"/>
             <a:ext cx="4479568" cy="433462"/>
           </a:xfrm>
-          <a:prstGeom prst="rect"/>
+          <a:prstGeom prst="rect">
+            <a:avLst/>
+          </a:prstGeom>
           <a:noFill/>
         </p:spPr>
         <p:style>
@@ -7306,9 +7881,8 @@
             <a:defPPr/>
           </a:lstStyle>
           <a:p>
-            <a:pPr/>
-            <a:r>
-              <a:rPr lang="en-US" sz="2796" dirty="1">
+            <a:r>
+              <a:rPr lang="en-US" sz="2796">
                 <a:solidFill>
                   <a:srgbClr val="000000"/>
                 </a:solidFill>
@@ -7321,12 +7895,15 @@
       </p:sp>
     </p:spTree>
   </p:cSld>
+  <p:clrMapOvr>
+    <a:masterClrMapping/>
+  </p:clrMapOvr>
 </p:sld>
 </file>
 
 <file path=ppt/slides/slide4.xml><?xml version="1.0" encoding="utf-8"?>
 <p:sld xmlns:a="http://schemas.openxmlformats.org/drawingml/2006/main" xmlns:r="http://schemas.openxmlformats.org/officeDocument/2006/relationships" xmlns:p="http://schemas.openxmlformats.org/presentationml/2006/main">
-  <p:cSld name="">
+  <p:cSld>
     <p:spTree>
       <p:nvGrpSpPr>
         <p:cNvPr id="1" name=""/>
@@ -7352,7 +7929,9 @@
             <a:off x="0" y="-1"/>
             <a:ext cx="12192000" cy="6857999"/>
           </a:xfrm>
-          <a:prstGeom prst="rect"/>
+          <a:prstGeom prst="rect">
+            <a:avLst/>
+          </a:prstGeom>
           <a:solidFill>
             <a:srgbClr val="FFFFFF"/>
           </a:solidFill>
@@ -7382,7 +7961,6 @@
             <a:defPPr/>
           </a:lstStyle>
           <a:p>
-            <a:pPr/>
             <a:endParaRPr lang="en-US"/>
           </a:p>
         </p:txBody>
@@ -7398,7 +7976,9 @@
             <a:off x="838200" y="1601216"/>
             <a:ext cx="1752600" cy="579120"/>
           </a:xfrm>
-          <a:prstGeom prst="rect"/>
+          <a:prstGeom prst="rect">
+            <a:avLst/>
+          </a:prstGeom>
           <a:solidFill>
             <a:srgbClr val="C00000"/>
           </a:solidFill>
@@ -7428,7 +8008,6 @@
             <a:defPPr/>
           </a:lstStyle>
           <a:p>
-            <a:pPr/>
             <a:endParaRPr lang="en-US"/>
           </a:p>
         </p:txBody>
@@ -7444,7 +8023,9 @@
             <a:off x="2590800" y="1601216"/>
             <a:ext cx="1752600" cy="579120"/>
           </a:xfrm>
-          <a:prstGeom prst="rect"/>
+          <a:prstGeom prst="rect">
+            <a:avLst/>
+          </a:prstGeom>
           <a:solidFill>
             <a:srgbClr val="C00000"/>
           </a:solidFill>
@@ -7474,7 +8055,6 @@
             <a:defPPr/>
           </a:lstStyle>
           <a:p>
-            <a:pPr/>
             <a:endParaRPr lang="en-US"/>
           </a:p>
         </p:txBody>
@@ -7490,7 +8070,9 @@
             <a:off x="4343400" y="1601216"/>
             <a:ext cx="1752600" cy="579120"/>
           </a:xfrm>
-          <a:prstGeom prst="rect"/>
+          <a:prstGeom prst="rect">
+            <a:avLst/>
+          </a:prstGeom>
           <a:solidFill>
             <a:srgbClr val="C00000"/>
           </a:solidFill>
@@ -7520,7 +8102,6 @@
             <a:defPPr/>
           </a:lstStyle>
           <a:p>
-            <a:pPr/>
             <a:endParaRPr lang="en-US"/>
           </a:p>
         </p:txBody>
@@ -7536,7 +8117,9 @@
             <a:off x="6096000" y="1601216"/>
             <a:ext cx="1752600" cy="579120"/>
           </a:xfrm>
-          <a:prstGeom prst="rect"/>
+          <a:prstGeom prst="rect">
+            <a:avLst/>
+          </a:prstGeom>
           <a:solidFill>
             <a:srgbClr val="FF0000">
               <a:alpha val="24706"/>
@@ -7568,7 +8151,6 @@
             <a:defPPr/>
           </a:lstStyle>
           <a:p>
-            <a:pPr/>
             <a:endParaRPr lang="en-US"/>
           </a:p>
         </p:txBody>
@@ -7584,7 +8166,9 @@
             <a:off x="7848600" y="1601216"/>
             <a:ext cx="1752600" cy="579120"/>
           </a:xfrm>
-          <a:prstGeom prst="rect"/>
+          <a:prstGeom prst="rect">
+            <a:avLst/>
+          </a:prstGeom>
           <a:solidFill>
             <a:srgbClr val="FF0000">
               <a:alpha val="24706"/>
@@ -7616,7 +8200,6 @@
             <a:defPPr/>
           </a:lstStyle>
           <a:p>
-            <a:pPr/>
             <a:endParaRPr lang="en-US"/>
           </a:p>
         </p:txBody>
@@ -7632,7 +8215,9 @@
             <a:off x="9601200" y="1601216"/>
             <a:ext cx="1752600" cy="579120"/>
           </a:xfrm>
-          <a:prstGeom prst="rect"/>
+          <a:prstGeom prst="rect">
+            <a:avLst/>
+          </a:prstGeom>
           <a:solidFill>
             <a:srgbClr val="FF0000">
               <a:alpha val="24706"/>
@@ -7664,7 +8249,6 @@
             <a:defPPr/>
           </a:lstStyle>
           <a:p>
-            <a:pPr/>
             <a:endParaRPr lang="en-US"/>
           </a:p>
         </p:txBody>
@@ -7680,7 +8264,9 @@
             <a:off x="2590800" y="1594866"/>
             <a:ext cx="0" cy="604520"/>
           </a:xfrm>
-          <a:prstGeom prst="line"/>
+          <a:prstGeom prst="line">
+            <a:avLst/>
+          </a:prstGeom>
           <a:ln w="12700">
             <a:solidFill>
               <a:srgbClr val="FFFFFF"/>
@@ -7707,7 +8293,6 @@
             <a:defPPr/>
           </a:lstStyle>
           <a:p>
-            <a:pPr/>
             <a:endParaRPr lang="en-US"/>
           </a:p>
         </p:txBody>
@@ -7723,7 +8308,9 @@
             <a:off x="4343400" y="1594866"/>
             <a:ext cx="0" cy="604520"/>
           </a:xfrm>
-          <a:prstGeom prst="line"/>
+          <a:prstGeom prst="line">
+            <a:avLst/>
+          </a:prstGeom>
           <a:ln w="12700">
             <a:solidFill>
               <a:srgbClr val="FFFFFF"/>
@@ -7750,7 +8337,6 @@
             <a:defPPr/>
           </a:lstStyle>
           <a:p>
-            <a:pPr/>
             <a:endParaRPr lang="en-US"/>
           </a:p>
         </p:txBody>
@@ -7766,7 +8352,9 @@
             <a:off x="6096000" y="1594866"/>
             <a:ext cx="0" cy="604520"/>
           </a:xfrm>
-          <a:prstGeom prst="line"/>
+          <a:prstGeom prst="line">
+            <a:avLst/>
+          </a:prstGeom>
           <a:ln w="12700">
             <a:solidFill>
               <a:srgbClr val="FFFFFF"/>
@@ -7793,7 +8381,6 @@
             <a:defPPr/>
           </a:lstStyle>
           <a:p>
-            <a:pPr/>
             <a:endParaRPr lang="en-US"/>
           </a:p>
         </p:txBody>
@@ -7809,7 +8396,9 @@
             <a:off x="7848600" y="1594866"/>
             <a:ext cx="0" cy="604520"/>
           </a:xfrm>
-          <a:prstGeom prst="line"/>
+          <a:prstGeom prst="line">
+            <a:avLst/>
+          </a:prstGeom>
           <a:ln w="12700">
             <a:solidFill>
               <a:srgbClr val="FFFFFF"/>
@@ -7836,7 +8425,6 @@
             <a:defPPr/>
           </a:lstStyle>
           <a:p>
-            <a:pPr/>
             <a:endParaRPr lang="en-US"/>
           </a:p>
         </p:txBody>
@@ -7852,7 +8440,9 @@
             <a:off x="9601200" y="1594866"/>
             <a:ext cx="0" cy="604520"/>
           </a:xfrm>
-          <a:prstGeom prst="line"/>
+          <a:prstGeom prst="line">
+            <a:avLst/>
+          </a:prstGeom>
           <a:ln w="12700">
             <a:solidFill>
               <a:srgbClr val="FFFFFF"/>
@@ -7879,7 +8469,6 @@
             <a:defPPr/>
           </a:lstStyle>
           <a:p>
-            <a:pPr/>
             <a:endParaRPr lang="en-US"/>
           </a:p>
         </p:txBody>
@@ -7895,7 +8484,9 @@
             <a:off x="838200" y="1594866"/>
             <a:ext cx="0" cy="604520"/>
           </a:xfrm>
-          <a:prstGeom prst="line"/>
+          <a:prstGeom prst="line">
+            <a:avLst/>
+          </a:prstGeom>
           <a:ln w="12700">
             <a:solidFill>
               <a:srgbClr val="FFFFFF"/>
@@ -7922,7 +8513,6 @@
             <a:defPPr/>
           </a:lstStyle>
           <a:p>
-            <a:pPr/>
             <a:endParaRPr lang="en-US"/>
           </a:p>
         </p:txBody>
@@ -7938,7 +8528,9 @@
             <a:off x="11353800" y="1594866"/>
             <a:ext cx="0" cy="604520"/>
           </a:xfrm>
-          <a:prstGeom prst="line"/>
+          <a:prstGeom prst="line">
+            <a:avLst/>
+          </a:prstGeom>
           <a:ln w="12700">
             <a:solidFill>
               <a:srgbClr val="FFFFFF"/>
@@ -7965,7 +8557,6 @@
             <a:defPPr/>
           </a:lstStyle>
           <a:p>
-            <a:pPr/>
             <a:endParaRPr lang="en-US"/>
           </a:p>
         </p:txBody>
@@ -7981,7 +8572,9 @@
             <a:off x="831850" y="1601216"/>
             <a:ext cx="10528300" cy="0"/>
           </a:xfrm>
-          <a:prstGeom prst="line"/>
+          <a:prstGeom prst="line">
+            <a:avLst/>
+          </a:prstGeom>
           <a:ln w="12700">
             <a:solidFill>
               <a:srgbClr val="FFFFFF"/>
@@ -8008,7 +8601,6 @@
             <a:defPPr/>
           </a:lstStyle>
           <a:p>
-            <a:pPr/>
             <a:endParaRPr lang="en-US"/>
           </a:p>
         </p:txBody>
@@ -8024,7 +8616,9 @@
             <a:off x="831850" y="2180336"/>
             <a:ext cx="10528300" cy="0"/>
           </a:xfrm>
-          <a:prstGeom prst="line"/>
+          <a:prstGeom prst="line">
+            <a:avLst/>
+          </a:prstGeom>
           <a:ln w="38100">
             <a:solidFill>
               <a:srgbClr val="FFFFFF"/>
@@ -8051,7 +8645,6 @@
             <a:defPPr/>
           </a:lstStyle>
           <a:p>
-            <a:pPr/>
             <a:endParaRPr lang="en-US"/>
           </a:p>
         </p:txBody>
@@ -8067,7 +8660,9 @@
             <a:off x="281940" y="5212715"/>
             <a:ext cx="2532888" cy="25908"/>
           </a:xfrm>
-          <a:prstGeom prst="rect"/>
+          <a:prstGeom prst="rect">
+            <a:avLst/>
+          </a:prstGeom>
           <a:solidFill>
             <a:srgbClr val="000000"/>
           </a:solidFill>
@@ -8097,7 +8692,6 @@
             <a:defPPr/>
           </a:lstStyle>
           <a:p>
-            <a:pPr/>
             <a:endParaRPr lang="en-US"/>
           </a:p>
         </p:txBody>
@@ -8113,7 +8707,9 @@
             <a:off x="929640" y="703804"/>
             <a:ext cx="2528368" cy="683121"/>
           </a:xfrm>
-          <a:prstGeom prst="rect"/>
+          <a:prstGeom prst="rect">
+            <a:avLst/>
+          </a:prstGeom>
           <a:noFill/>
         </p:spPr>
         <p:style>
@@ -8140,9 +8736,8 @@
             <a:defPPr/>
           </a:lstStyle>
           <a:p>
-            <a:pPr/>
-            <a:r>
-              <a:rPr lang="en-US" sz="4406" dirty="1">
+            <a:r>
+              <a:rPr lang="en-US" sz="4406">
                 <a:solidFill>
                   <a:srgbClr val="00AFEF"/>
                 </a:solidFill>
@@ -8164,7 +8759,9 @@
             <a:off x="1611757" y="1680744"/>
             <a:ext cx="206236" cy="496714"/>
           </a:xfrm>
-          <a:prstGeom prst="rect"/>
+          <a:prstGeom prst="rect">
+            <a:avLst/>
+          </a:prstGeom>
           <a:noFill/>
         </p:spPr>
         <p:style>
@@ -8191,9 +8788,8 @@
             <a:defPPr/>
           </a:lstStyle>
           <a:p>
-            <a:pPr/>
-            <a:r>
-              <a:rPr lang="en-US" sz="3204" b="1" dirty="1">
+            <a:r>
+              <a:rPr lang="en-US" sz="3204" b="1">
                 <a:solidFill>
                   <a:srgbClr val="FFFFFF"/>
                 </a:solidFill>
@@ -8215,7 +8811,9 @@
             <a:off x="3364738" y="1680744"/>
             <a:ext cx="206236" cy="496714"/>
           </a:xfrm>
-          <a:prstGeom prst="rect"/>
+          <a:prstGeom prst="rect">
+            <a:avLst/>
+          </a:prstGeom>
           <a:noFill/>
         </p:spPr>
         <p:style>
@@ -8242,9 +8840,8 @@
             <a:defPPr/>
           </a:lstStyle>
           <a:p>
-            <a:pPr/>
-            <a:r>
-              <a:rPr lang="en-US" sz="3204" b="1" dirty="1">
+            <a:r>
+              <a:rPr lang="en-US" sz="3204" b="1">
                 <a:solidFill>
                   <a:srgbClr val="FFFFFF"/>
                 </a:solidFill>
@@ -8266,7 +8863,9 @@
             <a:off x="5117338" y="1680744"/>
             <a:ext cx="206236" cy="496714"/>
           </a:xfrm>
-          <a:prstGeom prst="rect"/>
+          <a:prstGeom prst="rect">
+            <a:avLst/>
+          </a:prstGeom>
           <a:noFill/>
         </p:spPr>
         <p:style>
@@ -8293,9 +8892,8 @@
             <a:defPPr/>
           </a:lstStyle>
           <a:p>
-            <a:pPr/>
-            <a:r>
-              <a:rPr lang="en-US" sz="3204" b="1" dirty="1">
+            <a:r>
+              <a:rPr lang="en-US" sz="3204" b="1">
                 <a:solidFill>
                   <a:srgbClr val="FFFFFF"/>
                 </a:solidFill>
@@ -8317,7 +8915,9 @@
             <a:off x="6870192" y="1680744"/>
             <a:ext cx="206236" cy="496714"/>
           </a:xfrm>
-          <a:prstGeom prst="rect"/>
+          <a:prstGeom prst="rect">
+            <a:avLst/>
+          </a:prstGeom>
           <a:noFill/>
         </p:spPr>
         <p:style>
@@ -8344,9 +8944,8 @@
             <a:defPPr/>
           </a:lstStyle>
           <a:p>
-            <a:pPr/>
-            <a:r>
-              <a:rPr lang="en-US" sz="3204" b="1" dirty="1">
+            <a:r>
+              <a:rPr lang="en-US" sz="3204" b="1">
                 <a:solidFill>
                   <a:srgbClr val="FFFFFF"/>
                 </a:solidFill>
@@ -8368,7 +8967,9 @@
             <a:off x="8623046" y="1680744"/>
             <a:ext cx="206236" cy="496714"/>
           </a:xfrm>
-          <a:prstGeom prst="rect"/>
+          <a:prstGeom prst="rect">
+            <a:avLst/>
+          </a:prstGeom>
           <a:noFill/>
         </p:spPr>
         <p:style>
@@ -8395,9 +8996,8 @@
             <a:defPPr/>
           </a:lstStyle>
           <a:p>
-            <a:pPr/>
-            <a:r>
-              <a:rPr lang="en-US" sz="3204" b="1" dirty="1">
+            <a:r>
+              <a:rPr lang="en-US" sz="3204" b="1">
                 <a:solidFill>
                   <a:srgbClr val="FFFFFF"/>
                 </a:solidFill>
@@ -8419,7 +9019,9 @@
             <a:off x="10376027" y="1680744"/>
             <a:ext cx="206236" cy="496714"/>
           </a:xfrm>
-          <a:prstGeom prst="rect"/>
+          <a:prstGeom prst="rect">
+            <a:avLst/>
+          </a:prstGeom>
           <a:noFill/>
         </p:spPr>
         <p:style>
@@ -8446,9 +9048,8 @@
             <a:defPPr/>
           </a:lstStyle>
           <a:p>
-            <a:pPr/>
-            <a:r>
-              <a:rPr lang="en-US" sz="3204" b="1" dirty="1">
+            <a:r>
+              <a:rPr lang="en-US" sz="3204" b="1">
                 <a:solidFill>
                   <a:srgbClr val="FFFFFF"/>
                 </a:solidFill>
@@ -8470,7 +9071,9 @@
             <a:off x="281940" y="4820438"/>
             <a:ext cx="2535824" cy="496714"/>
           </a:xfrm>
-          <a:prstGeom prst="rect"/>
+          <a:prstGeom prst="rect">
+            <a:avLst/>
+          </a:prstGeom>
           <a:noFill/>
         </p:spPr>
         <p:style>
@@ -8497,9 +9100,8 @@
             <a:defPPr/>
           </a:lstStyle>
           <a:p>
-            <a:pPr/>
-            <a:r>
-              <a:rPr lang="en-US" sz="3204" dirty="1">
+            <a:r>
+              <a:rPr lang="en-US" sz="3204">
                 <a:solidFill>
                   <a:srgbClr val="000000"/>
                 </a:solidFill>
@@ -8521,7 +9123,9 @@
             <a:off x="739140" y="5303417"/>
             <a:ext cx="5737715" cy="433834"/>
           </a:xfrm>
-          <a:prstGeom prst="rect"/>
+          <a:prstGeom prst="rect">
+            <a:avLst/>
+          </a:prstGeom>
           <a:noFill/>
         </p:spPr>
         <p:style>
@@ -8548,9 +9152,8 @@
             <a:defPPr/>
           </a:lstStyle>
           <a:p>
-            <a:pPr/>
-            <a:r>
-              <a:rPr lang="en-US" sz="2798" dirty="1">
+            <a:r>
+              <a:rPr lang="en-US" sz="2798">
                 <a:solidFill>
                   <a:srgbClr val="000000"/>
                 </a:solidFill>
@@ -8572,7 +9175,9 @@
             <a:off x="6467221" y="5303417"/>
             <a:ext cx="182557" cy="433834"/>
           </a:xfrm>
-          <a:prstGeom prst="rect"/>
+          <a:prstGeom prst="rect">
+            <a:avLst/>
+          </a:prstGeom>
           <a:noFill/>
         </p:spPr>
         <p:style>
@@ -8599,9 +9204,8 @@
             <a:defPPr/>
           </a:lstStyle>
           <a:p>
-            <a:pPr/>
-            <a:r>
-              <a:rPr lang="en-US" sz="2798" i="1" dirty="1">
+            <a:r>
+              <a:rPr lang="en-US" sz="2798" i="1">
                 <a:solidFill>
                   <a:srgbClr val="000000"/>
                 </a:solidFill>
@@ -8623,7 +9227,9 @@
             <a:off x="6730873" y="5303417"/>
             <a:ext cx="544722" cy="433834"/>
           </a:xfrm>
-          <a:prstGeom prst="rect"/>
+          <a:prstGeom prst="rect">
+            <a:avLst/>
+          </a:prstGeom>
           <a:noFill/>
         </p:spPr>
         <p:style>
@@ -8650,9 +9256,8 @@
             <a:defPPr/>
           </a:lstStyle>
           <a:p>
-            <a:pPr/>
-            <a:r>
-              <a:rPr lang="en-US" sz="2798" dirty="1">
+            <a:r>
+              <a:rPr lang="en-US" sz="2798">
                 <a:solidFill>
                   <a:srgbClr val="000000"/>
                 </a:solidFill>
@@ -8674,7 +9279,9 @@
             <a:off x="739140" y="5730702"/>
             <a:ext cx="5925251" cy="433462"/>
           </a:xfrm>
-          <a:prstGeom prst="rect"/>
+          <a:prstGeom prst="rect">
+            <a:avLst/>
+          </a:prstGeom>
           <a:noFill/>
         </p:spPr>
         <p:style>
@@ -8701,9 +9308,8 @@
             <a:defPPr/>
           </a:lstStyle>
           <a:p>
-            <a:pPr/>
-            <a:r>
-              <a:rPr lang="en-US" sz="2796" dirty="1">
+            <a:r>
+              <a:rPr lang="en-US" sz="2796">
                 <a:solidFill>
                   <a:srgbClr val="000000"/>
                 </a:solidFill>
@@ -8725,7 +9331,9 @@
             <a:off x="6660769" y="5730702"/>
             <a:ext cx="182401" cy="433462"/>
           </a:xfrm>
-          <a:prstGeom prst="rect"/>
+          <a:prstGeom prst="rect">
+            <a:avLst/>
+          </a:prstGeom>
           <a:noFill/>
         </p:spPr>
         <p:style>
@@ -8752,9 +9360,8 @@
             <a:defPPr/>
           </a:lstStyle>
           <a:p>
-            <a:pPr/>
-            <a:r>
-              <a:rPr lang="en-US" sz="2796" i="1" dirty="1">
+            <a:r>
+              <a:rPr lang="en-US" sz="2796" i="1">
                 <a:solidFill>
                   <a:srgbClr val="000000"/>
                 </a:solidFill>
@@ -8776,7 +9383,9 @@
             <a:off x="6922897" y="5730702"/>
             <a:ext cx="544255" cy="433462"/>
           </a:xfrm>
-          <a:prstGeom prst="rect"/>
+          <a:prstGeom prst="rect">
+            <a:avLst/>
+          </a:prstGeom>
           <a:noFill/>
         </p:spPr>
         <p:style>
@@ -8803,9 +9412,8 @@
             <a:defPPr/>
           </a:lstStyle>
           <a:p>
-            <a:pPr/>
-            <a:r>
-              <a:rPr lang="en-US" sz="2796" dirty="1">
+            <a:r>
+              <a:rPr lang="en-US" sz="2796">
                 <a:solidFill>
                   <a:srgbClr val="000000"/>
                 </a:solidFill>
@@ -8827,7 +9435,9 @@
             <a:off x="739140" y="6157422"/>
             <a:ext cx="4479568" cy="433462"/>
           </a:xfrm>
-          <a:prstGeom prst="rect"/>
+          <a:prstGeom prst="rect">
+            <a:avLst/>
+          </a:prstGeom>
           <a:noFill/>
         </p:spPr>
         <p:style>
@@ -8854,9 +9464,8 @@
             <a:defPPr/>
           </a:lstStyle>
           <a:p>
-            <a:pPr/>
-            <a:r>
-              <a:rPr lang="en-US" sz="2796" dirty="1">
+            <a:r>
+              <a:rPr lang="en-US" sz="2796">
                 <a:solidFill>
                   <a:srgbClr val="000000"/>
                 </a:solidFill>
@@ -8869,12 +9478,15 @@
       </p:sp>
     </p:spTree>
   </p:cSld>
+  <p:clrMapOvr>
+    <a:masterClrMapping/>
+  </p:clrMapOvr>
 </p:sld>
 </file>
 
 <file path=ppt/slides/slide5.xml><?xml version="1.0" encoding="utf-8"?>
 <p:sld xmlns:a="http://schemas.openxmlformats.org/drawingml/2006/main" xmlns:r="http://schemas.openxmlformats.org/officeDocument/2006/relationships" xmlns:p="http://schemas.openxmlformats.org/presentationml/2006/main">
-  <p:cSld name="">
+  <p:cSld>
     <p:spTree>
       <p:nvGrpSpPr>
         <p:cNvPr id="1" name=""/>
@@ -8900,7 +9512,9 @@
             <a:off x="0" y="-1"/>
             <a:ext cx="12192000" cy="6857999"/>
           </a:xfrm>
-          <a:prstGeom prst="rect"/>
+          <a:prstGeom prst="rect">
+            <a:avLst/>
+          </a:prstGeom>
           <a:solidFill>
             <a:srgbClr val="FFFFFF"/>
           </a:solidFill>
@@ -8930,7 +9544,6 @@
             <a:defPPr/>
           </a:lstStyle>
           <a:p>
-            <a:pPr/>
             <a:endParaRPr lang="en-US"/>
           </a:p>
         </p:txBody>
@@ -8946,7 +9559,9 @@
             <a:off x="838200" y="1601216"/>
             <a:ext cx="1752600" cy="579120"/>
           </a:xfrm>
-          <a:prstGeom prst="rect"/>
+          <a:prstGeom prst="rect">
+            <a:avLst/>
+          </a:prstGeom>
           <a:solidFill>
             <a:srgbClr val="FFC000"/>
           </a:solidFill>
@@ -8976,7 +9591,6 @@
             <a:defPPr/>
           </a:lstStyle>
           <a:p>
-            <a:pPr/>
             <a:endParaRPr lang="en-US"/>
           </a:p>
         </p:txBody>
@@ -8992,7 +9606,9 @@
             <a:off x="2590800" y="1601216"/>
             <a:ext cx="1752600" cy="579120"/>
           </a:xfrm>
-          <a:prstGeom prst="rect"/>
+          <a:prstGeom prst="rect">
+            <a:avLst/>
+          </a:prstGeom>
           <a:solidFill>
             <a:srgbClr val="FFC000"/>
           </a:solidFill>
@@ -9022,7 +9638,6 @@
             <a:defPPr/>
           </a:lstStyle>
           <a:p>
-            <a:pPr/>
             <a:endParaRPr lang="en-US"/>
           </a:p>
         </p:txBody>
@@ -9038,7 +9653,9 @@
             <a:off x="4343400" y="1601216"/>
             <a:ext cx="1752600" cy="579120"/>
           </a:xfrm>
-          <a:prstGeom prst="rect"/>
+          <a:prstGeom prst="rect">
+            <a:avLst/>
+          </a:prstGeom>
           <a:solidFill>
             <a:srgbClr val="FFC000"/>
           </a:solidFill>
@@ -9068,7 +9685,6 @@
             <a:defPPr/>
           </a:lstStyle>
           <a:p>
-            <a:pPr/>
             <a:endParaRPr lang="en-US"/>
           </a:p>
         </p:txBody>
@@ -9084,7 +9700,9 @@
             <a:off x="6096000" y="1601216"/>
             <a:ext cx="1752600" cy="579120"/>
           </a:xfrm>
-          <a:prstGeom prst="rect"/>
+          <a:prstGeom prst="rect">
+            <a:avLst/>
+          </a:prstGeom>
           <a:solidFill>
             <a:srgbClr val="FF0000">
               <a:alpha val="24706"/>
@@ -9116,7 +9734,6 @@
             <a:defPPr/>
           </a:lstStyle>
           <a:p>
-            <a:pPr/>
             <a:endParaRPr lang="en-US"/>
           </a:p>
         </p:txBody>
@@ -9132,7 +9749,9 @@
             <a:off x="7848600" y="1601216"/>
             <a:ext cx="1752600" cy="579120"/>
           </a:xfrm>
-          <a:prstGeom prst="rect"/>
+          <a:prstGeom prst="rect">
+            <a:avLst/>
+          </a:prstGeom>
           <a:solidFill>
             <a:srgbClr val="FF0000">
               <a:alpha val="24706"/>
@@ -9164,7 +9783,6 @@
             <a:defPPr/>
           </a:lstStyle>
           <a:p>
-            <a:pPr/>
             <a:endParaRPr lang="en-US"/>
           </a:p>
         </p:txBody>
@@ -9180,7 +9798,9 @@
             <a:off x="9601200" y="1601216"/>
             <a:ext cx="1752600" cy="579120"/>
           </a:xfrm>
-          <a:prstGeom prst="rect"/>
+          <a:prstGeom prst="rect">
+            <a:avLst/>
+          </a:prstGeom>
           <a:solidFill>
             <a:srgbClr val="FF0000">
               <a:alpha val="24706"/>
@@ -9212,7 +9832,6 @@
             <a:defPPr/>
           </a:lstStyle>
           <a:p>
-            <a:pPr/>
             <a:endParaRPr lang="en-US"/>
           </a:p>
         </p:txBody>
@@ -9228,7 +9847,9 @@
             <a:off x="2590800" y="1594866"/>
             <a:ext cx="0" cy="604520"/>
           </a:xfrm>
-          <a:prstGeom prst="line"/>
+          <a:prstGeom prst="line">
+            <a:avLst/>
+          </a:prstGeom>
           <a:ln w="12700">
             <a:solidFill>
               <a:srgbClr val="FFFFFF"/>
@@ -9255,7 +9876,6 @@
             <a:defPPr/>
           </a:lstStyle>
           <a:p>
-            <a:pPr/>
             <a:endParaRPr lang="en-US"/>
           </a:p>
         </p:txBody>
@@ -9271,7 +9891,9 @@
             <a:off x="4343400" y="1594866"/>
             <a:ext cx="0" cy="604520"/>
           </a:xfrm>
-          <a:prstGeom prst="line"/>
+          <a:prstGeom prst="line">
+            <a:avLst/>
+          </a:prstGeom>
           <a:ln w="12700">
             <a:solidFill>
               <a:srgbClr val="FFFFFF"/>
@@ -9298,7 +9920,6 @@
             <a:defPPr/>
           </a:lstStyle>
           <a:p>
-            <a:pPr/>
             <a:endParaRPr lang="en-US"/>
           </a:p>
         </p:txBody>
@@ -9314,7 +9935,9 @@
             <a:off x="6096000" y="1594866"/>
             <a:ext cx="0" cy="604520"/>
           </a:xfrm>
-          <a:prstGeom prst="line"/>
+          <a:prstGeom prst="line">
+            <a:avLst/>
+          </a:prstGeom>
           <a:ln w="12700">
             <a:solidFill>
               <a:srgbClr val="FFFFFF"/>
@@ -9341,7 +9964,6 @@
             <a:defPPr/>
           </a:lstStyle>
           <a:p>
-            <a:pPr/>
             <a:endParaRPr lang="en-US"/>
           </a:p>
         </p:txBody>
@@ -9357,7 +9979,9 @@
             <a:off x="7848600" y="1594866"/>
             <a:ext cx="0" cy="604520"/>
           </a:xfrm>
-          <a:prstGeom prst="line"/>
+          <a:prstGeom prst="line">
+            <a:avLst/>
+          </a:prstGeom>
           <a:ln w="12700">
             <a:solidFill>
               <a:srgbClr val="FFFFFF"/>
@@ -9384,7 +10008,6 @@
             <a:defPPr/>
           </a:lstStyle>
           <a:p>
-            <a:pPr/>
             <a:endParaRPr lang="en-US"/>
           </a:p>
         </p:txBody>
@@ -9400,7 +10023,9 @@
             <a:off x="9601200" y="1594866"/>
             <a:ext cx="0" cy="604520"/>
           </a:xfrm>
-          <a:prstGeom prst="line"/>
+          <a:prstGeom prst="line">
+            <a:avLst/>
+          </a:prstGeom>
           <a:ln w="12700">
             <a:solidFill>
               <a:srgbClr val="FFFFFF"/>
@@ -9427,7 +10052,6 @@
             <a:defPPr/>
           </a:lstStyle>
           <a:p>
-            <a:pPr/>
             <a:endParaRPr lang="en-US"/>
           </a:p>
         </p:txBody>
@@ -9443,7 +10067,9 @@
             <a:off x="838200" y="1594866"/>
             <a:ext cx="0" cy="604520"/>
           </a:xfrm>
-          <a:prstGeom prst="line"/>
+          <a:prstGeom prst="line">
+            <a:avLst/>
+          </a:prstGeom>
           <a:ln w="12700">
             <a:solidFill>
               <a:srgbClr val="FFFFFF"/>
@@ -9470,7 +10096,6 @@
             <a:defPPr/>
           </a:lstStyle>
           <a:p>
-            <a:pPr/>
             <a:endParaRPr lang="en-US"/>
           </a:p>
         </p:txBody>
@@ -9486,7 +10111,9 @@
             <a:off x="11353800" y="1594866"/>
             <a:ext cx="0" cy="604520"/>
           </a:xfrm>
-          <a:prstGeom prst="line"/>
+          <a:prstGeom prst="line">
+            <a:avLst/>
+          </a:prstGeom>
           <a:ln w="12700">
             <a:solidFill>
               <a:srgbClr val="FFFFFF"/>
@@ -9513,7 +10140,6 @@
             <a:defPPr/>
           </a:lstStyle>
           <a:p>
-            <a:pPr/>
             <a:endParaRPr lang="en-US"/>
           </a:p>
         </p:txBody>
@@ -9529,7 +10155,9 @@
             <a:off x="831850" y="1601216"/>
             <a:ext cx="10528300" cy="0"/>
           </a:xfrm>
-          <a:prstGeom prst="line"/>
+          <a:prstGeom prst="line">
+            <a:avLst/>
+          </a:prstGeom>
           <a:ln w="12700">
             <a:solidFill>
               <a:srgbClr val="FFFFFF"/>
@@ -9556,7 +10184,6 @@
             <a:defPPr/>
           </a:lstStyle>
           <a:p>
-            <a:pPr/>
             <a:endParaRPr lang="en-US"/>
           </a:p>
         </p:txBody>
@@ -9572,7 +10199,9 @@
             <a:off x="831850" y="2180336"/>
             <a:ext cx="10528300" cy="0"/>
           </a:xfrm>
-          <a:prstGeom prst="line"/>
+          <a:prstGeom prst="line">
+            <a:avLst/>
+          </a:prstGeom>
           <a:ln w="38100">
             <a:solidFill>
               <a:srgbClr val="FFFFFF"/>
@@ -9599,7 +10228,6 @@
             <a:defPPr/>
           </a:lstStyle>
           <a:p>
-            <a:pPr/>
             <a:endParaRPr lang="en-US"/>
           </a:p>
         </p:txBody>
@@ -9615,7 +10243,9 @@
             <a:off x="281940" y="5212715"/>
             <a:ext cx="2532888" cy="25908"/>
           </a:xfrm>
-          <a:prstGeom prst="rect"/>
+          <a:prstGeom prst="rect">
+            <a:avLst/>
+          </a:prstGeom>
           <a:solidFill>
             <a:srgbClr val="000000"/>
           </a:solidFill>
@@ -9645,7 +10275,6 @@
             <a:defPPr/>
           </a:lstStyle>
           <a:p>
-            <a:pPr/>
             <a:endParaRPr lang="en-US"/>
           </a:p>
         </p:txBody>
@@ -9661,7 +10290,9 @@
             <a:off x="929640" y="703804"/>
             <a:ext cx="2528368" cy="683121"/>
           </a:xfrm>
-          <a:prstGeom prst="rect"/>
+          <a:prstGeom prst="rect">
+            <a:avLst/>
+          </a:prstGeom>
           <a:noFill/>
         </p:spPr>
         <p:style>
@@ -9688,9 +10319,8 @@
             <a:defPPr/>
           </a:lstStyle>
           <a:p>
-            <a:pPr/>
-            <a:r>
-              <a:rPr lang="en-US" sz="4406" dirty="1">
+            <a:r>
+              <a:rPr lang="en-US" sz="4406">
                 <a:solidFill>
                   <a:srgbClr val="00AFEF"/>
                 </a:solidFill>
@@ -9712,7 +10342,9 @@
             <a:off x="1611757" y="1680744"/>
             <a:ext cx="206236" cy="496714"/>
           </a:xfrm>
-          <a:prstGeom prst="rect"/>
+          <a:prstGeom prst="rect">
+            <a:avLst/>
+          </a:prstGeom>
           <a:noFill/>
         </p:spPr>
         <p:style>
@@ -9739,9 +10371,8 @@
             <a:defPPr/>
           </a:lstStyle>
           <a:p>
-            <a:pPr/>
-            <a:r>
-              <a:rPr lang="en-US" sz="3204" b="1" dirty="1">
+            <a:r>
+              <a:rPr lang="en-US" sz="3204" b="1">
                 <a:solidFill>
                   <a:srgbClr val="FFFFFF"/>
                 </a:solidFill>
@@ -9763,7 +10394,9 @@
             <a:off x="3364738" y="1680744"/>
             <a:ext cx="206236" cy="496714"/>
           </a:xfrm>
-          <a:prstGeom prst="rect"/>
+          <a:prstGeom prst="rect">
+            <a:avLst/>
+          </a:prstGeom>
           <a:noFill/>
         </p:spPr>
         <p:style>
@@ -9790,9 +10423,8 @@
             <a:defPPr/>
           </a:lstStyle>
           <a:p>
-            <a:pPr/>
-            <a:r>
-              <a:rPr lang="en-US" sz="3204" b="1" dirty="1">
+            <a:r>
+              <a:rPr lang="en-US" sz="3204" b="1">
                 <a:solidFill>
                   <a:srgbClr val="FFFFFF"/>
                 </a:solidFill>
@@ -9814,7 +10446,9 @@
             <a:off x="5117338" y="1680744"/>
             <a:ext cx="206236" cy="496714"/>
           </a:xfrm>
-          <a:prstGeom prst="rect"/>
+          <a:prstGeom prst="rect">
+            <a:avLst/>
+          </a:prstGeom>
           <a:noFill/>
         </p:spPr>
         <p:style>
@@ -9841,9 +10475,8 @@
             <a:defPPr/>
           </a:lstStyle>
           <a:p>
-            <a:pPr/>
-            <a:r>
-              <a:rPr lang="en-US" sz="3204" b="1" dirty="1">
+            <a:r>
+              <a:rPr lang="en-US" sz="3204" b="1">
                 <a:solidFill>
                   <a:srgbClr val="FFFFFF"/>
                 </a:solidFill>
@@ -9865,7 +10498,9 @@
             <a:off x="6870192" y="1680744"/>
             <a:ext cx="206236" cy="496714"/>
           </a:xfrm>
-          <a:prstGeom prst="rect"/>
+          <a:prstGeom prst="rect">
+            <a:avLst/>
+          </a:prstGeom>
           <a:noFill/>
         </p:spPr>
         <p:style>
@@ -9892,9 +10527,8 @@
             <a:defPPr/>
           </a:lstStyle>
           <a:p>
-            <a:pPr/>
-            <a:r>
-              <a:rPr lang="en-US" sz="3204" b="1" dirty="1">
+            <a:r>
+              <a:rPr lang="en-US" sz="3204" b="1">
                 <a:solidFill>
                   <a:srgbClr val="FFFFFF"/>
                 </a:solidFill>
@@ -9916,7 +10550,9 @@
             <a:off x="8623046" y="1680744"/>
             <a:ext cx="206236" cy="496714"/>
           </a:xfrm>
-          <a:prstGeom prst="rect"/>
+          <a:prstGeom prst="rect">
+            <a:avLst/>
+          </a:prstGeom>
           <a:noFill/>
         </p:spPr>
         <p:style>
@@ -9943,9 +10579,8 @@
             <a:defPPr/>
           </a:lstStyle>
           <a:p>
-            <a:pPr/>
-            <a:r>
-              <a:rPr lang="en-US" sz="3204" b="1" dirty="1">
+            <a:r>
+              <a:rPr lang="en-US" sz="3204" b="1">
                 <a:solidFill>
                   <a:srgbClr val="FFFFFF"/>
                 </a:solidFill>
@@ -9967,7 +10602,9 @@
             <a:off x="10376027" y="1680744"/>
             <a:ext cx="206236" cy="496714"/>
           </a:xfrm>
-          <a:prstGeom prst="rect"/>
+          <a:prstGeom prst="rect">
+            <a:avLst/>
+          </a:prstGeom>
           <a:noFill/>
         </p:spPr>
         <p:style>
@@ -9994,9 +10631,8 @@
             <a:defPPr/>
           </a:lstStyle>
           <a:p>
-            <a:pPr/>
-            <a:r>
-              <a:rPr lang="en-US" sz="3204" b="1" dirty="1">
+            <a:r>
+              <a:rPr lang="en-US" sz="3204" b="1">
                 <a:solidFill>
                   <a:srgbClr val="FFFFFF"/>
                 </a:solidFill>
@@ -10018,7 +10654,9 @@
             <a:off x="281940" y="4820438"/>
             <a:ext cx="2535824" cy="496714"/>
           </a:xfrm>
-          <a:prstGeom prst="rect"/>
+          <a:prstGeom prst="rect">
+            <a:avLst/>
+          </a:prstGeom>
           <a:noFill/>
         </p:spPr>
         <p:style>
@@ -10045,9 +10683,8 @@
             <a:defPPr/>
           </a:lstStyle>
           <a:p>
-            <a:pPr/>
-            <a:r>
-              <a:rPr lang="en-US" sz="3204" dirty="1">
+            <a:r>
+              <a:rPr lang="en-US" sz="3204">
                 <a:solidFill>
                   <a:srgbClr val="000000"/>
                 </a:solidFill>
@@ -10069,7 +10706,9 @@
             <a:off x="739140" y="5303417"/>
             <a:ext cx="5737715" cy="433834"/>
           </a:xfrm>
-          <a:prstGeom prst="rect"/>
+          <a:prstGeom prst="rect">
+            <a:avLst/>
+          </a:prstGeom>
           <a:noFill/>
         </p:spPr>
         <p:style>
@@ -10096,9 +10735,8 @@
             <a:defPPr/>
           </a:lstStyle>
           <a:p>
-            <a:pPr/>
-            <a:r>
-              <a:rPr lang="en-US" sz="2798" dirty="1">
+            <a:r>
+              <a:rPr lang="en-US" sz="2798">
                 <a:solidFill>
                   <a:srgbClr val="000000"/>
                 </a:solidFill>
@@ -10120,7 +10758,9 @@
             <a:off x="6467221" y="5303417"/>
             <a:ext cx="182557" cy="433834"/>
           </a:xfrm>
-          <a:prstGeom prst="rect"/>
+          <a:prstGeom prst="rect">
+            <a:avLst/>
+          </a:prstGeom>
           <a:noFill/>
         </p:spPr>
         <p:style>
@@ -10147,9 +10787,8 @@
             <a:defPPr/>
           </a:lstStyle>
           <a:p>
-            <a:pPr/>
-            <a:r>
-              <a:rPr lang="en-US" sz="2798" i="1" dirty="1">
+            <a:r>
+              <a:rPr lang="en-US" sz="2798" i="1">
                 <a:solidFill>
                   <a:srgbClr val="000000"/>
                 </a:solidFill>
@@ -10171,7 +10810,9 @@
             <a:off x="6730873" y="5303417"/>
             <a:ext cx="544722" cy="433834"/>
           </a:xfrm>
-          <a:prstGeom prst="rect"/>
+          <a:prstGeom prst="rect">
+            <a:avLst/>
+          </a:prstGeom>
           <a:noFill/>
         </p:spPr>
         <p:style>
@@ -10198,9 +10839,8 @@
             <a:defPPr/>
           </a:lstStyle>
           <a:p>
-            <a:pPr/>
-            <a:r>
-              <a:rPr lang="en-US" sz="2798" dirty="1">
+            <a:r>
+              <a:rPr lang="en-US" sz="2798">
                 <a:solidFill>
                   <a:srgbClr val="000000"/>
                 </a:solidFill>
@@ -10222,7 +10862,9 @@
             <a:off x="739140" y="5730702"/>
             <a:ext cx="5925251" cy="433462"/>
           </a:xfrm>
-          <a:prstGeom prst="rect"/>
+          <a:prstGeom prst="rect">
+            <a:avLst/>
+          </a:prstGeom>
           <a:noFill/>
         </p:spPr>
         <p:style>
@@ -10249,9 +10891,8 @@
             <a:defPPr/>
           </a:lstStyle>
           <a:p>
-            <a:pPr/>
-            <a:r>
-              <a:rPr lang="en-US" sz="2796" dirty="1">
+            <a:r>
+              <a:rPr lang="en-US" sz="2796">
                 <a:solidFill>
                   <a:srgbClr val="000000"/>
                 </a:solidFill>
@@ -10273,7 +10914,9 @@
             <a:off x="6660769" y="5730702"/>
             <a:ext cx="182401" cy="433462"/>
           </a:xfrm>
-          <a:prstGeom prst="rect"/>
+          <a:prstGeom prst="rect">
+            <a:avLst/>
+          </a:prstGeom>
           <a:noFill/>
         </p:spPr>
         <p:style>
@@ -10300,9 +10943,8 @@
             <a:defPPr/>
           </a:lstStyle>
           <a:p>
-            <a:pPr/>
-            <a:r>
-              <a:rPr lang="en-US" sz="2796" i="1" dirty="1">
+            <a:r>
+              <a:rPr lang="en-US" sz="2796" i="1">
                 <a:solidFill>
                   <a:srgbClr val="000000"/>
                 </a:solidFill>
@@ -10324,7 +10966,9 @@
             <a:off x="6922897" y="5730702"/>
             <a:ext cx="544255" cy="433462"/>
           </a:xfrm>
-          <a:prstGeom prst="rect"/>
+          <a:prstGeom prst="rect">
+            <a:avLst/>
+          </a:prstGeom>
           <a:noFill/>
         </p:spPr>
         <p:style>
@@ -10351,9 +10995,8 @@
             <a:defPPr/>
           </a:lstStyle>
           <a:p>
-            <a:pPr/>
-            <a:r>
-              <a:rPr lang="en-US" sz="2796" dirty="1">
+            <a:r>
+              <a:rPr lang="en-US" sz="2796">
                 <a:solidFill>
                   <a:srgbClr val="000000"/>
                 </a:solidFill>
@@ -10375,7 +11018,9 @@
             <a:off x="739140" y="6157422"/>
             <a:ext cx="4479568" cy="433462"/>
           </a:xfrm>
-          <a:prstGeom prst="rect"/>
+          <a:prstGeom prst="rect">
+            <a:avLst/>
+          </a:prstGeom>
           <a:noFill/>
         </p:spPr>
         <p:style>
@@ -10402,9 +11047,8 @@
             <a:defPPr/>
           </a:lstStyle>
           <a:p>
-            <a:pPr/>
-            <a:r>
-              <a:rPr lang="en-US" sz="2796" dirty="1">
+            <a:r>
+              <a:rPr lang="en-US" sz="2796">
                 <a:solidFill>
                   <a:srgbClr val="000000"/>
                 </a:solidFill>
@@ -10417,12 +11061,15 @@
       </p:sp>
     </p:spTree>
   </p:cSld>
+  <p:clrMapOvr>
+    <a:masterClrMapping/>
+  </p:clrMapOvr>
 </p:sld>
 </file>
 
 <file path=ppt/slides/slide6.xml><?xml version="1.0" encoding="utf-8"?>
 <p:sld xmlns:a="http://schemas.openxmlformats.org/drawingml/2006/main" xmlns:r="http://schemas.openxmlformats.org/officeDocument/2006/relationships" xmlns:p="http://schemas.openxmlformats.org/presentationml/2006/main">
-  <p:cSld name="">
+  <p:cSld>
     <p:spTree>
       <p:nvGrpSpPr>
         <p:cNvPr id="1" name=""/>
@@ -10448,7 +11095,9 @@
             <a:off x="0" y="-1"/>
             <a:ext cx="12192000" cy="6857999"/>
           </a:xfrm>
-          <a:prstGeom prst="rect"/>
+          <a:prstGeom prst="rect">
+            <a:avLst/>
+          </a:prstGeom>
           <a:solidFill>
             <a:srgbClr val="FFFFFF"/>
           </a:solidFill>
@@ -10478,7 +11127,6 @@
             <a:defPPr/>
           </a:lstStyle>
           <a:p>
-            <a:pPr/>
             <a:endParaRPr lang="en-US"/>
           </a:p>
         </p:txBody>
@@ -10494,7 +11142,9 @@
             <a:off x="838200" y="1601216"/>
             <a:ext cx="1752600" cy="579120"/>
           </a:xfrm>
-          <a:prstGeom prst="rect"/>
+          <a:prstGeom prst="rect">
+            <a:avLst/>
+          </a:prstGeom>
           <a:solidFill>
             <a:srgbClr val="FFC000"/>
           </a:solidFill>
@@ -10524,7 +11174,6 @@
             <a:defPPr/>
           </a:lstStyle>
           <a:p>
-            <a:pPr/>
             <a:endParaRPr lang="en-US"/>
           </a:p>
         </p:txBody>
@@ -10540,7 +11189,9 @@
             <a:off x="2590800" y="1601216"/>
             <a:ext cx="1752600" cy="579120"/>
           </a:xfrm>
-          <a:prstGeom prst="rect"/>
+          <a:prstGeom prst="rect">
+            <a:avLst/>
+          </a:prstGeom>
           <a:solidFill>
             <a:srgbClr val="FFC000">
               <a:alpha val="24706"/>
@@ -10572,7 +11223,6 @@
             <a:defPPr/>
           </a:lstStyle>
           <a:p>
-            <a:pPr/>
             <a:endParaRPr lang="en-US"/>
           </a:p>
         </p:txBody>
@@ -10588,7 +11238,9 @@
             <a:off x="4343400" y="1601216"/>
             <a:ext cx="1752600" cy="579120"/>
           </a:xfrm>
-          <a:prstGeom prst="rect"/>
+          <a:prstGeom prst="rect">
+            <a:avLst/>
+          </a:prstGeom>
           <a:solidFill>
             <a:srgbClr val="FFC000">
               <a:alpha val="24706"/>
@@ -10620,7 +11272,6 @@
             <a:defPPr/>
           </a:lstStyle>
           <a:p>
-            <a:pPr/>
             <a:endParaRPr lang="en-US"/>
           </a:p>
         </p:txBody>
@@ -10636,7 +11287,9 @@
             <a:off x="6096000" y="1601216"/>
             <a:ext cx="1752600" cy="579120"/>
           </a:xfrm>
-          <a:prstGeom prst="rect"/>
+          <a:prstGeom prst="rect">
+            <a:avLst/>
+          </a:prstGeom>
           <a:solidFill>
             <a:srgbClr val="FF0000">
               <a:alpha val="24706"/>
@@ -10668,7 +11321,6 @@
             <a:defPPr/>
           </a:lstStyle>
           <a:p>
-            <a:pPr/>
             <a:endParaRPr lang="en-US"/>
           </a:p>
         </p:txBody>
@@ -10684,7 +11336,9 @@
             <a:off x="7848600" y="1601216"/>
             <a:ext cx="1752600" cy="579120"/>
           </a:xfrm>
-          <a:prstGeom prst="rect"/>
+          <a:prstGeom prst="rect">
+            <a:avLst/>
+          </a:prstGeom>
           <a:solidFill>
             <a:srgbClr val="FF0000">
               <a:alpha val="24706"/>
@@ -10716,7 +11370,6 @@
             <a:defPPr/>
           </a:lstStyle>
           <a:p>
-            <a:pPr/>
             <a:endParaRPr lang="en-US"/>
           </a:p>
         </p:txBody>
@@ -10732,7 +11385,9 @@
             <a:off x="9601200" y="1601216"/>
             <a:ext cx="1752600" cy="579120"/>
           </a:xfrm>
-          <a:prstGeom prst="rect"/>
+          <a:prstGeom prst="rect">
+            <a:avLst/>
+          </a:prstGeom>
           <a:solidFill>
             <a:srgbClr val="FF0000">
               <a:alpha val="24706"/>
@@ -10764,7 +11419,6 @@
             <a:defPPr/>
           </a:lstStyle>
           <a:p>
-            <a:pPr/>
             <a:endParaRPr lang="en-US"/>
           </a:p>
         </p:txBody>
@@ -10780,7 +11434,9 @@
             <a:off x="2590800" y="1594866"/>
             <a:ext cx="0" cy="604520"/>
           </a:xfrm>
-          <a:prstGeom prst="line"/>
+          <a:prstGeom prst="line">
+            <a:avLst/>
+          </a:prstGeom>
           <a:ln w="12700">
             <a:solidFill>
               <a:srgbClr val="FFFFFF"/>
@@ -10807,7 +11463,6 @@
             <a:defPPr/>
           </a:lstStyle>
           <a:p>
-            <a:pPr/>
             <a:endParaRPr lang="en-US"/>
           </a:p>
         </p:txBody>
@@ -10823,7 +11478,9 @@
             <a:off x="4343400" y="1594866"/>
             <a:ext cx="0" cy="604520"/>
           </a:xfrm>
-          <a:prstGeom prst="line"/>
+          <a:prstGeom prst="line">
+            <a:avLst/>
+          </a:prstGeom>
           <a:ln w="12700">
             <a:solidFill>
               <a:srgbClr val="FFFFFF"/>
@@ -10850,7 +11507,6 @@
             <a:defPPr/>
           </a:lstStyle>
           <a:p>
-            <a:pPr/>
             <a:endParaRPr lang="en-US"/>
           </a:p>
         </p:txBody>
@@ -10866,7 +11522,9 @@
             <a:off x="6096000" y="1594866"/>
             <a:ext cx="0" cy="604520"/>
           </a:xfrm>
-          <a:prstGeom prst="line"/>
+          <a:prstGeom prst="line">
+            <a:avLst/>
+          </a:prstGeom>
           <a:ln w="12700">
             <a:solidFill>
               <a:srgbClr val="FFFFFF"/>
@@ -10893,7 +11551,6 @@
             <a:defPPr/>
           </a:lstStyle>
           <a:p>
-            <a:pPr/>
             <a:endParaRPr lang="en-US"/>
           </a:p>
         </p:txBody>
@@ -10909,7 +11566,9 @@
             <a:off x="7848600" y="1594866"/>
             <a:ext cx="0" cy="604520"/>
           </a:xfrm>
-          <a:prstGeom prst="line"/>
+          <a:prstGeom prst="line">
+            <a:avLst/>
+          </a:prstGeom>
           <a:ln w="12700">
             <a:solidFill>
               <a:srgbClr val="FFFFFF"/>
@@ -10936,7 +11595,6 @@
             <a:defPPr/>
           </a:lstStyle>
           <a:p>
-            <a:pPr/>
             <a:endParaRPr lang="en-US"/>
           </a:p>
         </p:txBody>
@@ -10952,7 +11610,9 @@
             <a:off x="9601200" y="1594866"/>
             <a:ext cx="0" cy="604520"/>
           </a:xfrm>
-          <a:prstGeom prst="line"/>
+          <a:prstGeom prst="line">
+            <a:avLst/>
+          </a:prstGeom>
           <a:ln w="12700">
             <a:solidFill>
               <a:srgbClr val="FFFFFF"/>
@@ -10979,7 +11639,6 @@
             <a:defPPr/>
           </a:lstStyle>
           <a:p>
-            <a:pPr/>
             <a:endParaRPr lang="en-US"/>
           </a:p>
         </p:txBody>
@@ -10995,7 +11654,9 @@
             <a:off x="838200" y="1594866"/>
             <a:ext cx="0" cy="604520"/>
           </a:xfrm>
-          <a:prstGeom prst="line"/>
+          <a:prstGeom prst="line">
+            <a:avLst/>
+          </a:prstGeom>
           <a:ln w="12700">
             <a:solidFill>
               <a:srgbClr val="FFFFFF"/>
@@ -11022,7 +11683,6 @@
             <a:defPPr/>
           </a:lstStyle>
           <a:p>
-            <a:pPr/>
             <a:endParaRPr lang="en-US"/>
           </a:p>
         </p:txBody>
@@ -11038,7 +11698,9 @@
             <a:off x="11353800" y="1594866"/>
             <a:ext cx="0" cy="604520"/>
           </a:xfrm>
-          <a:prstGeom prst="line"/>
+          <a:prstGeom prst="line">
+            <a:avLst/>
+          </a:prstGeom>
           <a:ln w="12700">
             <a:solidFill>
               <a:srgbClr val="FFFFFF"/>
@@ -11065,7 +11727,6 @@
             <a:defPPr/>
           </a:lstStyle>
           <a:p>
-            <a:pPr/>
             <a:endParaRPr lang="en-US"/>
           </a:p>
         </p:txBody>
@@ -11081,7 +11742,9 @@
             <a:off x="831850" y="1601216"/>
             <a:ext cx="10528300" cy="0"/>
           </a:xfrm>
-          <a:prstGeom prst="line"/>
+          <a:prstGeom prst="line">
+            <a:avLst/>
+          </a:prstGeom>
           <a:ln w="12700">
             <a:solidFill>
               <a:srgbClr val="FFFFFF"/>
@@ -11108,7 +11771,6 @@
             <a:defPPr/>
           </a:lstStyle>
           <a:p>
-            <a:pPr/>
             <a:endParaRPr lang="en-US"/>
           </a:p>
         </p:txBody>
@@ -11124,7 +11786,9 @@
             <a:off x="831850" y="2180336"/>
             <a:ext cx="10528300" cy="0"/>
           </a:xfrm>
-          <a:prstGeom prst="line"/>
+          <a:prstGeom prst="line">
+            <a:avLst/>
+          </a:prstGeom>
           <a:ln w="38100">
             <a:solidFill>
               <a:srgbClr val="FFFFFF"/>
@@ -11151,7 +11815,6 @@
             <a:defPPr/>
           </a:lstStyle>
           <a:p>
-            <a:pPr/>
             <a:endParaRPr lang="en-US"/>
           </a:p>
         </p:txBody>
@@ -11167,7 +11830,9 @@
             <a:off x="281940" y="5212715"/>
             <a:ext cx="2532888" cy="25908"/>
           </a:xfrm>
-          <a:prstGeom prst="rect"/>
+          <a:prstGeom prst="rect">
+            <a:avLst/>
+          </a:prstGeom>
           <a:solidFill>
             <a:srgbClr val="000000"/>
           </a:solidFill>
@@ -11197,7 +11862,6 @@
             <a:defPPr/>
           </a:lstStyle>
           <a:p>
-            <a:pPr/>
             <a:endParaRPr lang="en-US"/>
           </a:p>
         </p:txBody>
@@ -11213,7 +11877,9 @@
             <a:off x="929640" y="703804"/>
             <a:ext cx="2528368" cy="683121"/>
           </a:xfrm>
-          <a:prstGeom prst="rect"/>
+          <a:prstGeom prst="rect">
+            <a:avLst/>
+          </a:prstGeom>
           <a:noFill/>
         </p:spPr>
         <p:style>
@@ -11240,9 +11906,8 @@
             <a:defPPr/>
           </a:lstStyle>
           <a:p>
-            <a:pPr/>
-            <a:r>
-              <a:rPr lang="en-US" sz="4406" dirty="1">
+            <a:r>
+              <a:rPr lang="en-US" sz="4406">
                 <a:solidFill>
                   <a:srgbClr val="00AFEF"/>
                 </a:solidFill>
@@ -11264,7 +11929,9 @@
             <a:off x="1611757" y="1680744"/>
             <a:ext cx="206236" cy="496714"/>
           </a:xfrm>
-          <a:prstGeom prst="rect"/>
+          <a:prstGeom prst="rect">
+            <a:avLst/>
+          </a:prstGeom>
           <a:noFill/>
         </p:spPr>
         <p:style>
@@ -11291,9 +11958,8 @@
             <a:defPPr/>
           </a:lstStyle>
           <a:p>
-            <a:pPr/>
-            <a:r>
-              <a:rPr lang="en-US" sz="3204" b="1" dirty="1">
+            <a:r>
+              <a:rPr lang="en-US" sz="3204" b="1">
                 <a:solidFill>
                   <a:srgbClr val="FFFFFF"/>
                 </a:solidFill>
@@ -11315,7 +11981,9 @@
             <a:off x="3364738" y="1680744"/>
             <a:ext cx="206236" cy="496714"/>
           </a:xfrm>
-          <a:prstGeom prst="rect"/>
+          <a:prstGeom prst="rect">
+            <a:avLst/>
+          </a:prstGeom>
           <a:noFill/>
         </p:spPr>
         <p:style>
@@ -11342,9 +12010,8 @@
             <a:defPPr/>
           </a:lstStyle>
           <a:p>
-            <a:pPr/>
-            <a:r>
-              <a:rPr lang="en-US" sz="3204" b="1" dirty="1">
+            <a:r>
+              <a:rPr lang="en-US" sz="3204" b="1">
                 <a:solidFill>
                   <a:srgbClr val="FFFFFF"/>
                 </a:solidFill>
@@ -11366,7 +12033,9 @@
             <a:off x="5117338" y="1680744"/>
             <a:ext cx="206236" cy="496714"/>
           </a:xfrm>
-          <a:prstGeom prst="rect"/>
+          <a:prstGeom prst="rect">
+            <a:avLst/>
+          </a:prstGeom>
           <a:noFill/>
         </p:spPr>
         <p:style>
@@ -11393,9 +12062,8 @@
             <a:defPPr/>
           </a:lstStyle>
           <a:p>
-            <a:pPr/>
-            <a:r>
-              <a:rPr lang="en-US" sz="3204" b="1" dirty="1">
+            <a:r>
+              <a:rPr lang="en-US" sz="3204" b="1">
                 <a:solidFill>
                   <a:srgbClr val="FFFFFF"/>
                 </a:solidFill>
@@ -11417,7 +12085,9 @@
             <a:off x="6870192" y="1680744"/>
             <a:ext cx="206236" cy="496714"/>
           </a:xfrm>
-          <a:prstGeom prst="rect"/>
+          <a:prstGeom prst="rect">
+            <a:avLst/>
+          </a:prstGeom>
           <a:noFill/>
         </p:spPr>
         <p:style>
@@ -11444,9 +12114,8 @@
             <a:defPPr/>
           </a:lstStyle>
           <a:p>
-            <a:pPr/>
-            <a:r>
-              <a:rPr lang="en-US" sz="3204" b="1" dirty="1">
+            <a:r>
+              <a:rPr lang="en-US" sz="3204" b="1">
                 <a:solidFill>
                   <a:srgbClr val="FFFFFF"/>
                 </a:solidFill>
@@ -11468,7 +12137,9 @@
             <a:off x="8623046" y="1680744"/>
             <a:ext cx="206236" cy="496714"/>
           </a:xfrm>
-          <a:prstGeom prst="rect"/>
+          <a:prstGeom prst="rect">
+            <a:avLst/>
+          </a:prstGeom>
           <a:noFill/>
         </p:spPr>
         <p:style>
@@ -11495,9 +12166,8 @@
             <a:defPPr/>
           </a:lstStyle>
           <a:p>
-            <a:pPr/>
-            <a:r>
-              <a:rPr lang="en-US" sz="3204" b="1" dirty="1">
+            <a:r>
+              <a:rPr lang="en-US" sz="3204" b="1">
                 <a:solidFill>
                   <a:srgbClr val="FFFFFF"/>
                 </a:solidFill>
@@ -11519,7 +12189,9 @@
             <a:off x="10376027" y="1680744"/>
             <a:ext cx="206236" cy="496714"/>
           </a:xfrm>
-          <a:prstGeom prst="rect"/>
+          <a:prstGeom prst="rect">
+            <a:avLst/>
+          </a:prstGeom>
           <a:noFill/>
         </p:spPr>
         <p:style>
@@ -11546,9 +12218,8 @@
             <a:defPPr/>
           </a:lstStyle>
           <a:p>
-            <a:pPr/>
-            <a:r>
-              <a:rPr lang="en-US" sz="3204" b="1" dirty="1">
+            <a:r>
+              <a:rPr lang="en-US" sz="3204" b="1">
                 <a:solidFill>
                   <a:srgbClr val="FFFFFF"/>
                 </a:solidFill>
@@ -11570,7 +12241,9 @@
             <a:off x="281940" y="4820438"/>
             <a:ext cx="2535824" cy="496714"/>
           </a:xfrm>
-          <a:prstGeom prst="rect"/>
+          <a:prstGeom prst="rect">
+            <a:avLst/>
+          </a:prstGeom>
           <a:noFill/>
         </p:spPr>
         <p:style>
@@ -11597,9 +12270,8 @@
             <a:defPPr/>
           </a:lstStyle>
           <a:p>
-            <a:pPr/>
-            <a:r>
-              <a:rPr lang="en-US" sz="3204" dirty="1">
+            <a:r>
+              <a:rPr lang="en-US" sz="3204">
                 <a:solidFill>
                   <a:srgbClr val="000000"/>
                 </a:solidFill>
@@ -11621,7 +12293,9 @@
             <a:off x="739140" y="5303417"/>
             <a:ext cx="5737715" cy="433834"/>
           </a:xfrm>
-          <a:prstGeom prst="rect"/>
+          <a:prstGeom prst="rect">
+            <a:avLst/>
+          </a:prstGeom>
           <a:noFill/>
         </p:spPr>
         <p:style>
@@ -11648,9 +12322,8 @@
             <a:defPPr/>
           </a:lstStyle>
           <a:p>
-            <a:pPr/>
-            <a:r>
-              <a:rPr lang="en-US" sz="2798" dirty="1">
+            <a:r>
+              <a:rPr lang="en-US" sz="2798">
                 <a:solidFill>
                   <a:srgbClr val="000000"/>
                 </a:solidFill>
@@ -11672,7 +12345,9 @@
             <a:off x="6467221" y="5303417"/>
             <a:ext cx="182557" cy="433834"/>
           </a:xfrm>
-          <a:prstGeom prst="rect"/>
+          <a:prstGeom prst="rect">
+            <a:avLst/>
+          </a:prstGeom>
           <a:noFill/>
         </p:spPr>
         <p:style>
@@ -11699,9 +12374,8 @@
             <a:defPPr/>
           </a:lstStyle>
           <a:p>
-            <a:pPr/>
-            <a:r>
-              <a:rPr lang="en-US" sz="2798" i="1" dirty="1">
+            <a:r>
+              <a:rPr lang="en-US" sz="2798" i="1">
                 <a:solidFill>
                   <a:srgbClr val="000000"/>
                 </a:solidFill>
@@ -11723,7 +12397,9 @@
             <a:off x="6730873" y="5303417"/>
             <a:ext cx="544722" cy="433834"/>
           </a:xfrm>
-          <a:prstGeom prst="rect"/>
+          <a:prstGeom prst="rect">
+            <a:avLst/>
+          </a:prstGeom>
           <a:noFill/>
         </p:spPr>
         <p:style>
@@ -11750,9 +12426,8 @@
             <a:defPPr/>
           </a:lstStyle>
           <a:p>
-            <a:pPr/>
-            <a:r>
-              <a:rPr lang="en-US" sz="2798" dirty="1">
+            <a:r>
+              <a:rPr lang="en-US" sz="2798">
                 <a:solidFill>
                   <a:srgbClr val="000000"/>
                 </a:solidFill>
@@ -11774,7 +12449,9 @@
             <a:off x="739140" y="5730702"/>
             <a:ext cx="5925251" cy="433462"/>
           </a:xfrm>
-          <a:prstGeom prst="rect"/>
+          <a:prstGeom prst="rect">
+            <a:avLst/>
+          </a:prstGeom>
           <a:noFill/>
         </p:spPr>
         <p:style>
@@ -11801,9 +12478,8 @@
             <a:defPPr/>
           </a:lstStyle>
           <a:p>
-            <a:pPr/>
-            <a:r>
-              <a:rPr lang="en-US" sz="2796" dirty="1">
+            <a:r>
+              <a:rPr lang="en-US" sz="2796">
                 <a:solidFill>
                   <a:srgbClr val="000000"/>
                 </a:solidFill>
@@ -11825,7 +12501,9 @@
             <a:off x="6660769" y="5730702"/>
             <a:ext cx="182401" cy="433462"/>
           </a:xfrm>
-          <a:prstGeom prst="rect"/>
+          <a:prstGeom prst="rect">
+            <a:avLst/>
+          </a:prstGeom>
           <a:noFill/>
         </p:spPr>
         <p:style>
@@ -11852,9 +12530,8 @@
             <a:defPPr/>
           </a:lstStyle>
           <a:p>
-            <a:pPr/>
-            <a:r>
-              <a:rPr lang="en-US" sz="2796" i="1" dirty="1">
+            <a:r>
+              <a:rPr lang="en-US" sz="2796" i="1">
                 <a:solidFill>
                   <a:srgbClr val="000000"/>
                 </a:solidFill>
@@ -11876,7 +12553,9 @@
             <a:off x="6922897" y="5730702"/>
             <a:ext cx="544255" cy="433462"/>
           </a:xfrm>
-          <a:prstGeom prst="rect"/>
+          <a:prstGeom prst="rect">
+            <a:avLst/>
+          </a:prstGeom>
           <a:noFill/>
         </p:spPr>
         <p:style>
@@ -11903,9 +12582,8 @@
             <a:defPPr/>
           </a:lstStyle>
           <a:p>
-            <a:pPr/>
-            <a:r>
-              <a:rPr lang="en-US" sz="2796" dirty="1">
+            <a:r>
+              <a:rPr lang="en-US" sz="2796">
                 <a:solidFill>
                   <a:srgbClr val="000000"/>
                 </a:solidFill>
@@ -11927,7 +12605,9 @@
             <a:off x="739140" y="6157422"/>
             <a:ext cx="4479568" cy="433462"/>
           </a:xfrm>
-          <a:prstGeom prst="rect"/>
+          <a:prstGeom prst="rect">
+            <a:avLst/>
+          </a:prstGeom>
           <a:noFill/>
         </p:spPr>
         <p:style>
@@ -11954,9 +12634,8 @@
             <a:defPPr/>
           </a:lstStyle>
           <a:p>
-            <a:pPr/>
-            <a:r>
-              <a:rPr lang="en-US" sz="2796" dirty="1">
+            <a:r>
+              <a:rPr lang="en-US" sz="2796">
                 <a:solidFill>
                   <a:srgbClr val="000000"/>
                 </a:solidFill>
@@ -11969,12 +12648,15 @@
       </p:sp>
     </p:spTree>
   </p:cSld>
+  <p:clrMapOvr>
+    <a:masterClrMapping/>
+  </p:clrMapOvr>
 </p:sld>
 </file>
 
 <file path=ppt/slides/slide7.xml><?xml version="1.0" encoding="utf-8"?>
 <p:sld xmlns:a="http://schemas.openxmlformats.org/drawingml/2006/main" xmlns:r="http://schemas.openxmlformats.org/officeDocument/2006/relationships" xmlns:p="http://schemas.openxmlformats.org/presentationml/2006/main">
-  <p:cSld name="">
+  <p:cSld>
     <p:spTree>
       <p:nvGrpSpPr>
         <p:cNvPr id="1" name=""/>
@@ -12000,7 +12682,9 @@
             <a:off x="0" y="-1"/>
             <a:ext cx="12192000" cy="6857999"/>
           </a:xfrm>
-          <a:prstGeom prst="rect"/>
+          <a:prstGeom prst="rect">
+            <a:avLst/>
+          </a:prstGeom>
           <a:solidFill>
             <a:srgbClr val="FFFFFF"/>
           </a:solidFill>
@@ -12030,7 +12714,6 @@
             <a:defPPr/>
           </a:lstStyle>
           <a:p>
-            <a:pPr/>
             <a:endParaRPr lang="en-US"/>
           </a:p>
         </p:txBody>
@@ -12046,7 +12729,9 @@
             <a:off x="838200" y="1601216"/>
             <a:ext cx="1752600" cy="579120"/>
           </a:xfrm>
-          <a:prstGeom prst="rect"/>
+          <a:prstGeom prst="rect">
+            <a:avLst/>
+          </a:prstGeom>
           <a:solidFill>
             <a:srgbClr val="7E7E7E"/>
           </a:solidFill>
@@ -12076,7 +12761,6 @@
             <a:defPPr/>
           </a:lstStyle>
           <a:p>
-            <a:pPr/>
             <a:endParaRPr lang="en-US"/>
           </a:p>
         </p:txBody>
@@ -12092,7 +12776,9 @@
             <a:off x="2590800" y="1601216"/>
             <a:ext cx="1752600" cy="579120"/>
           </a:xfrm>
-          <a:prstGeom prst="rect"/>
+          <a:prstGeom prst="rect">
+            <a:avLst/>
+          </a:prstGeom>
           <a:solidFill>
             <a:srgbClr val="FFC000">
               <a:alpha val="24706"/>
@@ -12124,7 +12810,6 @@
             <a:defPPr/>
           </a:lstStyle>
           <a:p>
-            <a:pPr/>
             <a:endParaRPr lang="en-US"/>
           </a:p>
         </p:txBody>
@@ -12140,7 +12825,9 @@
             <a:off x="4343400" y="1601216"/>
             <a:ext cx="1752600" cy="579120"/>
           </a:xfrm>
-          <a:prstGeom prst="rect"/>
+          <a:prstGeom prst="rect">
+            <a:avLst/>
+          </a:prstGeom>
           <a:solidFill>
             <a:srgbClr val="FFC000">
               <a:alpha val="24706"/>
@@ -12172,7 +12859,6 @@
             <a:defPPr/>
           </a:lstStyle>
           <a:p>
-            <a:pPr/>
             <a:endParaRPr lang="en-US"/>
           </a:p>
         </p:txBody>
@@ -12188,7 +12874,9 @@
             <a:off x="6096000" y="1601216"/>
             <a:ext cx="1752600" cy="579120"/>
           </a:xfrm>
-          <a:prstGeom prst="rect"/>
+          <a:prstGeom prst="rect">
+            <a:avLst/>
+          </a:prstGeom>
           <a:solidFill>
             <a:srgbClr val="FF0000">
               <a:alpha val="24706"/>
@@ -12220,7 +12908,6 @@
             <a:defPPr/>
           </a:lstStyle>
           <a:p>
-            <a:pPr/>
             <a:endParaRPr lang="en-US"/>
           </a:p>
         </p:txBody>
@@ -12236,7 +12923,9 @@
             <a:off x="7848600" y="1601216"/>
             <a:ext cx="1752600" cy="579120"/>
           </a:xfrm>
-          <a:prstGeom prst="rect"/>
+          <a:prstGeom prst="rect">
+            <a:avLst/>
+          </a:prstGeom>
           <a:solidFill>
             <a:srgbClr val="FF0000">
               <a:alpha val="24706"/>
@@ -12268,7 +12957,6 @@
             <a:defPPr/>
           </a:lstStyle>
           <a:p>
-            <a:pPr/>
             <a:endParaRPr lang="en-US"/>
           </a:p>
         </p:txBody>
@@ -12284,7 +12972,9 @@
             <a:off x="9601200" y="1601216"/>
             <a:ext cx="1752600" cy="579120"/>
           </a:xfrm>
-          <a:prstGeom prst="rect"/>
+          <a:prstGeom prst="rect">
+            <a:avLst/>
+          </a:prstGeom>
           <a:solidFill>
             <a:srgbClr val="FF0000">
               <a:alpha val="24706"/>
@@ -12316,7 +13006,6 @@
             <a:defPPr/>
           </a:lstStyle>
           <a:p>
-            <a:pPr/>
             <a:endParaRPr lang="en-US"/>
           </a:p>
         </p:txBody>
@@ -12332,7 +13021,9 @@
             <a:off x="838200" y="2180336"/>
             <a:ext cx="1752600" cy="579120"/>
           </a:xfrm>
-          <a:prstGeom prst="rect"/>
+          <a:prstGeom prst="rect">
+            <a:avLst/>
+          </a:prstGeom>
           <a:solidFill>
             <a:srgbClr val="FFFFFF"/>
           </a:solidFill>
@@ -12362,7 +13053,6 @@
             <a:defPPr/>
           </a:lstStyle>
           <a:p>
-            <a:pPr/>
             <a:endParaRPr lang="en-US"/>
           </a:p>
         </p:txBody>
@@ -12378,7 +13068,9 @@
             <a:off x="2590800" y="2180336"/>
             <a:ext cx="1752600" cy="579120"/>
           </a:xfrm>
-          <a:prstGeom prst="rect"/>
+          <a:prstGeom prst="rect">
+            <a:avLst/>
+          </a:prstGeom>
           <a:solidFill>
             <a:srgbClr val="FFFFFF"/>
           </a:solidFill>
@@ -12408,7 +13100,6 @@
             <a:defPPr/>
           </a:lstStyle>
           <a:p>
-            <a:pPr/>
             <a:endParaRPr lang="en-US"/>
           </a:p>
         </p:txBody>
@@ -12424,7 +13115,9 @@
             <a:off x="4343400" y="2180336"/>
             <a:ext cx="1752600" cy="579120"/>
           </a:xfrm>
-          <a:prstGeom prst="rect"/>
+          <a:prstGeom prst="rect">
+            <a:avLst/>
+          </a:prstGeom>
           <a:solidFill>
             <a:srgbClr val="FFFFFF"/>
           </a:solidFill>
@@ -12454,7 +13147,6 @@
             <a:defPPr/>
           </a:lstStyle>
           <a:p>
-            <a:pPr/>
             <a:endParaRPr lang="en-US"/>
           </a:p>
         </p:txBody>
@@ -12470,7 +13162,9 @@
             <a:off x="6096000" y="2180336"/>
             <a:ext cx="1752600" cy="579120"/>
           </a:xfrm>
-          <a:prstGeom prst="rect"/>
+          <a:prstGeom prst="rect">
+            <a:avLst/>
+          </a:prstGeom>
           <a:solidFill>
             <a:srgbClr val="FFFFFF"/>
           </a:solidFill>
@@ -12500,7 +13194,6 @@
             <a:defPPr/>
           </a:lstStyle>
           <a:p>
-            <a:pPr/>
             <a:endParaRPr lang="en-US"/>
           </a:p>
         </p:txBody>
@@ -12516,7 +13209,9 @@
             <a:off x="7848600" y="2180336"/>
             <a:ext cx="1752600" cy="579120"/>
           </a:xfrm>
-          <a:prstGeom prst="rect"/>
+          <a:prstGeom prst="rect">
+            <a:avLst/>
+          </a:prstGeom>
           <a:solidFill>
             <a:srgbClr val="FFFFFF"/>
           </a:solidFill>
@@ -12546,7 +13241,6 @@
             <a:defPPr/>
           </a:lstStyle>
           <a:p>
-            <a:pPr/>
             <a:endParaRPr lang="en-US"/>
           </a:p>
         </p:txBody>
@@ -12562,7 +13256,9 @@
             <a:off x="9601200" y="2180336"/>
             <a:ext cx="1752600" cy="579120"/>
           </a:xfrm>
-          <a:prstGeom prst="rect"/>
+          <a:prstGeom prst="rect">
+            <a:avLst/>
+          </a:prstGeom>
           <a:solidFill>
             <a:srgbClr val="FFFFFF"/>
           </a:solidFill>
@@ -12592,7 +13288,6 @@
             <a:defPPr/>
           </a:lstStyle>
           <a:p>
-            <a:pPr/>
             <a:endParaRPr lang="en-US"/>
           </a:p>
         </p:txBody>
@@ -12608,7 +13303,9 @@
             <a:off x="838200" y="2759456"/>
             <a:ext cx="1752600" cy="579120"/>
           </a:xfrm>
-          <a:prstGeom prst="rect"/>
+          <a:prstGeom prst="rect">
+            <a:avLst/>
+          </a:prstGeom>
           <a:solidFill>
             <a:srgbClr val="00AF50"/>
           </a:solidFill>
@@ -12638,7 +13335,6 @@
             <a:defPPr/>
           </a:lstStyle>
           <a:p>
-            <a:pPr/>
             <a:endParaRPr lang="en-US"/>
           </a:p>
         </p:txBody>
@@ -12654,7 +13350,9 @@
             <a:off x="2590800" y="2759456"/>
             <a:ext cx="1752600" cy="579120"/>
           </a:xfrm>
-          <a:prstGeom prst="rect"/>
+          <a:prstGeom prst="rect">
+            <a:avLst/>
+          </a:prstGeom>
           <a:solidFill>
             <a:srgbClr val="FFFFFF">
               <a:alpha val="24706"/>
@@ -12686,7 +13384,6 @@
             <a:defPPr/>
           </a:lstStyle>
           <a:p>
-            <a:pPr/>
             <a:endParaRPr lang="en-US"/>
           </a:p>
         </p:txBody>
@@ -12702,7 +13399,9 @@
             <a:off x="4343400" y="2759456"/>
             <a:ext cx="1752600" cy="579120"/>
           </a:xfrm>
-          <a:prstGeom prst="rect"/>
+          <a:prstGeom prst="rect">
+            <a:avLst/>
+          </a:prstGeom>
           <a:solidFill>
             <a:srgbClr val="FFFFFF">
               <a:alpha val="24706"/>
@@ -12734,7 +13433,6 @@
             <a:defPPr/>
           </a:lstStyle>
           <a:p>
-            <a:pPr/>
             <a:endParaRPr lang="en-US"/>
           </a:p>
         </p:txBody>
@@ -12750,7 +13448,9 @@
             <a:off x="6096000" y="2759456"/>
             <a:ext cx="1752600" cy="579120"/>
           </a:xfrm>
-          <a:prstGeom prst="rect"/>
+          <a:prstGeom prst="rect">
+            <a:avLst/>
+          </a:prstGeom>
           <a:solidFill>
             <a:srgbClr val="FFFFFF">
               <a:alpha val="24706"/>
@@ -12782,7 +13482,6 @@
             <a:defPPr/>
           </a:lstStyle>
           <a:p>
-            <a:pPr/>
             <a:endParaRPr lang="en-US"/>
           </a:p>
         </p:txBody>
@@ -12798,7 +13497,9 @@
             <a:off x="7848600" y="2759456"/>
             <a:ext cx="1752600" cy="579120"/>
           </a:xfrm>
-          <a:prstGeom prst="rect"/>
+          <a:prstGeom prst="rect">
+            <a:avLst/>
+          </a:prstGeom>
           <a:solidFill>
             <a:srgbClr val="FFFFFF">
               <a:alpha val="24706"/>
@@ -12830,7 +13531,6 @@
             <a:defPPr/>
           </a:lstStyle>
           <a:p>
-            <a:pPr/>
             <a:endParaRPr lang="en-US"/>
           </a:p>
         </p:txBody>
@@ -12846,7 +13546,9 @@
             <a:off x="9601200" y="2759456"/>
             <a:ext cx="1752600" cy="579120"/>
           </a:xfrm>
-          <a:prstGeom prst="rect"/>
+          <a:prstGeom prst="rect">
+            <a:avLst/>
+          </a:prstGeom>
           <a:solidFill>
             <a:srgbClr val="FFFFFF">
               <a:alpha val="24706"/>
@@ -12878,7 +13580,6 @@
             <a:defPPr/>
           </a:lstStyle>
           <a:p>
-            <a:pPr/>
             <a:endParaRPr lang="en-US"/>
           </a:p>
         </p:txBody>
@@ -12894,7 +13595,9 @@
             <a:off x="2590800" y="1594866"/>
             <a:ext cx="0" cy="1750060"/>
           </a:xfrm>
-          <a:prstGeom prst="line"/>
+          <a:prstGeom prst="line">
+            <a:avLst/>
+          </a:prstGeom>
           <a:ln w="12700">
             <a:solidFill>
               <a:srgbClr val="FFFFFF"/>
@@ -12921,7 +13624,6 @@
             <a:defPPr/>
           </a:lstStyle>
           <a:p>
-            <a:pPr/>
             <a:endParaRPr lang="en-US"/>
           </a:p>
         </p:txBody>
@@ -12937,7 +13639,9 @@
             <a:off x="4343400" y="1594866"/>
             <a:ext cx="0" cy="1750060"/>
           </a:xfrm>
-          <a:prstGeom prst="line"/>
+          <a:prstGeom prst="line">
+            <a:avLst/>
+          </a:prstGeom>
           <a:ln w="12700">
             <a:solidFill>
               <a:srgbClr val="FFFFFF"/>
@@ -12964,7 +13668,6 @@
             <a:defPPr/>
           </a:lstStyle>
           <a:p>
-            <a:pPr/>
             <a:endParaRPr lang="en-US"/>
           </a:p>
         </p:txBody>
@@ -12980,7 +13683,9 @@
             <a:off x="6096000" y="1594866"/>
             <a:ext cx="0" cy="1750060"/>
           </a:xfrm>
-          <a:prstGeom prst="line"/>
+          <a:prstGeom prst="line">
+            <a:avLst/>
+          </a:prstGeom>
           <a:ln w="12700">
             <a:solidFill>
               <a:srgbClr val="FFFFFF"/>
@@ -13007,7 +13712,6 @@
             <a:defPPr/>
           </a:lstStyle>
           <a:p>
-            <a:pPr/>
             <a:endParaRPr lang="en-US"/>
           </a:p>
         </p:txBody>
@@ -13023,7 +13727,9 @@
             <a:off x="7848600" y="1594866"/>
             <a:ext cx="0" cy="1750060"/>
           </a:xfrm>
-          <a:prstGeom prst="line"/>
+          <a:prstGeom prst="line">
+            <a:avLst/>
+          </a:prstGeom>
           <a:ln w="12700">
             <a:solidFill>
               <a:srgbClr val="FFFFFF"/>
@@ -13050,7 +13756,6 @@
             <a:defPPr/>
           </a:lstStyle>
           <a:p>
-            <a:pPr/>
             <a:endParaRPr lang="en-US"/>
           </a:p>
         </p:txBody>
@@ -13066,7 +13771,9 @@
             <a:off x="9601200" y="1594866"/>
             <a:ext cx="0" cy="1750060"/>
           </a:xfrm>
-          <a:prstGeom prst="line"/>
+          <a:prstGeom prst="line">
+            <a:avLst/>
+          </a:prstGeom>
           <a:ln w="12700">
             <a:solidFill>
               <a:srgbClr val="FFFFFF"/>
@@ -13093,7 +13800,6 @@
             <a:defPPr/>
           </a:lstStyle>
           <a:p>
-            <a:pPr/>
             <a:endParaRPr lang="en-US"/>
           </a:p>
         </p:txBody>
@@ -13109,7 +13815,9 @@
             <a:off x="831850" y="2180336"/>
             <a:ext cx="10528300" cy="0"/>
           </a:xfrm>
-          <a:prstGeom prst="line"/>
+          <a:prstGeom prst="line">
+            <a:avLst/>
+          </a:prstGeom>
           <a:ln w="38100">
             <a:solidFill>
               <a:srgbClr val="FFFFFF"/>
@@ -13136,7 +13844,6 @@
             <a:defPPr/>
           </a:lstStyle>
           <a:p>
-            <a:pPr/>
             <a:endParaRPr lang="en-US"/>
           </a:p>
         </p:txBody>
@@ -13152,7 +13859,9 @@
             <a:off x="831850" y="2759456"/>
             <a:ext cx="10528300" cy="0"/>
           </a:xfrm>
-          <a:prstGeom prst="line"/>
+          <a:prstGeom prst="line">
+            <a:avLst/>
+          </a:prstGeom>
           <a:ln w="12700">
             <a:solidFill>
               <a:srgbClr val="FFFFFF"/>
@@ -13179,7 +13888,6 @@
             <a:defPPr/>
           </a:lstStyle>
           <a:p>
-            <a:pPr/>
             <a:endParaRPr lang="en-US"/>
           </a:p>
         </p:txBody>
@@ -13195,7 +13903,9 @@
             <a:off x="838200" y="1594866"/>
             <a:ext cx="0" cy="1750060"/>
           </a:xfrm>
-          <a:prstGeom prst="line"/>
+          <a:prstGeom prst="line">
+            <a:avLst/>
+          </a:prstGeom>
           <a:ln w="12700">
             <a:solidFill>
               <a:srgbClr val="FFFFFF"/>
@@ -13222,7 +13932,6 @@
             <a:defPPr/>
           </a:lstStyle>
           <a:p>
-            <a:pPr/>
             <a:endParaRPr lang="en-US"/>
           </a:p>
         </p:txBody>
@@ -13238,7 +13947,9 @@
             <a:off x="11353800" y="1594866"/>
             <a:ext cx="0" cy="1750060"/>
           </a:xfrm>
-          <a:prstGeom prst="line"/>
+          <a:prstGeom prst="line">
+            <a:avLst/>
+          </a:prstGeom>
           <a:ln w="12700">
             <a:solidFill>
               <a:srgbClr val="FFFFFF"/>
@@ -13265,7 +13976,6 @@
             <a:defPPr/>
           </a:lstStyle>
           <a:p>
-            <a:pPr/>
             <a:endParaRPr lang="en-US"/>
           </a:p>
         </p:txBody>
@@ -13281,7 +13991,9 @@
             <a:off x="831850" y="1601216"/>
             <a:ext cx="10528300" cy="0"/>
           </a:xfrm>
-          <a:prstGeom prst="line"/>
+          <a:prstGeom prst="line">
+            <a:avLst/>
+          </a:prstGeom>
           <a:ln w="12700">
             <a:solidFill>
               <a:srgbClr val="FFFFFF"/>
@@ -13308,7 +14020,6 @@
             <a:defPPr/>
           </a:lstStyle>
           <a:p>
-            <a:pPr/>
             <a:endParaRPr lang="en-US"/>
           </a:p>
         </p:txBody>
@@ -13324,7 +14035,9 @@
             <a:off x="831850" y="3338576"/>
             <a:ext cx="10528300" cy="0"/>
           </a:xfrm>
-          <a:prstGeom prst="line"/>
+          <a:prstGeom prst="line">
+            <a:avLst/>
+          </a:prstGeom>
           <a:ln w="12700">
             <a:solidFill>
               <a:srgbClr val="FFFFFF"/>
@@ -13351,7 +14064,6 @@
             <a:defPPr/>
           </a:lstStyle>
           <a:p>
-            <a:pPr/>
             <a:endParaRPr lang="en-US"/>
           </a:p>
         </p:txBody>
@@ -13367,7 +14079,9 @@
             <a:off x="281940" y="5212715"/>
             <a:ext cx="2532888" cy="25908"/>
           </a:xfrm>
-          <a:prstGeom prst="rect"/>
+          <a:prstGeom prst="rect">
+            <a:avLst/>
+          </a:prstGeom>
           <a:solidFill>
             <a:srgbClr val="000000"/>
           </a:solidFill>
@@ -13397,7 +14111,6 @@
             <a:defPPr/>
           </a:lstStyle>
           <a:p>
-            <a:pPr/>
             <a:endParaRPr lang="en-US"/>
           </a:p>
         </p:txBody>
@@ -13413,7 +14126,9 @@
             <a:off x="929640" y="703804"/>
             <a:ext cx="2528368" cy="683121"/>
           </a:xfrm>
-          <a:prstGeom prst="rect"/>
+          <a:prstGeom prst="rect">
+            <a:avLst/>
+          </a:prstGeom>
           <a:noFill/>
         </p:spPr>
         <p:style>
@@ -13440,9 +14155,8 @@
             <a:defPPr/>
           </a:lstStyle>
           <a:p>
-            <a:pPr/>
-            <a:r>
-              <a:rPr lang="en-US" sz="4406" dirty="1">
+            <a:r>
+              <a:rPr lang="en-US" sz="4406">
                 <a:solidFill>
                   <a:srgbClr val="00AFEF"/>
                 </a:solidFill>
@@ -13464,7 +14178,9 @@
             <a:off x="3364738" y="1680744"/>
             <a:ext cx="206236" cy="496714"/>
           </a:xfrm>
-          <a:prstGeom prst="rect"/>
+          <a:prstGeom prst="rect">
+            <a:avLst/>
+          </a:prstGeom>
           <a:noFill/>
         </p:spPr>
         <p:style>
@@ -13491,9 +14207,8 @@
             <a:defPPr/>
           </a:lstStyle>
           <a:p>
-            <a:pPr/>
-            <a:r>
-              <a:rPr lang="en-US" sz="3204" b="1" dirty="1">
+            <a:r>
+              <a:rPr lang="en-US" sz="3204" b="1">
                 <a:solidFill>
                   <a:srgbClr val="FFFFFF"/>
                 </a:solidFill>
@@ -13515,7 +14230,9 @@
             <a:off x="5117338" y="1680744"/>
             <a:ext cx="206236" cy="496714"/>
           </a:xfrm>
-          <a:prstGeom prst="rect"/>
+          <a:prstGeom prst="rect">
+            <a:avLst/>
+          </a:prstGeom>
           <a:noFill/>
         </p:spPr>
         <p:style>
@@ -13542,9 +14259,8 @@
             <a:defPPr/>
           </a:lstStyle>
           <a:p>
-            <a:pPr/>
-            <a:r>
-              <a:rPr lang="en-US" sz="3204" b="1" dirty="1">
+            <a:r>
+              <a:rPr lang="en-US" sz="3204" b="1">
                 <a:solidFill>
                   <a:srgbClr val="FFFFFF"/>
                 </a:solidFill>
@@ -13566,7 +14282,9 @@
             <a:off x="6870192" y="1680744"/>
             <a:ext cx="206236" cy="496714"/>
           </a:xfrm>
-          <a:prstGeom prst="rect"/>
+          <a:prstGeom prst="rect">
+            <a:avLst/>
+          </a:prstGeom>
           <a:noFill/>
         </p:spPr>
         <p:style>
@@ -13593,9 +14311,8 @@
             <a:defPPr/>
           </a:lstStyle>
           <a:p>
-            <a:pPr/>
-            <a:r>
-              <a:rPr lang="en-US" sz="3204" b="1" dirty="1">
+            <a:r>
+              <a:rPr lang="en-US" sz="3204" b="1">
                 <a:solidFill>
                   <a:srgbClr val="FFFFFF"/>
                 </a:solidFill>
@@ -13617,7 +14334,9 @@
             <a:off x="8623046" y="1680744"/>
             <a:ext cx="206236" cy="496714"/>
           </a:xfrm>
-          <a:prstGeom prst="rect"/>
+          <a:prstGeom prst="rect">
+            <a:avLst/>
+          </a:prstGeom>
           <a:noFill/>
         </p:spPr>
         <p:style>
@@ -13644,9 +14363,8 @@
             <a:defPPr/>
           </a:lstStyle>
           <a:p>
-            <a:pPr/>
-            <a:r>
-              <a:rPr lang="en-US" sz="3204" b="1" dirty="1">
+            <a:r>
+              <a:rPr lang="en-US" sz="3204" b="1">
                 <a:solidFill>
                   <a:srgbClr val="FFFFFF"/>
                 </a:solidFill>
@@ -13668,7 +14386,9 @@
             <a:off x="10376027" y="1680744"/>
             <a:ext cx="206236" cy="496714"/>
           </a:xfrm>
-          <a:prstGeom prst="rect"/>
+          <a:prstGeom prst="rect">
+            <a:avLst/>
+          </a:prstGeom>
           <a:noFill/>
         </p:spPr>
         <p:style>
@@ -13695,9 +14415,8 @@
             <a:defPPr/>
           </a:lstStyle>
           <a:p>
-            <a:pPr/>
-            <a:r>
-              <a:rPr lang="en-US" sz="3204" b="1" dirty="1">
+            <a:r>
+              <a:rPr lang="en-US" sz="3204" b="1">
                 <a:solidFill>
                   <a:srgbClr val="FFFFFF"/>
                 </a:solidFill>
@@ -13719,7 +14438,9 @@
             <a:off x="1611757" y="2839238"/>
             <a:ext cx="206236" cy="496714"/>
           </a:xfrm>
-          <a:prstGeom prst="rect"/>
+          <a:prstGeom prst="rect">
+            <a:avLst/>
+          </a:prstGeom>
           <a:noFill/>
         </p:spPr>
         <p:style>
@@ -13746,9 +14467,8 @@
             <a:defPPr/>
           </a:lstStyle>
           <a:p>
-            <a:pPr/>
-            <a:r>
-              <a:rPr lang="en-US" sz="3204" b="1" dirty="1">
+            <a:r>
+              <a:rPr lang="en-US" sz="3204" b="1">
                 <a:solidFill>
                   <a:srgbClr val="FFFFFF"/>
                 </a:solidFill>
@@ -13770,7 +14490,9 @@
             <a:off x="281940" y="4820438"/>
             <a:ext cx="2535824" cy="496714"/>
           </a:xfrm>
-          <a:prstGeom prst="rect"/>
+          <a:prstGeom prst="rect">
+            <a:avLst/>
+          </a:prstGeom>
           <a:noFill/>
         </p:spPr>
         <p:style>
@@ -13797,9 +14519,8 @@
             <a:defPPr/>
           </a:lstStyle>
           <a:p>
-            <a:pPr/>
-            <a:r>
-              <a:rPr lang="en-US" sz="3204" dirty="1">
+            <a:r>
+              <a:rPr lang="en-US" sz="3204">
                 <a:solidFill>
                   <a:srgbClr val="000000"/>
                 </a:solidFill>
@@ -13821,7 +14542,9 @@
             <a:off x="739140" y="5303417"/>
             <a:ext cx="5737715" cy="433834"/>
           </a:xfrm>
-          <a:prstGeom prst="rect"/>
+          <a:prstGeom prst="rect">
+            <a:avLst/>
+          </a:prstGeom>
           <a:noFill/>
         </p:spPr>
         <p:style>
@@ -13848,9 +14571,8 @@
             <a:defPPr/>
           </a:lstStyle>
           <a:p>
-            <a:pPr/>
-            <a:r>
-              <a:rPr lang="en-US" sz="2798" dirty="1">
+            <a:r>
+              <a:rPr lang="en-US" sz="2798">
                 <a:solidFill>
                   <a:srgbClr val="000000"/>
                 </a:solidFill>
@@ -13872,7 +14594,9 @@
             <a:off x="6467221" y="5303417"/>
             <a:ext cx="182557" cy="433834"/>
           </a:xfrm>
-          <a:prstGeom prst="rect"/>
+          <a:prstGeom prst="rect">
+            <a:avLst/>
+          </a:prstGeom>
           <a:noFill/>
         </p:spPr>
         <p:style>
@@ -13899,9 +14623,8 @@
             <a:defPPr/>
           </a:lstStyle>
           <a:p>
-            <a:pPr/>
-            <a:r>
-              <a:rPr lang="en-US" sz="2798" i="1" dirty="1">
+            <a:r>
+              <a:rPr lang="en-US" sz="2798" i="1">
                 <a:solidFill>
                   <a:srgbClr val="000000"/>
                 </a:solidFill>
@@ -13923,7 +14646,9 @@
             <a:off x="6730873" y="5303417"/>
             <a:ext cx="544722" cy="433834"/>
           </a:xfrm>
-          <a:prstGeom prst="rect"/>
+          <a:prstGeom prst="rect">
+            <a:avLst/>
+          </a:prstGeom>
           <a:noFill/>
         </p:spPr>
         <p:style>
@@ -13950,9 +14675,8 @@
             <a:defPPr/>
           </a:lstStyle>
           <a:p>
-            <a:pPr/>
-            <a:r>
-              <a:rPr lang="en-US" sz="2798" dirty="1">
+            <a:r>
+              <a:rPr lang="en-US" sz="2798">
                 <a:solidFill>
                   <a:srgbClr val="000000"/>
                 </a:solidFill>
@@ -13974,7 +14698,9 @@
             <a:off x="739140" y="5730702"/>
             <a:ext cx="5925251" cy="433462"/>
           </a:xfrm>
-          <a:prstGeom prst="rect"/>
+          <a:prstGeom prst="rect">
+            <a:avLst/>
+          </a:prstGeom>
           <a:noFill/>
         </p:spPr>
         <p:style>
@@ -14001,9 +14727,8 @@
             <a:defPPr/>
           </a:lstStyle>
           <a:p>
-            <a:pPr/>
-            <a:r>
-              <a:rPr lang="en-US" sz="2796" dirty="1">
+            <a:r>
+              <a:rPr lang="en-US" sz="2796">
                 <a:solidFill>
                   <a:srgbClr val="000000"/>
                 </a:solidFill>
@@ -14025,7 +14750,9 @@
             <a:off x="6660769" y="5730702"/>
             <a:ext cx="182401" cy="433462"/>
           </a:xfrm>
-          <a:prstGeom prst="rect"/>
+          <a:prstGeom prst="rect">
+            <a:avLst/>
+          </a:prstGeom>
           <a:noFill/>
         </p:spPr>
         <p:style>
@@ -14052,9 +14779,8 @@
             <a:defPPr/>
           </a:lstStyle>
           <a:p>
-            <a:pPr/>
-            <a:r>
-              <a:rPr lang="en-US" sz="2796" i="1" dirty="1">
+            <a:r>
+              <a:rPr lang="en-US" sz="2796" i="1">
                 <a:solidFill>
                   <a:srgbClr val="000000"/>
                 </a:solidFill>
@@ -14076,7 +14802,9 @@
             <a:off x="6922897" y="5730702"/>
             <a:ext cx="544255" cy="433462"/>
           </a:xfrm>
-          <a:prstGeom prst="rect"/>
+          <a:prstGeom prst="rect">
+            <a:avLst/>
+          </a:prstGeom>
           <a:noFill/>
         </p:spPr>
         <p:style>
@@ -14103,9 +14831,8 @@
             <a:defPPr/>
           </a:lstStyle>
           <a:p>
-            <a:pPr/>
-            <a:r>
-              <a:rPr lang="en-US" sz="2796" dirty="1">
+            <a:r>
+              <a:rPr lang="en-US" sz="2796">
                 <a:solidFill>
                   <a:srgbClr val="000000"/>
                 </a:solidFill>
@@ -14127,7 +14854,9 @@
             <a:off x="739140" y="6157422"/>
             <a:ext cx="4479568" cy="433462"/>
           </a:xfrm>
-          <a:prstGeom prst="rect"/>
+          <a:prstGeom prst="rect">
+            <a:avLst/>
+          </a:prstGeom>
           <a:noFill/>
         </p:spPr>
         <p:style>
@@ -14154,9 +14883,8 @@
             <a:defPPr/>
           </a:lstStyle>
           <a:p>
-            <a:pPr/>
-            <a:r>
-              <a:rPr lang="en-US" sz="2796" dirty="1">
+            <a:r>
+              <a:rPr lang="en-US" sz="2796">
                 <a:solidFill>
                   <a:srgbClr val="000000"/>
                 </a:solidFill>
@@ -14169,12 +14897,15 @@
       </p:sp>
     </p:spTree>
   </p:cSld>
+  <p:clrMapOvr>
+    <a:masterClrMapping/>
+  </p:clrMapOvr>
 </p:sld>
 </file>
 
 <file path=ppt/slides/slide8.xml><?xml version="1.0" encoding="utf-8"?>
 <p:sld xmlns:a="http://schemas.openxmlformats.org/drawingml/2006/main" xmlns:r="http://schemas.openxmlformats.org/officeDocument/2006/relationships" xmlns:p="http://schemas.openxmlformats.org/presentationml/2006/main">
-  <p:cSld name="">
+  <p:cSld>
     <p:spTree>
       <p:nvGrpSpPr>
         <p:cNvPr id="1" name=""/>
@@ -14200,7 +14931,9 @@
             <a:off x="0" y="-1"/>
             <a:ext cx="12192000" cy="6857999"/>
           </a:xfrm>
-          <a:prstGeom prst="rect"/>
+          <a:prstGeom prst="rect">
+            <a:avLst/>
+          </a:prstGeom>
           <a:solidFill>
             <a:srgbClr val="FFFFFF"/>
           </a:solidFill>
@@ -14230,7 +14963,6 @@
             <a:defPPr/>
           </a:lstStyle>
           <a:p>
-            <a:pPr/>
             <a:endParaRPr lang="en-US"/>
           </a:p>
         </p:txBody>
@@ -14246,7 +14978,9 @@
             <a:off x="838200" y="1601216"/>
             <a:ext cx="1752600" cy="579120"/>
           </a:xfrm>
-          <a:prstGeom prst="rect"/>
+          <a:prstGeom prst="rect">
+            <a:avLst/>
+          </a:prstGeom>
           <a:solidFill>
             <a:srgbClr val="7E7E7E"/>
           </a:solidFill>
@@ -14276,7 +15010,6 @@
             <a:defPPr/>
           </a:lstStyle>
           <a:p>
-            <a:pPr/>
             <a:endParaRPr lang="en-US"/>
           </a:p>
         </p:txBody>
@@ -14292,7 +15025,9 @@
             <a:off x="2590800" y="1601216"/>
             <a:ext cx="1752600" cy="579120"/>
           </a:xfrm>
-          <a:prstGeom prst="rect"/>
+          <a:prstGeom prst="rect">
+            <a:avLst/>
+          </a:prstGeom>
           <a:solidFill>
             <a:srgbClr val="FFC000"/>
           </a:solidFill>
@@ -14322,7 +15057,6 @@
             <a:defPPr/>
           </a:lstStyle>
           <a:p>
-            <a:pPr/>
             <a:endParaRPr lang="en-US"/>
           </a:p>
         </p:txBody>
@@ -14338,7 +15072,9 @@
             <a:off x="4343400" y="1601216"/>
             <a:ext cx="1752600" cy="579120"/>
           </a:xfrm>
-          <a:prstGeom prst="rect"/>
+          <a:prstGeom prst="rect">
+            <a:avLst/>
+          </a:prstGeom>
           <a:solidFill>
             <a:srgbClr val="FFC000"/>
           </a:solidFill>
@@ -14368,7 +15104,6 @@
             <a:defPPr/>
           </a:lstStyle>
           <a:p>
-            <a:pPr/>
             <a:endParaRPr lang="en-US"/>
           </a:p>
         </p:txBody>
@@ -14384,7 +15119,9 @@
             <a:off x="6096000" y="1601216"/>
             <a:ext cx="1752600" cy="579120"/>
           </a:xfrm>
-          <a:prstGeom prst="rect"/>
+          <a:prstGeom prst="rect">
+            <a:avLst/>
+          </a:prstGeom>
           <a:solidFill>
             <a:srgbClr val="FF0000">
               <a:alpha val="24706"/>
@@ -14416,7 +15153,6 @@
             <a:defPPr/>
           </a:lstStyle>
           <a:p>
-            <a:pPr/>
             <a:endParaRPr lang="en-US"/>
           </a:p>
         </p:txBody>
@@ -14432,7 +15168,9 @@
             <a:off x="7848600" y="1601216"/>
             <a:ext cx="1752600" cy="579120"/>
           </a:xfrm>
-          <a:prstGeom prst="rect"/>
+          <a:prstGeom prst="rect">
+            <a:avLst/>
+          </a:prstGeom>
           <a:solidFill>
             <a:srgbClr val="FF0000">
               <a:alpha val="24706"/>
@@ -14464,7 +15202,6 @@
             <a:defPPr/>
           </a:lstStyle>
           <a:p>
-            <a:pPr/>
             <a:endParaRPr lang="en-US"/>
           </a:p>
         </p:txBody>
@@ -14480,7 +15217,9 @@
             <a:off x="9601200" y="1601216"/>
             <a:ext cx="1752600" cy="579120"/>
           </a:xfrm>
-          <a:prstGeom prst="rect"/>
+          <a:prstGeom prst="rect">
+            <a:avLst/>
+          </a:prstGeom>
           <a:solidFill>
             <a:srgbClr val="FF0000">
               <a:alpha val="24706"/>
@@ -14512,7 +15251,6 @@
             <a:defPPr/>
           </a:lstStyle>
           <a:p>
-            <a:pPr/>
             <a:endParaRPr lang="en-US"/>
           </a:p>
         </p:txBody>
@@ -14528,7 +15266,9 @@
             <a:off x="838200" y="2180336"/>
             <a:ext cx="1752600" cy="579120"/>
           </a:xfrm>
-          <a:prstGeom prst="rect"/>
+          <a:prstGeom prst="rect">
+            <a:avLst/>
+          </a:prstGeom>
           <a:solidFill>
             <a:srgbClr val="FFFFFF"/>
           </a:solidFill>
@@ -14558,7 +15298,6 @@
             <a:defPPr/>
           </a:lstStyle>
           <a:p>
-            <a:pPr/>
             <a:endParaRPr lang="en-US"/>
           </a:p>
         </p:txBody>
@@ -14574,7 +15313,9 @@
             <a:off x="2590800" y="2180336"/>
             <a:ext cx="1752600" cy="579120"/>
           </a:xfrm>
-          <a:prstGeom prst="rect"/>
+          <a:prstGeom prst="rect">
+            <a:avLst/>
+          </a:prstGeom>
           <a:solidFill>
             <a:srgbClr val="FFFFFF"/>
           </a:solidFill>
@@ -14604,7 +15345,6 @@
             <a:defPPr/>
           </a:lstStyle>
           <a:p>
-            <a:pPr/>
             <a:endParaRPr lang="en-US"/>
           </a:p>
         </p:txBody>
@@ -14620,7 +15360,9 @@
             <a:off x="4343400" y="2180336"/>
             <a:ext cx="1752600" cy="579120"/>
           </a:xfrm>
-          <a:prstGeom prst="rect"/>
+          <a:prstGeom prst="rect">
+            <a:avLst/>
+          </a:prstGeom>
           <a:solidFill>
             <a:srgbClr val="FFFFFF"/>
           </a:solidFill>
@@ -14650,7 +15392,6 @@
             <a:defPPr/>
           </a:lstStyle>
           <a:p>
-            <a:pPr/>
             <a:endParaRPr lang="en-US"/>
           </a:p>
         </p:txBody>
@@ -14666,7 +15407,9 @@
             <a:off x="6096000" y="2180336"/>
             <a:ext cx="1752600" cy="579120"/>
           </a:xfrm>
-          <a:prstGeom prst="rect"/>
+          <a:prstGeom prst="rect">
+            <a:avLst/>
+          </a:prstGeom>
           <a:solidFill>
             <a:srgbClr val="FFFFFF"/>
           </a:solidFill>
@@ -14696,7 +15439,6 @@
             <a:defPPr/>
           </a:lstStyle>
           <a:p>
-            <a:pPr/>
             <a:endParaRPr lang="en-US"/>
           </a:p>
         </p:txBody>
@@ -14712,7 +15454,9 @@
             <a:off x="7848600" y="2180336"/>
             <a:ext cx="1752600" cy="579120"/>
           </a:xfrm>
-          <a:prstGeom prst="rect"/>
+          <a:prstGeom prst="rect">
+            <a:avLst/>
+          </a:prstGeom>
           <a:solidFill>
             <a:srgbClr val="FFFFFF"/>
           </a:solidFill>
@@ -14742,7 +15486,6 @@
             <a:defPPr/>
           </a:lstStyle>
           <a:p>
-            <a:pPr/>
             <a:endParaRPr lang="en-US"/>
           </a:p>
         </p:txBody>
@@ -14758,7 +15501,9 @@
             <a:off x="9601200" y="2180336"/>
             <a:ext cx="1752600" cy="579120"/>
           </a:xfrm>
-          <a:prstGeom prst="rect"/>
+          <a:prstGeom prst="rect">
+            <a:avLst/>
+          </a:prstGeom>
           <a:solidFill>
             <a:srgbClr val="FFFFFF"/>
           </a:solidFill>
@@ -14788,7 +15533,6 @@
             <a:defPPr/>
           </a:lstStyle>
           <a:p>
-            <a:pPr/>
             <a:endParaRPr lang="en-US"/>
           </a:p>
         </p:txBody>
@@ -14804,7 +15548,9 @@
             <a:off x="838200" y="2759456"/>
             <a:ext cx="1752600" cy="579120"/>
           </a:xfrm>
-          <a:prstGeom prst="rect"/>
+          <a:prstGeom prst="rect">
+            <a:avLst/>
+          </a:prstGeom>
           <a:solidFill>
             <a:srgbClr val="00AF50">
               <a:alpha val="24706"/>
@@ -14836,7 +15582,6 @@
             <a:defPPr/>
           </a:lstStyle>
           <a:p>
-            <a:pPr/>
             <a:endParaRPr lang="en-US"/>
           </a:p>
         </p:txBody>
@@ -14852,7 +15597,9 @@
             <a:off x="2590800" y="2759456"/>
             <a:ext cx="1752600" cy="579120"/>
           </a:xfrm>
-          <a:prstGeom prst="rect"/>
+          <a:prstGeom prst="rect">
+            <a:avLst/>
+          </a:prstGeom>
           <a:solidFill>
             <a:srgbClr val="FFFFFF">
               <a:alpha val="24706"/>
@@ -14884,7 +15631,6 @@
             <a:defPPr/>
           </a:lstStyle>
           <a:p>
-            <a:pPr/>
             <a:endParaRPr lang="en-US"/>
           </a:p>
         </p:txBody>
@@ -14900,7 +15646,9 @@
             <a:off x="4343400" y="2759456"/>
             <a:ext cx="1752600" cy="579120"/>
           </a:xfrm>
-          <a:prstGeom prst="rect"/>
+          <a:prstGeom prst="rect">
+            <a:avLst/>
+          </a:prstGeom>
           <a:solidFill>
             <a:srgbClr val="FFFFFF">
               <a:alpha val="24706"/>
@@ -14932,7 +15680,6 @@
             <a:defPPr/>
           </a:lstStyle>
           <a:p>
-            <a:pPr/>
             <a:endParaRPr lang="en-US"/>
           </a:p>
         </p:txBody>
@@ -14948,7 +15695,9 @@
             <a:off x="6096000" y="2759456"/>
             <a:ext cx="1752600" cy="579120"/>
           </a:xfrm>
-          <a:prstGeom prst="rect"/>
+          <a:prstGeom prst="rect">
+            <a:avLst/>
+          </a:prstGeom>
           <a:solidFill>
             <a:srgbClr val="FFFFFF">
               <a:alpha val="24706"/>
@@ -14980,7 +15729,6 @@
             <a:defPPr/>
           </a:lstStyle>
           <a:p>
-            <a:pPr/>
             <a:endParaRPr lang="en-US"/>
           </a:p>
         </p:txBody>
@@ -14996,7 +15744,9 @@
             <a:off x="7848600" y="2759456"/>
             <a:ext cx="1752600" cy="579120"/>
           </a:xfrm>
-          <a:prstGeom prst="rect"/>
+          <a:prstGeom prst="rect">
+            <a:avLst/>
+          </a:prstGeom>
           <a:solidFill>
             <a:srgbClr val="FFFFFF">
               <a:alpha val="24706"/>
@@ -15028,7 +15778,6 @@
             <a:defPPr/>
           </a:lstStyle>
           <a:p>
-            <a:pPr/>
             <a:endParaRPr lang="en-US"/>
           </a:p>
         </p:txBody>
@@ -15044,7 +15793,9 @@
             <a:off x="9601200" y="2759456"/>
             <a:ext cx="1752600" cy="579120"/>
           </a:xfrm>
-          <a:prstGeom prst="rect"/>
+          <a:prstGeom prst="rect">
+            <a:avLst/>
+          </a:prstGeom>
           <a:solidFill>
             <a:srgbClr val="FFFFFF">
               <a:alpha val="24706"/>
@@ -15076,7 +15827,6 @@
             <a:defPPr/>
           </a:lstStyle>
           <a:p>
-            <a:pPr/>
             <a:endParaRPr lang="en-US"/>
           </a:p>
         </p:txBody>
@@ -15092,7 +15842,9 @@
             <a:off x="2590800" y="1594866"/>
             <a:ext cx="0" cy="1750060"/>
           </a:xfrm>
-          <a:prstGeom prst="line"/>
+          <a:prstGeom prst="line">
+            <a:avLst/>
+          </a:prstGeom>
           <a:ln w="12700">
             <a:solidFill>
               <a:srgbClr val="FFFFFF"/>
@@ -15119,7 +15871,6 @@
             <a:defPPr/>
           </a:lstStyle>
           <a:p>
-            <a:pPr/>
             <a:endParaRPr lang="en-US"/>
           </a:p>
         </p:txBody>
@@ -15135,7 +15886,9 @@
             <a:off x="4343400" y="1594866"/>
             <a:ext cx="0" cy="1750060"/>
           </a:xfrm>
-          <a:prstGeom prst="line"/>
+          <a:prstGeom prst="line">
+            <a:avLst/>
+          </a:prstGeom>
           <a:ln w="12700">
             <a:solidFill>
               <a:srgbClr val="FFFFFF"/>
@@ -15162,7 +15915,6 @@
             <a:defPPr/>
           </a:lstStyle>
           <a:p>
-            <a:pPr/>
             <a:endParaRPr lang="en-US"/>
           </a:p>
         </p:txBody>
@@ -15178,7 +15930,9 @@
             <a:off x="6096000" y="1594866"/>
             <a:ext cx="0" cy="1750060"/>
           </a:xfrm>
-          <a:prstGeom prst="line"/>
+          <a:prstGeom prst="line">
+            <a:avLst/>
+          </a:prstGeom>
           <a:ln w="12700">
             <a:solidFill>
               <a:srgbClr val="FFFFFF"/>
@@ -15205,7 +15959,6 @@
             <a:defPPr/>
           </a:lstStyle>
           <a:p>
-            <a:pPr/>
             <a:endParaRPr lang="en-US"/>
           </a:p>
         </p:txBody>
@@ -15221,7 +15974,9 @@
             <a:off x="7848600" y="1594866"/>
             <a:ext cx="0" cy="1750060"/>
           </a:xfrm>
-          <a:prstGeom prst="line"/>
+          <a:prstGeom prst="line">
+            <a:avLst/>
+          </a:prstGeom>
           <a:ln w="12700">
             <a:solidFill>
               <a:srgbClr val="FFFFFF"/>
@@ -15248,7 +16003,6 @@
             <a:defPPr/>
           </a:lstStyle>
           <a:p>
-            <a:pPr/>
             <a:endParaRPr lang="en-US"/>
           </a:p>
         </p:txBody>
@@ -15264,7 +16018,9 @@
             <a:off x="9601200" y="1594866"/>
             <a:ext cx="0" cy="1750060"/>
           </a:xfrm>
-          <a:prstGeom prst="line"/>
+          <a:prstGeom prst="line">
+            <a:avLst/>
+          </a:prstGeom>
           <a:ln w="12700">
             <a:solidFill>
               <a:srgbClr val="FFFFFF"/>
@@ -15291,7 +16047,6 @@
             <a:defPPr/>
           </a:lstStyle>
           <a:p>
-            <a:pPr/>
             <a:endParaRPr lang="en-US"/>
           </a:p>
         </p:txBody>
@@ -15307,7 +16062,9 @@
             <a:off x="831850" y="2180336"/>
             <a:ext cx="10528300" cy="0"/>
           </a:xfrm>
-          <a:prstGeom prst="line"/>
+          <a:prstGeom prst="line">
+            <a:avLst/>
+          </a:prstGeom>
           <a:ln w="38100">
             <a:solidFill>
               <a:srgbClr val="FFFFFF"/>
@@ -15334,7 +16091,6 @@
             <a:defPPr/>
           </a:lstStyle>
           <a:p>
-            <a:pPr/>
             <a:endParaRPr lang="en-US"/>
           </a:p>
         </p:txBody>
@@ -15350,7 +16106,9 @@
             <a:off x="831850" y="2759456"/>
             <a:ext cx="10528300" cy="0"/>
           </a:xfrm>
-          <a:prstGeom prst="line"/>
+          <a:prstGeom prst="line">
+            <a:avLst/>
+          </a:prstGeom>
           <a:ln w="12700">
             <a:solidFill>
               <a:srgbClr val="FFFFFF"/>
@@ -15377,7 +16135,6 @@
             <a:defPPr/>
           </a:lstStyle>
           <a:p>
-            <a:pPr/>
             <a:endParaRPr lang="en-US"/>
           </a:p>
         </p:txBody>
@@ -15393,7 +16150,9 @@
             <a:off x="838200" y="1594866"/>
             <a:ext cx="0" cy="1750060"/>
           </a:xfrm>
-          <a:prstGeom prst="line"/>
+          <a:prstGeom prst="line">
+            <a:avLst/>
+          </a:prstGeom>
           <a:ln w="12700">
             <a:solidFill>
               <a:srgbClr val="FFFFFF"/>
@@ -15420,7 +16179,6 @@
             <a:defPPr/>
           </a:lstStyle>
           <a:p>
-            <a:pPr/>
             <a:endParaRPr lang="en-US"/>
           </a:p>
         </p:txBody>
@@ -15436,7 +16194,9 @@
             <a:off x="11353800" y="1594866"/>
             <a:ext cx="0" cy="1750060"/>
           </a:xfrm>
-          <a:prstGeom prst="line"/>
+          <a:prstGeom prst="line">
+            <a:avLst/>
+          </a:prstGeom>
           <a:ln w="12700">
             <a:solidFill>
               <a:srgbClr val="FFFFFF"/>
@@ -15463,7 +16223,6 @@
             <a:defPPr/>
           </a:lstStyle>
           <a:p>
-            <a:pPr/>
             <a:endParaRPr lang="en-US"/>
           </a:p>
         </p:txBody>
@@ -15479,7 +16238,9 @@
             <a:off x="831850" y="1601216"/>
             <a:ext cx="10528300" cy="0"/>
           </a:xfrm>
-          <a:prstGeom prst="line"/>
+          <a:prstGeom prst="line">
+            <a:avLst/>
+          </a:prstGeom>
           <a:ln w="12700">
             <a:solidFill>
               <a:srgbClr val="FFFFFF"/>
@@ -15506,7 +16267,6 @@
             <a:defPPr/>
           </a:lstStyle>
           <a:p>
-            <a:pPr/>
             <a:endParaRPr lang="en-US"/>
           </a:p>
         </p:txBody>
@@ -15522,7 +16282,9 @@
             <a:off x="831850" y="3338576"/>
             <a:ext cx="10528300" cy="0"/>
           </a:xfrm>
-          <a:prstGeom prst="line"/>
+          <a:prstGeom prst="line">
+            <a:avLst/>
+          </a:prstGeom>
           <a:ln w="12700">
             <a:solidFill>
               <a:srgbClr val="FFFFFF"/>
@@ -15549,7 +16311,6 @@
             <a:defPPr/>
           </a:lstStyle>
           <a:p>
-            <a:pPr/>
             <a:endParaRPr lang="en-US"/>
           </a:p>
         </p:txBody>
@@ -15565,7 +16326,9 @@
             <a:off x="281940" y="5212715"/>
             <a:ext cx="2532888" cy="25908"/>
           </a:xfrm>
-          <a:prstGeom prst="rect"/>
+          <a:prstGeom prst="rect">
+            <a:avLst/>
+          </a:prstGeom>
           <a:solidFill>
             <a:srgbClr val="000000"/>
           </a:solidFill>
@@ -15595,7 +16358,6 @@
             <a:defPPr/>
           </a:lstStyle>
           <a:p>
-            <a:pPr/>
             <a:endParaRPr lang="en-US"/>
           </a:p>
         </p:txBody>
@@ -15611,7 +16373,9 @@
             <a:off x="929640" y="703804"/>
             <a:ext cx="2528368" cy="683121"/>
           </a:xfrm>
-          <a:prstGeom prst="rect"/>
+          <a:prstGeom prst="rect">
+            <a:avLst/>
+          </a:prstGeom>
           <a:noFill/>
         </p:spPr>
         <p:style>
@@ -15638,9 +16402,8 @@
             <a:defPPr/>
           </a:lstStyle>
           <a:p>
-            <a:pPr/>
-            <a:r>
-              <a:rPr lang="en-US" sz="4406" dirty="1">
+            <a:r>
+              <a:rPr lang="en-US" sz="4406">
                 <a:solidFill>
                   <a:srgbClr val="00AFEF"/>
                 </a:solidFill>
@@ -15662,7 +16425,9 @@
             <a:off x="3364738" y="1680744"/>
             <a:ext cx="206236" cy="496714"/>
           </a:xfrm>
-          <a:prstGeom prst="rect"/>
+          <a:prstGeom prst="rect">
+            <a:avLst/>
+          </a:prstGeom>
           <a:noFill/>
         </p:spPr>
         <p:style>
@@ -15689,9 +16454,8 @@
             <a:defPPr/>
           </a:lstStyle>
           <a:p>
-            <a:pPr/>
-            <a:r>
-              <a:rPr lang="en-US" sz="3204" b="1" dirty="1">
+            <a:r>
+              <a:rPr lang="en-US" sz="3204" b="1">
                 <a:solidFill>
                   <a:srgbClr val="FFFFFF"/>
                 </a:solidFill>
@@ -15713,7 +16477,9 @@
             <a:off x="5117338" y="1680744"/>
             <a:ext cx="206236" cy="496714"/>
           </a:xfrm>
-          <a:prstGeom prst="rect"/>
+          <a:prstGeom prst="rect">
+            <a:avLst/>
+          </a:prstGeom>
           <a:noFill/>
         </p:spPr>
         <p:style>
@@ -15740,9 +16506,8 @@
             <a:defPPr/>
           </a:lstStyle>
           <a:p>
-            <a:pPr/>
-            <a:r>
-              <a:rPr lang="en-US" sz="3204" b="1" dirty="1">
+            <a:r>
+              <a:rPr lang="en-US" sz="3204" b="1">
                 <a:solidFill>
                   <a:srgbClr val="FFFFFF"/>
                 </a:solidFill>
@@ -15764,7 +16529,9 @@
             <a:off x="6870192" y="1680744"/>
             <a:ext cx="206236" cy="496714"/>
           </a:xfrm>
-          <a:prstGeom prst="rect"/>
+          <a:prstGeom prst="rect">
+            <a:avLst/>
+          </a:prstGeom>
           <a:noFill/>
         </p:spPr>
         <p:style>
@@ -15791,9 +16558,8 @@
             <a:defPPr/>
           </a:lstStyle>
           <a:p>
-            <a:pPr/>
-            <a:r>
-              <a:rPr lang="en-US" sz="3204" b="1" dirty="1">
+            <a:r>
+              <a:rPr lang="en-US" sz="3204" b="1">
                 <a:solidFill>
                   <a:srgbClr val="FFFFFF"/>
                 </a:solidFill>
@@ -15815,7 +16581,9 @@
             <a:off x="8623046" y="1680744"/>
             <a:ext cx="206236" cy="496714"/>
           </a:xfrm>
-          <a:prstGeom prst="rect"/>
+          <a:prstGeom prst="rect">
+            <a:avLst/>
+          </a:prstGeom>
           <a:noFill/>
         </p:spPr>
         <p:style>
@@ -15842,9 +16610,8 @@
             <a:defPPr/>
           </a:lstStyle>
           <a:p>
-            <a:pPr/>
-            <a:r>
-              <a:rPr lang="en-US" sz="3204" b="1" dirty="1">
+            <a:r>
+              <a:rPr lang="en-US" sz="3204" b="1">
                 <a:solidFill>
                   <a:srgbClr val="FFFFFF"/>
                 </a:solidFill>
@@ -15866,7 +16633,9 @@
             <a:off x="10376027" y="1680744"/>
             <a:ext cx="206236" cy="496714"/>
           </a:xfrm>
-          <a:prstGeom prst="rect"/>
+          <a:prstGeom prst="rect">
+            <a:avLst/>
+          </a:prstGeom>
           <a:noFill/>
         </p:spPr>
         <p:style>
@@ -15893,9 +16662,8 @@
             <a:defPPr/>
           </a:lstStyle>
           <a:p>
-            <a:pPr/>
-            <a:r>
-              <a:rPr lang="en-US" sz="3204" b="1" dirty="1">
+            <a:r>
+              <a:rPr lang="en-US" sz="3204" b="1">
                 <a:solidFill>
                   <a:srgbClr val="FFFFFF"/>
                 </a:solidFill>
@@ -15917,7 +16685,9 @@
             <a:off x="1611757" y="2839238"/>
             <a:ext cx="206236" cy="496714"/>
           </a:xfrm>
-          <a:prstGeom prst="rect"/>
+          <a:prstGeom prst="rect">
+            <a:avLst/>
+          </a:prstGeom>
           <a:noFill/>
         </p:spPr>
         <p:style>
@@ -15944,9 +16714,8 @@
             <a:defPPr/>
           </a:lstStyle>
           <a:p>
-            <a:pPr/>
-            <a:r>
-              <a:rPr lang="en-US" sz="3204" b="1" dirty="1">
+            <a:r>
+              <a:rPr lang="en-US" sz="3204" b="1">
                 <a:solidFill>
                   <a:srgbClr val="FFFFFF"/>
                 </a:solidFill>
@@ -15968,7 +16737,9 @@
             <a:off x="281940" y="4820438"/>
             <a:ext cx="2535824" cy="496714"/>
           </a:xfrm>
-          <a:prstGeom prst="rect"/>
+          <a:prstGeom prst="rect">
+            <a:avLst/>
+          </a:prstGeom>
           <a:noFill/>
         </p:spPr>
         <p:style>
@@ -15995,9 +16766,8 @@
             <a:defPPr/>
           </a:lstStyle>
           <a:p>
-            <a:pPr/>
-            <a:r>
-              <a:rPr lang="en-US" sz="3204" dirty="1">
+            <a:r>
+              <a:rPr lang="en-US" sz="3204">
                 <a:solidFill>
                   <a:srgbClr val="000000"/>
                 </a:solidFill>
@@ -16019,7 +16789,9 @@
             <a:off x="739140" y="5303417"/>
             <a:ext cx="5737715" cy="433834"/>
           </a:xfrm>
-          <a:prstGeom prst="rect"/>
+          <a:prstGeom prst="rect">
+            <a:avLst/>
+          </a:prstGeom>
           <a:noFill/>
         </p:spPr>
         <p:style>
@@ -16046,9 +16818,8 @@
             <a:defPPr/>
           </a:lstStyle>
           <a:p>
-            <a:pPr/>
-            <a:r>
-              <a:rPr lang="en-US" sz="2798" dirty="1">
+            <a:r>
+              <a:rPr lang="en-US" sz="2798">
                 <a:solidFill>
                   <a:srgbClr val="000000"/>
                 </a:solidFill>
@@ -16070,7 +16841,9 @@
             <a:off x="6467221" y="5303417"/>
             <a:ext cx="182557" cy="433834"/>
           </a:xfrm>
-          <a:prstGeom prst="rect"/>
+          <a:prstGeom prst="rect">
+            <a:avLst/>
+          </a:prstGeom>
           <a:noFill/>
         </p:spPr>
         <p:style>
@@ -16097,9 +16870,8 @@
             <a:defPPr/>
           </a:lstStyle>
           <a:p>
-            <a:pPr/>
-            <a:r>
-              <a:rPr lang="en-US" sz="2798" i="1" dirty="1">
+            <a:r>
+              <a:rPr lang="en-US" sz="2798" i="1">
                 <a:solidFill>
                   <a:srgbClr val="000000"/>
                 </a:solidFill>
@@ -16121,7 +16893,9 @@
             <a:off x="6730873" y="5303417"/>
             <a:ext cx="544722" cy="433834"/>
           </a:xfrm>
-          <a:prstGeom prst="rect"/>
+          <a:prstGeom prst="rect">
+            <a:avLst/>
+          </a:prstGeom>
           <a:noFill/>
         </p:spPr>
         <p:style>
@@ -16148,9 +16922,8 @@
             <a:defPPr/>
           </a:lstStyle>
           <a:p>
-            <a:pPr/>
-            <a:r>
-              <a:rPr lang="en-US" sz="2798" dirty="1">
+            <a:r>
+              <a:rPr lang="en-US" sz="2798">
                 <a:solidFill>
                   <a:srgbClr val="000000"/>
                 </a:solidFill>
@@ -16172,7 +16945,9 @@
             <a:off x="739140" y="5730702"/>
             <a:ext cx="5925251" cy="433462"/>
           </a:xfrm>
-          <a:prstGeom prst="rect"/>
+          <a:prstGeom prst="rect">
+            <a:avLst/>
+          </a:prstGeom>
           <a:noFill/>
         </p:spPr>
         <p:style>
@@ -16199,9 +16974,8 @@
             <a:defPPr/>
           </a:lstStyle>
           <a:p>
-            <a:pPr/>
-            <a:r>
-              <a:rPr lang="en-US" sz="2796" dirty="1">
+            <a:r>
+              <a:rPr lang="en-US" sz="2796">
                 <a:solidFill>
                   <a:srgbClr val="000000"/>
                 </a:solidFill>
@@ -16223,7 +16997,9 @@
             <a:off x="6660769" y="5730702"/>
             <a:ext cx="182401" cy="433462"/>
           </a:xfrm>
-          <a:prstGeom prst="rect"/>
+          <a:prstGeom prst="rect">
+            <a:avLst/>
+          </a:prstGeom>
           <a:noFill/>
         </p:spPr>
         <p:style>
@@ -16250,9 +17026,8 @@
             <a:defPPr/>
           </a:lstStyle>
           <a:p>
-            <a:pPr/>
-            <a:r>
-              <a:rPr lang="en-US" sz="2796" i="1" dirty="1">
+            <a:r>
+              <a:rPr lang="en-US" sz="2796" i="1">
                 <a:solidFill>
                   <a:srgbClr val="000000"/>
                 </a:solidFill>
@@ -16274,7 +17049,9 @@
             <a:off x="6922897" y="5730702"/>
             <a:ext cx="544255" cy="433462"/>
           </a:xfrm>
-          <a:prstGeom prst="rect"/>
+          <a:prstGeom prst="rect">
+            <a:avLst/>
+          </a:prstGeom>
           <a:noFill/>
         </p:spPr>
         <p:style>
@@ -16301,9 +17078,8 @@
             <a:defPPr/>
           </a:lstStyle>
           <a:p>
-            <a:pPr/>
-            <a:r>
-              <a:rPr lang="en-US" sz="2796" dirty="1">
+            <a:r>
+              <a:rPr lang="en-US" sz="2796">
                 <a:solidFill>
                   <a:srgbClr val="000000"/>
                 </a:solidFill>
@@ -16325,7 +17101,9 @@
             <a:off x="739140" y="6157422"/>
             <a:ext cx="4479568" cy="433462"/>
           </a:xfrm>
-          <a:prstGeom prst="rect"/>
+          <a:prstGeom prst="rect">
+            <a:avLst/>
+          </a:prstGeom>
           <a:noFill/>
         </p:spPr>
         <p:style>
@@ -16352,9 +17130,8 @@
             <a:defPPr/>
           </a:lstStyle>
           <a:p>
-            <a:pPr/>
-            <a:r>
-              <a:rPr lang="en-US" sz="2796" dirty="1">
+            <a:r>
+              <a:rPr lang="en-US" sz="2796">
                 <a:solidFill>
                   <a:srgbClr val="000000"/>
                 </a:solidFill>
@@ -16367,12 +17144,15 @@
       </p:sp>
     </p:spTree>
   </p:cSld>
+  <p:clrMapOvr>
+    <a:masterClrMapping/>
+  </p:clrMapOvr>
 </p:sld>
 </file>
 
 <file path=ppt/slides/slide9.xml><?xml version="1.0" encoding="utf-8"?>
 <p:sld xmlns:a="http://schemas.openxmlformats.org/drawingml/2006/main" xmlns:r="http://schemas.openxmlformats.org/officeDocument/2006/relationships" xmlns:p="http://schemas.openxmlformats.org/presentationml/2006/main">
-  <p:cSld name="">
+  <p:cSld>
     <p:spTree>
       <p:nvGrpSpPr>
         <p:cNvPr id="1" name=""/>
@@ -16398,7 +17178,9 @@
             <a:off x="0" y="-1"/>
             <a:ext cx="12192000" cy="6857999"/>
           </a:xfrm>
-          <a:prstGeom prst="rect"/>
+          <a:prstGeom prst="rect">
+            <a:avLst/>
+          </a:prstGeom>
           <a:solidFill>
             <a:srgbClr val="FFFFFF"/>
           </a:solidFill>
@@ -16428,7 +17210,6 @@
             <a:defPPr/>
           </a:lstStyle>
           <a:p>
-            <a:pPr/>
             <a:endParaRPr lang="en-US"/>
           </a:p>
         </p:txBody>
@@ -16444,7 +17225,9 @@
             <a:off x="838200" y="1601216"/>
             <a:ext cx="1752600" cy="579120"/>
           </a:xfrm>
-          <a:prstGeom prst="rect"/>
+          <a:prstGeom prst="rect">
+            <a:avLst/>
+          </a:prstGeom>
           <a:solidFill>
             <a:srgbClr val="7E7E7E"/>
           </a:solidFill>
@@ -16474,7 +17257,6 @@
             <a:defPPr/>
           </a:lstStyle>
           <a:p>
-            <a:pPr/>
             <a:endParaRPr lang="en-US"/>
           </a:p>
         </p:txBody>
@@ -16490,7 +17272,9 @@
             <a:off x="2590800" y="1601216"/>
             <a:ext cx="1752600" cy="579120"/>
           </a:xfrm>
-          <a:prstGeom prst="rect"/>
+          <a:prstGeom prst="rect">
+            <a:avLst/>
+          </a:prstGeom>
           <a:solidFill>
             <a:srgbClr val="FFC000"/>
           </a:solidFill>
@@ -16520,7 +17304,6 @@
             <a:defPPr/>
           </a:lstStyle>
           <a:p>
-            <a:pPr/>
             <a:endParaRPr lang="en-US"/>
           </a:p>
         </p:txBody>
@@ -16536,7 +17319,9 @@
             <a:off x="4343400" y="1601216"/>
             <a:ext cx="1752600" cy="579120"/>
           </a:xfrm>
-          <a:prstGeom prst="rect"/>
+          <a:prstGeom prst="rect">
+            <a:avLst/>
+          </a:prstGeom>
           <a:solidFill>
             <a:srgbClr val="FFC000">
               <a:alpha val="24706"/>
@@ -16568,7 +17353,6 @@
             <a:defPPr/>
           </a:lstStyle>
           <a:p>
-            <a:pPr/>
             <a:endParaRPr lang="en-US"/>
           </a:p>
         </p:txBody>
@@ -16584,7 +17368,9 @@
             <a:off x="6096000" y="1601216"/>
             <a:ext cx="1752600" cy="579120"/>
           </a:xfrm>
-          <a:prstGeom prst="rect"/>
+          <a:prstGeom prst="rect">
+            <a:avLst/>
+          </a:prstGeom>
           <a:solidFill>
             <a:srgbClr val="FF0000">
               <a:alpha val="24706"/>
@@ -16616,7 +17402,6 @@
             <a:defPPr/>
           </a:lstStyle>
           <a:p>
-            <a:pPr/>
             <a:endParaRPr lang="en-US"/>
           </a:p>
         </p:txBody>
@@ -16632,7 +17417,9 @@
             <a:off x="7848600" y="1601216"/>
             <a:ext cx="1752600" cy="579120"/>
           </a:xfrm>
-          <a:prstGeom prst="rect"/>
+          <a:prstGeom prst="rect">
+            <a:avLst/>
+          </a:prstGeom>
           <a:solidFill>
             <a:srgbClr val="FF0000">
               <a:alpha val="24706"/>
@@ -16664,7 +17451,6 @@
             <a:defPPr/>
           </a:lstStyle>
           <a:p>
-            <a:pPr/>
             <a:endParaRPr lang="en-US"/>
           </a:p>
         </p:txBody>
@@ -16680,7 +17466,9 @@
             <a:off x="9601200" y="1601216"/>
             <a:ext cx="1752600" cy="579120"/>
           </a:xfrm>
-          <a:prstGeom prst="rect"/>
+          <a:prstGeom prst="rect">
+            <a:avLst/>
+          </a:prstGeom>
           <a:solidFill>
             <a:srgbClr val="FF0000">
               <a:alpha val="24706"/>
@@ -16712,7 +17500,6 @@
             <a:defPPr/>
           </a:lstStyle>
           <a:p>
-            <a:pPr/>
             <a:endParaRPr lang="en-US"/>
           </a:p>
         </p:txBody>
@@ -16728,7 +17515,9 @@
             <a:off x="838200" y="2180336"/>
             <a:ext cx="1752600" cy="579120"/>
           </a:xfrm>
-          <a:prstGeom prst="rect"/>
+          <a:prstGeom prst="rect">
+            <a:avLst/>
+          </a:prstGeom>
           <a:solidFill>
             <a:srgbClr val="FFFFFF"/>
           </a:solidFill>
@@ -16758,7 +17547,6 @@
             <a:defPPr/>
           </a:lstStyle>
           <a:p>
-            <a:pPr/>
             <a:endParaRPr lang="en-US"/>
           </a:p>
         </p:txBody>
@@ -16774,7 +17562,9 @@
             <a:off x="2590800" y="2180336"/>
             <a:ext cx="1752600" cy="579120"/>
           </a:xfrm>
-          <a:prstGeom prst="rect"/>
+          <a:prstGeom prst="rect">
+            <a:avLst/>
+          </a:prstGeom>
           <a:solidFill>
             <a:srgbClr val="FFFFFF"/>
           </a:solidFill>
@@ -16804,7 +17594,6 @@
             <a:defPPr/>
           </a:lstStyle>
           <a:p>
-            <a:pPr/>
             <a:endParaRPr lang="en-US"/>
           </a:p>
         </p:txBody>
@@ -16820,7 +17609,9 @@
             <a:off x="4343400" y="2180336"/>
             <a:ext cx="1752600" cy="579120"/>
           </a:xfrm>
-          <a:prstGeom prst="rect"/>
+          <a:prstGeom prst="rect">
+            <a:avLst/>
+          </a:prstGeom>
           <a:solidFill>
             <a:srgbClr val="FFFFFF"/>
           </a:solidFill>
@@ -16850,7 +17641,6 @@
             <a:defPPr/>
           </a:lstStyle>
           <a:p>
-            <a:pPr/>
             <a:endParaRPr lang="en-US"/>
           </a:p>
         </p:txBody>
@@ -16866,7 +17656,9 @@
             <a:off x="6096000" y="2180336"/>
             <a:ext cx="1752600" cy="579120"/>
           </a:xfrm>
-          <a:prstGeom prst="rect"/>
+          <a:prstGeom prst="rect">
+            <a:avLst/>
+          </a:prstGeom>
           <a:solidFill>
             <a:srgbClr val="FFFFFF"/>
           </a:solidFill>
@@ -16896,7 +17688,6 @@
             <a:defPPr/>
           </a:lstStyle>
           <a:p>
-            <a:pPr/>
             <a:endParaRPr lang="en-US"/>
           </a:p>
         </p:txBody>
@@ -16912,7 +17703,9 @@
             <a:off x="7848600" y="2180336"/>
             <a:ext cx="1752600" cy="579120"/>
           </a:xfrm>
-          <a:prstGeom prst="rect"/>
+          <a:prstGeom prst="rect">
+            <a:avLst/>
+          </a:prstGeom>
           <a:solidFill>
             <a:srgbClr val="FFFFFF"/>
           </a:solidFill>
@@ -16942,7 +17735,6 @@
             <a:defPPr/>
           </a:lstStyle>
           <a:p>
-            <a:pPr/>
             <a:endParaRPr lang="en-US"/>
           </a:p>
         </p:txBody>
@@ -16958,7 +17750,9 @@
             <a:off x="9601200" y="2180336"/>
             <a:ext cx="1752600" cy="579120"/>
           </a:xfrm>
-          <a:prstGeom prst="rect"/>
+          <a:prstGeom prst="rect">
+            <a:avLst/>
+          </a:prstGeom>
           <a:solidFill>
             <a:srgbClr val="FFFFFF"/>
           </a:solidFill>
@@ -16988,7 +17782,6 @@
             <a:defPPr/>
           </a:lstStyle>
           <a:p>
-            <a:pPr/>
             <a:endParaRPr lang="en-US"/>
           </a:p>
         </p:txBody>
@@ -17004,7 +17797,9 @@
             <a:off x="838200" y="2759456"/>
             <a:ext cx="1752600" cy="579120"/>
           </a:xfrm>
-          <a:prstGeom prst="rect"/>
+          <a:prstGeom prst="rect">
+            <a:avLst/>
+          </a:prstGeom>
           <a:solidFill>
             <a:srgbClr val="00AF50">
               <a:alpha val="24706"/>
@@ -17036,7 +17831,6 @@
             <a:defPPr/>
           </a:lstStyle>
           <a:p>
-            <a:pPr/>
             <a:endParaRPr lang="en-US"/>
           </a:p>
         </p:txBody>
@@ -17052,7 +17846,9 @@
             <a:off x="2590800" y="2759456"/>
             <a:ext cx="1752600" cy="579120"/>
           </a:xfrm>
-          <a:prstGeom prst="rect"/>
+          <a:prstGeom prst="rect">
+            <a:avLst/>
+          </a:prstGeom>
           <a:solidFill>
             <a:srgbClr val="FFFFFF">
               <a:alpha val="24706"/>
@@ -17084,7 +17880,6 @@
             <a:defPPr/>
           </a:lstStyle>
           <a:p>
-            <a:pPr/>
             <a:endParaRPr lang="en-US"/>
           </a:p>
         </p:txBody>
@@ -17100,7 +17895,9 @@
             <a:off x="4343400" y="2759456"/>
             <a:ext cx="1752600" cy="579120"/>
           </a:xfrm>
-          <a:prstGeom prst="rect"/>
+          <a:prstGeom prst="rect">
+            <a:avLst/>
+          </a:prstGeom>
           <a:solidFill>
             <a:srgbClr val="FFFFFF">
               <a:alpha val="24706"/>
@@ -17132,7 +17929,6 @@
             <a:defPPr/>
           </a:lstStyle>
           <a:p>
-            <a:pPr/>
             <a:endParaRPr lang="en-US"/>
           </a:p>
         </p:txBody>
@@ -17148,7 +17944,9 @@
             <a:off x="6096000" y="2759456"/>
             <a:ext cx="1752600" cy="579120"/>
           </a:xfrm>
-          <a:prstGeom prst="rect"/>
+          <a:prstGeom prst="rect">
+            <a:avLst/>
+          </a:prstGeom>
           <a:solidFill>
             <a:srgbClr val="FFFFFF">
               <a:alpha val="24706"/>
@@ -17180,7 +17978,6 @@
             <a:defPPr/>
           </a:lstStyle>
           <a:p>
-            <a:pPr/>
             <a:endParaRPr lang="en-US"/>
           </a:p>
         </p:txBody>
@@ -17196,7 +17993,9 @@
             <a:off x="7848600" y="2759456"/>
             <a:ext cx="1752600" cy="579120"/>
           </a:xfrm>
-          <a:prstGeom prst="rect"/>
+          <a:prstGeom prst="rect">
+            <a:avLst/>
+          </a:prstGeom>
           <a:solidFill>
             <a:srgbClr val="FFFFFF">
               <a:alpha val="24706"/>
@@ -17228,7 +18027,6 @@
             <a:defPPr/>
           </a:lstStyle>
           <a:p>
-            <a:pPr/>
             <a:endParaRPr lang="en-US"/>
           </a:p>
         </p:txBody>
@@ -17244,7 +18042,9 @@
             <a:off x="9601200" y="2759456"/>
             <a:ext cx="1752600" cy="579120"/>
           </a:xfrm>
-          <a:prstGeom prst="rect"/>
+          <a:prstGeom prst="rect">
+            <a:avLst/>
+          </a:prstGeom>
           <a:solidFill>
             <a:srgbClr val="FFFFFF">
               <a:alpha val="24706"/>
@@ -17276,7 +18076,6 @@
             <a:defPPr/>
           </a:lstStyle>
           <a:p>
-            <a:pPr/>
             <a:endParaRPr lang="en-US"/>
           </a:p>
         </p:txBody>
@@ -17292,7 +18091,9 @@
             <a:off x="2590800" y="1594866"/>
             <a:ext cx="0" cy="1750060"/>
           </a:xfrm>
-          <a:prstGeom prst="line"/>
+          <a:prstGeom prst="line">
+            <a:avLst/>
+          </a:prstGeom>
           <a:ln w="12700">
             <a:solidFill>
               <a:srgbClr val="FFFFFF"/>
@@ -17319,7 +18120,6 @@
             <a:defPPr/>
           </a:lstStyle>
           <a:p>
-            <a:pPr/>
             <a:endParaRPr lang="en-US"/>
           </a:p>
         </p:txBody>
@@ -17335,7 +18135,9 @@
             <a:off x="4343400" y="1594866"/>
             <a:ext cx="0" cy="1750060"/>
           </a:xfrm>
-          <a:prstGeom prst="line"/>
+          <a:prstGeom prst="line">
+            <a:avLst/>
+          </a:prstGeom>
           <a:ln w="12700">
             <a:solidFill>
               <a:srgbClr val="FFFFFF"/>
@@ -17362,7 +18164,6 @@
             <a:defPPr/>
           </a:lstStyle>
           <a:p>
-            <a:pPr/>
             <a:endParaRPr lang="en-US"/>
           </a:p>
         </p:txBody>
@@ -17378,7 +18179,9 @@
             <a:off x="6096000" y="1594866"/>
             <a:ext cx="0" cy="1750060"/>
           </a:xfrm>
-          <a:prstGeom prst="line"/>
+          <a:prstGeom prst="line">
+            <a:avLst/>
+          </a:prstGeom>
           <a:ln w="12700">
             <a:solidFill>
               <a:srgbClr val="FFFFFF"/>
@@ -17405,7 +18208,6 @@
             <a:defPPr/>
           </a:lstStyle>
           <a:p>
-            <a:pPr/>
             <a:endParaRPr lang="en-US"/>
           </a:p>
         </p:txBody>
@@ -17421,7 +18223,9 @@
             <a:off x="7848600" y="1594866"/>
             <a:ext cx="0" cy="1750060"/>
           </a:xfrm>
-          <a:prstGeom prst="line"/>
+          <a:prstGeom prst="line">
+            <a:avLst/>
+          </a:prstGeom>
           <a:ln w="12700">
             <a:solidFill>
               <a:srgbClr val="FFFFFF"/>
@@ -17448,7 +18252,6 @@
             <a:defPPr/>
           </a:lstStyle>
           <a:p>
-            <a:pPr/>
             <a:endParaRPr lang="en-US"/>
           </a:p>
         </p:txBody>
@@ -17464,7 +18267,9 @@
             <a:off x="9601200" y="1594866"/>
             <a:ext cx="0" cy="1750060"/>
           </a:xfrm>
-          <a:prstGeom prst="line"/>
+          <a:prstGeom prst="line">
+            <a:avLst/>
+          </a:prstGeom>
           <a:ln w="12700">
             <a:solidFill>
               <a:srgbClr val="FFFFFF"/>
@@ -17491,7 +18296,6 @@
             <a:defPPr/>
           </a:lstStyle>
           <a:p>
-            <a:pPr/>
             <a:endParaRPr lang="en-US"/>
           </a:p>
         </p:txBody>
@@ -17507,7 +18311,9 @@
             <a:off x="831850" y="2180336"/>
             <a:ext cx="10528300" cy="0"/>
           </a:xfrm>
-          <a:prstGeom prst="line"/>
+          <a:prstGeom prst="line">
+            <a:avLst/>
+          </a:prstGeom>
           <a:ln w="38100">
             <a:solidFill>
               <a:srgbClr val="FFFFFF"/>
@@ -17534,7 +18340,6 @@
             <a:defPPr/>
           </a:lstStyle>
           <a:p>
-            <a:pPr/>
             <a:endParaRPr lang="en-US"/>
           </a:p>
         </p:txBody>
@@ -17550,7 +18355,9 @@
             <a:off x="831850" y="2759456"/>
             <a:ext cx="10528300" cy="0"/>
           </a:xfrm>
-          <a:prstGeom prst="line"/>
+          <a:prstGeom prst="line">
+            <a:avLst/>
+          </a:prstGeom>
           <a:ln w="12700">
             <a:solidFill>
               <a:srgbClr val="FFFFFF"/>
@@ -17577,7 +18384,6 @@
             <a:defPPr/>
           </a:lstStyle>
           <a:p>
-            <a:pPr/>
             <a:endParaRPr lang="en-US"/>
           </a:p>
         </p:txBody>
@@ -17593,7 +18399,9 @@
             <a:off x="838200" y="1594866"/>
             <a:ext cx="0" cy="1750060"/>
           </a:xfrm>
-          <a:prstGeom prst="line"/>
+          <a:prstGeom prst="line">
+            <a:avLst/>
+          </a:prstGeom>
           <a:ln w="12700">
             <a:solidFill>
               <a:srgbClr val="FFFFFF"/>
@@ -17620,7 +18428,6 @@
             <a:defPPr/>
           </a:lstStyle>
           <a:p>
-            <a:pPr/>
             <a:endParaRPr lang="en-US"/>
           </a:p>
         </p:txBody>
@@ -17636,7 +18443,9 @@
             <a:off x="11353800" y="1594866"/>
             <a:ext cx="0" cy="1750060"/>
           </a:xfrm>
-          <a:prstGeom prst="line"/>
+          <a:prstGeom prst="line">
+            <a:avLst/>
+          </a:prstGeom>
           <a:ln w="12700">
             <a:solidFill>
               <a:srgbClr val="FFFFFF"/>
@@ -17663,7 +18472,6 @@
             <a:defPPr/>
           </a:lstStyle>
           <a:p>
-            <a:pPr/>
             <a:endParaRPr lang="en-US"/>
           </a:p>
         </p:txBody>
@@ -17679,7 +18487,9 @@
             <a:off x="831850" y="1601216"/>
             <a:ext cx="10528300" cy="0"/>
           </a:xfrm>
-          <a:prstGeom prst="line"/>
+          <a:prstGeom prst="line">
+            <a:avLst/>
+          </a:prstGeom>
           <a:ln w="12700">
             <a:solidFill>
               <a:srgbClr val="FFFFFF"/>
@@ -17706,7 +18516,6 @@
             <a:defPPr/>
           </a:lstStyle>
           <a:p>
-            <a:pPr/>
             <a:endParaRPr lang="en-US"/>
           </a:p>
         </p:txBody>
@@ -17722,7 +18531,9 @@
             <a:off x="831850" y="3338576"/>
             <a:ext cx="10528300" cy="0"/>
           </a:xfrm>
-          <a:prstGeom prst="line"/>
+          <a:prstGeom prst="line">
+            <a:avLst/>
+          </a:prstGeom>
           <a:ln w="12700">
             <a:solidFill>
               <a:srgbClr val="FFFFFF"/>
@@ -17749,7 +18560,6 @@
             <a:defPPr/>
           </a:lstStyle>
           <a:p>
-            <a:pPr/>
             <a:endParaRPr lang="en-US"/>
           </a:p>
         </p:txBody>
@@ -17765,7 +18575,9 @@
             <a:off x="281940" y="5212715"/>
             <a:ext cx="2532888" cy="25908"/>
           </a:xfrm>
-          <a:prstGeom prst="rect"/>
+          <a:prstGeom prst="rect">
+            <a:avLst/>
+          </a:prstGeom>
           <a:solidFill>
             <a:srgbClr val="000000"/>
           </a:solidFill>
@@ -17795,7 +18607,6 @@
             <a:defPPr/>
           </a:lstStyle>
           <a:p>
-            <a:pPr/>
             <a:endParaRPr lang="en-US"/>
           </a:p>
         </p:txBody>
@@ -17811,7 +18622,9 @@
             <a:off x="929640" y="703804"/>
             <a:ext cx="2528368" cy="683121"/>
           </a:xfrm>
-          <a:prstGeom prst="rect"/>
+          <a:prstGeom prst="rect">
+            <a:avLst/>
+          </a:prstGeom>
           <a:noFill/>
         </p:spPr>
         <p:style>
@@ -17838,9 +18651,8 @@
             <a:defPPr/>
           </a:lstStyle>
           <a:p>
-            <a:pPr/>
-            <a:r>
-              <a:rPr lang="en-US" sz="4406" dirty="1">
+            <a:r>
+              <a:rPr lang="en-US" sz="4406">
                 <a:solidFill>
                   <a:srgbClr val="00AFEF"/>
                 </a:solidFill>
@@ -17862,7 +18674,9 @@
             <a:off x="3364738" y="1680744"/>
             <a:ext cx="206236" cy="496714"/>
           </a:xfrm>
-          <a:prstGeom prst="rect"/>
+          <a:prstGeom prst="rect">
+            <a:avLst/>
+          </a:prstGeom>
           <a:noFill/>
         </p:spPr>
         <p:style>
@@ -17889,9 +18703,8 @@
             <a:defPPr/>
           </a:lstStyle>
           <a:p>
-            <a:pPr/>
-            <a:r>
-              <a:rPr lang="en-US" sz="3204" b="1" dirty="1">
+            <a:r>
+              <a:rPr lang="en-US" sz="3204" b="1">
                 <a:solidFill>
                   <a:srgbClr val="FFFFFF"/>
                 </a:solidFill>
@@ -17913,7 +18726,9 @@
             <a:off x="5117338" y="1680744"/>
             <a:ext cx="206236" cy="496714"/>
           </a:xfrm>
-          <a:prstGeom prst="rect"/>
+          <a:prstGeom prst="rect">
+            <a:avLst/>
+          </a:prstGeom>
           <a:noFill/>
         </p:spPr>
         <p:style>
@@ -17940,9 +18755,8 @@
             <a:defPPr/>
           </a:lstStyle>
           <a:p>
-            <a:pPr/>
-            <a:r>
-              <a:rPr lang="en-US" sz="3204" b="1" dirty="1">
+            <a:r>
+              <a:rPr lang="en-US" sz="3204" b="1">
                 <a:solidFill>
                   <a:srgbClr val="FFFFFF"/>
                 </a:solidFill>
@@ -17964,7 +18778,9 @@
             <a:off x="6870192" y="1680744"/>
             <a:ext cx="206236" cy="496714"/>
           </a:xfrm>
-          <a:prstGeom prst="rect"/>
+          <a:prstGeom prst="rect">
+            <a:avLst/>
+          </a:prstGeom>
           <a:noFill/>
         </p:spPr>
         <p:style>
@@ -17991,9 +18807,8 @@
             <a:defPPr/>
           </a:lstStyle>
           <a:p>
-            <a:pPr/>
-            <a:r>
-              <a:rPr lang="en-US" sz="3204" b="1" dirty="1">
+            <a:r>
+              <a:rPr lang="en-US" sz="3204" b="1">
                 <a:solidFill>
                   <a:srgbClr val="FFFFFF"/>
                 </a:solidFill>
@@ -18015,7 +18830,9 @@
             <a:off x="8623046" y="1680744"/>
             <a:ext cx="206236" cy="496714"/>
           </a:xfrm>
-          <a:prstGeom prst="rect"/>
+          <a:prstGeom prst="rect">
+            <a:avLst/>
+          </a:prstGeom>
           <a:noFill/>
         </p:spPr>
         <p:style>
@@ -18042,9 +18859,8 @@
             <a:defPPr/>
           </a:lstStyle>
           <a:p>
-            <a:pPr/>
-            <a:r>
-              <a:rPr lang="en-US" sz="3204" b="1" dirty="1">
+            <a:r>
+              <a:rPr lang="en-US" sz="3204" b="1">
                 <a:solidFill>
                   <a:srgbClr val="FFFFFF"/>
                 </a:solidFill>
@@ -18066,7 +18882,9 @@
             <a:off x="10376027" y="1680744"/>
             <a:ext cx="206236" cy="496714"/>
           </a:xfrm>
-          <a:prstGeom prst="rect"/>
+          <a:prstGeom prst="rect">
+            <a:avLst/>
+          </a:prstGeom>
           <a:noFill/>
         </p:spPr>
         <p:style>
@@ -18093,9 +18911,8 @@
             <a:defPPr/>
           </a:lstStyle>
           <a:p>
-            <a:pPr/>
-            <a:r>
-              <a:rPr lang="en-US" sz="3204" b="1" dirty="1">
+            <a:r>
+              <a:rPr lang="en-US" sz="3204" b="1">
                 <a:solidFill>
                   <a:srgbClr val="FFFFFF"/>
                 </a:solidFill>
@@ -18117,7 +18934,9 @@
             <a:off x="1611757" y="2839238"/>
             <a:ext cx="206236" cy="496714"/>
           </a:xfrm>
-          <a:prstGeom prst="rect"/>
+          <a:prstGeom prst="rect">
+            <a:avLst/>
+          </a:prstGeom>
           <a:noFill/>
         </p:spPr>
         <p:style>
@@ -18144,9 +18963,8 @@
             <a:defPPr/>
           </a:lstStyle>
           <a:p>
-            <a:pPr/>
-            <a:r>
-              <a:rPr lang="en-US" sz="3204" b="1" dirty="1">
+            <a:r>
+              <a:rPr lang="en-US" sz="3204" b="1">
                 <a:solidFill>
                   <a:srgbClr val="FFFFFF"/>
                 </a:solidFill>
@@ -18168,7 +18986,9 @@
             <a:off x="281940" y="4820438"/>
             <a:ext cx="2535824" cy="496714"/>
           </a:xfrm>
-          <a:prstGeom prst="rect"/>
+          <a:prstGeom prst="rect">
+            <a:avLst/>
+          </a:prstGeom>
           <a:noFill/>
         </p:spPr>
         <p:style>
@@ -18195,9 +19015,8 @@
             <a:defPPr/>
           </a:lstStyle>
           <a:p>
-            <a:pPr/>
-            <a:r>
-              <a:rPr lang="en-US" sz="3204" dirty="1">
+            <a:r>
+              <a:rPr lang="en-US" sz="3204">
                 <a:solidFill>
                   <a:srgbClr val="000000"/>
                 </a:solidFill>
@@ -18219,7 +19038,9 @@
             <a:off x="739140" y="5303417"/>
             <a:ext cx="5737715" cy="433834"/>
           </a:xfrm>
-          <a:prstGeom prst="rect"/>
+          <a:prstGeom prst="rect">
+            <a:avLst/>
+          </a:prstGeom>
           <a:noFill/>
         </p:spPr>
         <p:style>
@@ -18246,9 +19067,8 @@
             <a:defPPr/>
           </a:lstStyle>
           <a:p>
-            <a:pPr/>
-            <a:r>
-              <a:rPr lang="en-US" sz="2798" dirty="1">
+            <a:r>
+              <a:rPr lang="en-US" sz="2798">
                 <a:solidFill>
                   <a:srgbClr val="000000"/>
                 </a:solidFill>
@@ -18270,7 +19090,9 @@
             <a:off x="6467221" y="5303417"/>
             <a:ext cx="182557" cy="433834"/>
           </a:xfrm>
-          <a:prstGeom prst="rect"/>
+          <a:prstGeom prst="rect">
+            <a:avLst/>
+          </a:prstGeom>
           <a:noFill/>
         </p:spPr>
         <p:style>
@@ -18297,9 +19119,8 @@
             <a:defPPr/>
           </a:lstStyle>
           <a:p>
-            <a:pPr/>
-            <a:r>
-              <a:rPr lang="en-US" sz="2798" i="1" dirty="1">
+            <a:r>
+              <a:rPr lang="en-US" sz="2798" i="1">
                 <a:solidFill>
                   <a:srgbClr val="000000"/>
                 </a:solidFill>
@@ -18321,7 +19142,9 @@
             <a:off x="6730873" y="5303417"/>
             <a:ext cx="544722" cy="433834"/>
           </a:xfrm>
-          <a:prstGeom prst="rect"/>
+          <a:prstGeom prst="rect">
+            <a:avLst/>
+          </a:prstGeom>
           <a:noFill/>
         </p:spPr>
         <p:style>
@@ -18348,9 +19171,8 @@
             <a:defPPr/>
           </a:lstStyle>
           <a:p>
-            <a:pPr/>
-            <a:r>
-              <a:rPr lang="en-US" sz="2798" dirty="1">
+            <a:r>
+              <a:rPr lang="en-US" sz="2798">
                 <a:solidFill>
                   <a:srgbClr val="000000"/>
                 </a:solidFill>
@@ -18372,7 +19194,9 @@
             <a:off x="739140" y="5730702"/>
             <a:ext cx="5925251" cy="433462"/>
           </a:xfrm>
-          <a:prstGeom prst="rect"/>
+          <a:prstGeom prst="rect">
+            <a:avLst/>
+          </a:prstGeom>
           <a:noFill/>
         </p:spPr>
         <p:style>
@@ -18399,9 +19223,8 @@
             <a:defPPr/>
           </a:lstStyle>
           <a:p>
-            <a:pPr/>
-            <a:r>
-              <a:rPr lang="en-US" sz="2796" dirty="1">
+            <a:r>
+              <a:rPr lang="en-US" sz="2796">
                 <a:solidFill>
                   <a:srgbClr val="000000"/>
                 </a:solidFill>
@@ -18423,7 +19246,9 @@
             <a:off x="6660769" y="5730702"/>
             <a:ext cx="182401" cy="433462"/>
           </a:xfrm>
-          <a:prstGeom prst="rect"/>
+          <a:prstGeom prst="rect">
+            <a:avLst/>
+          </a:prstGeom>
           <a:noFill/>
         </p:spPr>
         <p:style>
@@ -18450,9 +19275,8 @@
             <a:defPPr/>
           </a:lstStyle>
           <a:p>
-            <a:pPr/>
-            <a:r>
-              <a:rPr lang="en-US" sz="2796" i="1" dirty="1">
+            <a:r>
+              <a:rPr lang="en-US" sz="2796" i="1">
                 <a:solidFill>
                   <a:srgbClr val="000000"/>
                 </a:solidFill>
@@ -18474,7 +19298,9 @@
             <a:off x="6922897" y="5730702"/>
             <a:ext cx="544255" cy="433462"/>
           </a:xfrm>
-          <a:prstGeom prst="rect"/>
+          <a:prstGeom prst="rect">
+            <a:avLst/>
+          </a:prstGeom>
           <a:noFill/>
         </p:spPr>
         <p:style>
@@ -18501,9 +19327,8 @@
             <a:defPPr/>
           </a:lstStyle>
           <a:p>
-            <a:pPr/>
-            <a:r>
-              <a:rPr lang="en-US" sz="2796" dirty="1">
+            <a:r>
+              <a:rPr lang="en-US" sz="2796">
                 <a:solidFill>
                   <a:srgbClr val="000000"/>
                 </a:solidFill>
@@ -18525,7 +19350,9 @@
             <a:off x="739140" y="6157422"/>
             <a:ext cx="4479568" cy="433462"/>
           </a:xfrm>
-          <a:prstGeom prst="rect"/>
+          <a:prstGeom prst="rect">
+            <a:avLst/>
+          </a:prstGeom>
           <a:noFill/>
         </p:spPr>
         <p:style>
@@ -18552,9 +19379,8 @@
             <a:defPPr/>
           </a:lstStyle>
           <a:p>
-            <a:pPr/>
-            <a:r>
-              <a:rPr lang="en-US" sz="2796" dirty="1">
+            <a:r>
+              <a:rPr lang="en-US" sz="2796">
                 <a:solidFill>
                   <a:srgbClr val="000000"/>
                 </a:solidFill>
@@ -18567,6 +19393,9 @@
       </p:sp>
     </p:spTree>
   </p:cSld>
+  <p:clrMapOvr>
+    <a:masterClrMapping/>
+  </p:clrMapOvr>
 </p:sld>
 </file>
 
@@ -18718,7 +19547,7 @@
       <a:effectStyleLst>
         <a:effectStyle>
           <a:effectLst>
-            <a:outerShdw blurRad="40000" dir="5400000" dist="20000">
+            <a:outerShdw blurRad="40000" dist="20000" dir="5400000">
               <a:srgbClr val="000000">
                 <a:alpha val="38000"/>
               </a:srgbClr>
@@ -18727,7 +19556,7 @@
         </a:effectStyle>
         <a:effectStyle>
           <a:effectLst>
-            <a:outerShdw blurRad="40000" dir="5400000" dist="20000">
+            <a:outerShdw blurRad="40000" dist="20000" dir="5400000">
               <a:srgbClr val="000000">
                 <a:alpha val="38000"/>
               </a:srgbClr>
@@ -18736,7 +19565,7 @@
         </a:effectStyle>
         <a:effectStyle>
           <a:effectLst>
-            <a:outerShdw blurRad="40000" dir="5400000" dist="20000">
+            <a:outerShdw blurRad="40000" dist="20000" dir="5400000">
               <a:srgbClr val="000000">
                 <a:alpha val="38000"/>
               </a:srgbClr>
@@ -18758,5 +19587,6 @@
     </a:fmtScheme>
   </a:themeElements>
   <a:objectDefaults/>
+  <a:extraClrSchemeLst/>
 </a:theme>
 </file>